--- a/perception_ppt/perception_output/knowledge/task2_knowledge.pptx
+++ b/perception_ppt/perception_output/knowledge/task2_knowledge.pptx
@@ -9,31 +9,28 @@
     <p:notesMasterId r:id="rId6"/>
   </p:notesMasterIdLst>
   <p:handoutMasterIdLst>
-    <p:handoutMasterId r:id="rId22"/>
+    <p:handoutMasterId r:id="rId19"/>
   </p:handoutMasterIdLst>
   <p:sldIdLst>
     <p:sldId id="2880" r:id="rId4"/>
-    <p:sldId id="2896" r:id="rId5"/>
-    <p:sldId id="2895" r:id="rId7"/>
-    <p:sldId id="2894" r:id="rId8"/>
-    <p:sldId id="2893" r:id="rId9"/>
-    <p:sldId id="2892" r:id="rId10"/>
-    <p:sldId id="2891" r:id="rId11"/>
-    <p:sldId id="2890" r:id="rId12"/>
-    <p:sldId id="2889" r:id="rId13"/>
-    <p:sldId id="2888" r:id="rId14"/>
-    <p:sldId id="2887" r:id="rId15"/>
-    <p:sldId id="2886" r:id="rId16"/>
-    <p:sldId id="2885" r:id="rId17"/>
-    <p:sldId id="2884" r:id="rId18"/>
-    <p:sldId id="2883" r:id="rId19"/>
-    <p:sldId id="2882" r:id="rId20"/>
-    <p:sldId id="2881" r:id="rId21"/>
+    <p:sldId id="2893" r:id="rId5"/>
+    <p:sldId id="2892" r:id="rId7"/>
+    <p:sldId id="2891" r:id="rId8"/>
+    <p:sldId id="2890" r:id="rId9"/>
+    <p:sldId id="2889" r:id="rId10"/>
+    <p:sldId id="2888" r:id="rId11"/>
+    <p:sldId id="2887" r:id="rId12"/>
+    <p:sldId id="2886" r:id="rId13"/>
+    <p:sldId id="2885" r:id="rId14"/>
+    <p:sldId id="2884" r:id="rId15"/>
+    <p:sldId id="2883" r:id="rId16"/>
+    <p:sldId id="2882" r:id="rId17"/>
+    <p:sldId id="2881" r:id="rId18"/>
   </p:sldIdLst>
   <p:sldSz cx="12192000" cy="6858000"/>
   <p:notesSz cx="6858000" cy="9144000"/>
   <p:custDataLst>
-    <p:tags r:id="rId27"/>
+    <p:tags r:id="rId24"/>
   </p:custDataLst>
   <p:defaultTextStyle>
     <a:defPPr>
@@ -133,12 +130,12 @@
   <p:extLst>
     <p:ext uri="{EFAFB233-063F-42B5-8137-9DF3F51BA10A}">
       <p15:sldGuideLst xmlns:p15="http://schemas.microsoft.com/office/powerpoint/2012/main">
-        <p15:guide id="1" orient="horz" pos="1832" userDrawn="1">
+        <p15:guide id="1" orient="horz" pos="1798" userDrawn="1">
           <p15:clr>
             <a:srgbClr val="A4A3A4"/>
           </p15:clr>
         </p15:guide>
-        <p15:guide id="2" pos="3670" userDrawn="1">
+        <p15:guide id="2" pos="3656" userDrawn="1">
           <p15:clr>
             <a:srgbClr val="A4A3A4"/>
           </p15:clr>
@@ -834,118 +831,6 @@
 </file>
 
 <file path=ppt/notesSlides/notesSlide12.xml><?xml version="1.0" encoding="utf-8"?>
-<p:notes xmlns:a="http://schemas.openxmlformats.org/drawingml/2006/main" xmlns:r="http://schemas.openxmlformats.org/officeDocument/2006/relationships" xmlns:p="http://schemas.openxmlformats.org/presentationml/2006/main">
-  <p:cSld>
-    <p:spTree>
-      <p:nvGrpSpPr>
-        <p:cNvPr id="1" name=""/>
-        <p:cNvGrpSpPr/>
-        <p:nvPr/>
-      </p:nvGrpSpPr>
-      <p:grpSpPr>
-        <a:xfrm>
-          <a:off x="0" y="0"/>
-          <a:ext cx="0" cy="0"/>
-          <a:chOff x="0" y="0"/>
-          <a:chExt cx="0" cy="0"/>
-        </a:xfrm>
-      </p:grpSpPr>
-      <p:sp>
-        <p:nvSpPr>
-          <p:cNvPr id="2" name="幻灯片图像占位符 1"/>
-          <p:cNvSpPr>
-            <a:spLocks noGrp="1" noRot="1" noChangeAspect="1"/>
-          </p:cNvSpPr>
-          <p:nvPr>
-            <p:ph type="sldImg" idx="2"/>
-          </p:nvPr>
-        </p:nvSpPr>
-        <p:spPr/>
-      </p:sp>
-      <p:sp>
-        <p:nvSpPr>
-          <p:cNvPr id="3" name="文本占位符 2"/>
-          <p:cNvSpPr>
-            <a:spLocks noGrp="1"/>
-          </p:cNvSpPr>
-          <p:nvPr>
-            <p:ph type="body" idx="3"/>
-          </p:nvPr>
-        </p:nvSpPr>
-        <p:spPr/>
-        <p:txBody>
-          <a:bodyPr/>
-          <a:lstStyle/>
-          <a:p>
-            <a:endParaRPr lang="zh-CN" altLang="en-US"/>
-          </a:p>
-        </p:txBody>
-      </p:sp>
-    </p:spTree>
-  </p:cSld>
-  <p:clrMapOvr>
-    <a:masterClrMapping/>
-  </p:clrMapOvr>
-</p:notes>
-</file>
-
-<file path=ppt/notesSlides/notesSlide13.xml><?xml version="1.0" encoding="utf-8"?>
-<p:notes xmlns:a="http://schemas.openxmlformats.org/drawingml/2006/main" xmlns:r="http://schemas.openxmlformats.org/officeDocument/2006/relationships" xmlns:p="http://schemas.openxmlformats.org/presentationml/2006/main">
-  <p:cSld>
-    <p:spTree>
-      <p:nvGrpSpPr>
-        <p:cNvPr id="1" name=""/>
-        <p:cNvGrpSpPr/>
-        <p:nvPr/>
-      </p:nvGrpSpPr>
-      <p:grpSpPr>
-        <a:xfrm>
-          <a:off x="0" y="0"/>
-          <a:ext cx="0" cy="0"/>
-          <a:chOff x="0" y="0"/>
-          <a:chExt cx="0" cy="0"/>
-        </a:xfrm>
-      </p:grpSpPr>
-      <p:sp>
-        <p:nvSpPr>
-          <p:cNvPr id="2" name="幻灯片图像占位符 1"/>
-          <p:cNvSpPr>
-            <a:spLocks noGrp="1" noRot="1" noChangeAspect="1"/>
-          </p:cNvSpPr>
-          <p:nvPr>
-            <p:ph type="sldImg" idx="2"/>
-          </p:nvPr>
-        </p:nvSpPr>
-        <p:spPr/>
-      </p:sp>
-      <p:sp>
-        <p:nvSpPr>
-          <p:cNvPr id="3" name="文本占位符 2"/>
-          <p:cNvSpPr>
-            <a:spLocks noGrp="1"/>
-          </p:cNvSpPr>
-          <p:nvPr>
-            <p:ph type="body" idx="3"/>
-          </p:nvPr>
-        </p:nvSpPr>
-        <p:spPr/>
-        <p:txBody>
-          <a:bodyPr/>
-          <a:lstStyle/>
-          <a:p>
-            <a:endParaRPr lang="zh-CN" altLang="en-US"/>
-          </a:p>
-        </p:txBody>
-      </p:sp>
-    </p:spTree>
-  </p:cSld>
-  <p:clrMapOvr>
-    <a:masterClrMapping/>
-  </p:clrMapOvr>
-</p:notes>
-</file>
-
-<file path=ppt/notesSlides/notesSlide14.xml><?xml version="1.0" encoding="utf-8"?>
 <p:notes xmlns:a="http://schemas.openxmlformats.org/drawingml/2006/main" xmlns:r="http://schemas.openxmlformats.org/officeDocument/2006/relationships" xmlns:p="http://schemas.openxmlformats.org/presentationml/2006/main">
   <p:cSld>
     <p:spTree>
@@ -7678,8 +7563,8 @@
         </p:nvSpPr>
         <p:spPr>
           <a:xfrm flipV="1">
-            <a:off x="5382794" y="3951605"/>
-            <a:ext cx="1940560" cy="1148715"/>
+            <a:off x="7538194" y="4134567"/>
+            <a:ext cx="1941223" cy="1149108"/>
           </a:xfrm>
           <a:custGeom>
             <a:avLst/>
@@ -7793,8 +7678,8 @@
         </p:nvGrpSpPr>
         <p:grpSpPr>
           <a:xfrm>
-            <a:off x="5236109" y="2458720"/>
-            <a:ext cx="1892300" cy="1892300"/>
+            <a:off x="7391459" y="2641172"/>
+            <a:ext cx="1892947" cy="1892947"/>
             <a:chOff x="4536" y="4280"/>
             <a:chExt cx="2980" cy="2980"/>
           </a:xfrm>
@@ -7991,8 +7876,8 @@
         </p:nvSpPr>
         <p:spPr>
           <a:xfrm>
-            <a:off x="4388270" y="5166995"/>
-            <a:ext cx="3600000" cy="460375"/>
+            <a:off x="6184076" y="5350373"/>
+            <a:ext cx="4320000" cy="460375"/>
           </a:xfrm>
           <a:prstGeom prst="rect">
             <a:avLst/>
@@ -8005,51 +7890,21 @@
           </a:bodyPr>
           <a:lstStyle/>
           <a:p>
-            <a:pPr marL="0" marR="0" lvl="0" indent="0" algn="ctr" defTabSz="914400" rtl="0" eaLnBrk="1" fontAlgn="auto" latinLnBrk="0" hangingPunct="1">
-              <a:lnSpc>
-                <a:spcPct val="100000"/>
-              </a:lnSpc>
-              <a:spcBef>
-                <a:spcPts val="0"/>
-              </a:spcBef>
-              <a:spcAft>
-                <a:spcPts val="0"/>
-              </a:spcAft>
+            <a:pPr lvl="0" algn="ctr">
               <a:buClrTx/>
               <a:buSzTx/>
               <a:buFontTx/>
-              <a:buNone/>
-              <a:defRPr/>
             </a:pPr>
             <a:r>
-              <a:rPr lang="en-US" altLang="zh-CN" sz="2400" dirty="0" smtClean="0">
-                <a:solidFill>
-                  <a:schemeClr val="tx1"/>
-                </a:solidFill>
-                <a:latin typeface="微软雅黑" panose="020B0503020204020204" pitchFamily="34" charset="-122"/>
-                <a:ea typeface="微软雅黑" panose="020B0503020204020204" pitchFamily="34" charset="-122"/>
-                <a:sym typeface="+mn-ea"/>
-              </a:rPr>
-              <a:t>LLM</a:t>
-            </a:r>
-            <a:r>
-              <a:rPr lang="zh-CN" altLang="en-US" sz="2400" dirty="0" smtClean="0">
-                <a:solidFill>
-                  <a:schemeClr val="tx1"/>
-                </a:solidFill>
-                <a:latin typeface="微软雅黑" panose="020B0503020204020204" pitchFamily="34" charset="-122"/>
-                <a:ea typeface="微软雅黑" panose="020B0503020204020204" pitchFamily="34" charset="-122"/>
-                <a:sym typeface="+mn-ea"/>
-              </a:rPr>
-              <a:t>的工作原理简述</a:t>
-            </a:r>
-            <a:endParaRPr lang="zh-CN" altLang="en-US" sz="2400" dirty="0" smtClean="0">
-              <a:solidFill>
-                <a:schemeClr val="tx1"/>
-              </a:solidFill>
-              <a:latin typeface="微软雅黑" panose="020B0503020204020204" pitchFamily="34" charset="-122"/>
-              <a:ea typeface="微软雅黑" panose="020B0503020204020204" pitchFamily="34" charset="-122"/>
-              <a:sym typeface="+mn-ea"/>
+              <a:rPr lang="en-US" sz="2400" dirty="0" smtClean="0">
+                <a:cs typeface="+mn-ea"/>
+                <a:sym typeface="+mn-lt"/>
+              </a:rPr>
+              <a:t>Agent Skill</a:t>
+            </a:r>
+            <a:endParaRPr lang="en-US" sz="2400" dirty="0" smtClean="0">
+              <a:cs typeface="+mn-ea"/>
+              <a:sym typeface="+mn-lt"/>
             </a:endParaRPr>
           </a:p>
         </p:txBody>
@@ -8066,8 +7921,8 @@
         </p:nvSpPr>
         <p:spPr>
           <a:xfrm>
-            <a:off x="5826024" y="2936875"/>
-            <a:ext cx="682625" cy="1014730"/>
+            <a:off x="7981576" y="3119490"/>
+            <a:ext cx="682858" cy="1014730"/>
           </a:xfrm>
           <a:prstGeom prst="rect">
             <a:avLst/>
@@ -8135,7 +7990,6 @@
                 </a:solidFill>
                 <a:latin typeface="思源宋体" panose="02020700000000000000" charset="-122"/>
                 <a:ea typeface="思源宋体" panose="02020700000000000000" charset="-122"/>
-                <a:sym typeface="+mn-ea"/>
               </a:rPr>
               <a:t>03</a:t>
             </a:r>
@@ -8145,7 +7999,6 @@
               </a:solidFill>
               <a:latin typeface="思源宋体" panose="02020700000000000000" charset="-122"/>
               <a:ea typeface="思源宋体" panose="02020700000000000000" charset="-122"/>
-              <a:sym typeface="+mn-ea"/>
             </a:endParaRPr>
           </a:p>
         </p:txBody>
@@ -8162,8 +8015,8 @@
         </p:nvSpPr>
         <p:spPr>
           <a:xfrm>
-            <a:off x="595630" y="5166995"/>
-            <a:ext cx="3600000" cy="460375"/>
+            <a:off x="1483995" y="5350510"/>
+            <a:ext cx="4320000" cy="460375"/>
           </a:xfrm>
           <a:prstGeom prst="rect">
             <a:avLst/>
@@ -8201,7 +8054,7 @@
                 <a:ea typeface="微软雅黑" panose="020B0503020204020204" pitchFamily="34" charset="-122"/>
                 <a:sym typeface="+mn-ea"/>
               </a:rPr>
-              <a:t>什么是提示词工程</a:t>
+              <a:t>工具调用基础原理与配置</a:t>
             </a:r>
             <a:endParaRPr lang="zh-CN" altLang="zh-CN" sz="2400" b="1" dirty="0" smtClean="0">
               <a:solidFill>
@@ -8226,8 +8079,8 @@
         </p:nvGrpSpPr>
         <p:grpSpPr>
           <a:xfrm>
-            <a:off x="1443301" y="1852930"/>
-            <a:ext cx="2087245" cy="2570480"/>
+            <a:off x="2691210" y="2004060"/>
+            <a:ext cx="2087958" cy="2571359"/>
             <a:chOff x="4536" y="3212"/>
             <a:chExt cx="3287" cy="4048"/>
           </a:xfrm>
@@ -8538,8 +8391,8 @@
         </p:nvSpPr>
         <p:spPr>
           <a:xfrm>
-            <a:off x="2033216" y="3001645"/>
-            <a:ext cx="682625" cy="1014730"/>
+            <a:off x="3281327" y="3153168"/>
+            <a:ext cx="682858" cy="1014730"/>
           </a:xfrm>
           <a:prstGeom prst="rect">
             <a:avLst/>
@@ -8568,410 +8421,6 @@
               </a:solidFill>
               <a:latin typeface="+mj-ea"/>
               <a:ea typeface="+mj-ea"/>
-            </a:endParaRPr>
-          </a:p>
-        </p:txBody>
-      </p:sp>
-      <p:sp>
-        <p:nvSpPr>
-          <p:cNvPr id="5" name="文本框1"/>
-          <p:cNvSpPr txBox="1"/>
-          <p:nvPr>
-            <p:custDataLst>
-              <p:tags r:id="rId13"/>
-            </p:custDataLst>
-          </p:nvPr>
-        </p:nvSpPr>
-        <p:spPr>
-          <a:xfrm>
-            <a:off x="8148320" y="5166995"/>
-            <a:ext cx="3600000" cy="460375"/>
-          </a:xfrm>
-          <a:prstGeom prst="rect">
-            <a:avLst/>
-          </a:prstGeom>
-          <a:noFill/>
-        </p:spPr>
-        <p:txBody>
-          <a:bodyPr wrap="square" rtlCol="0">
-            <a:spAutoFit/>
-          </a:bodyPr>
-          <a:lstStyle/>
-          <a:p>
-            <a:pPr marL="0" marR="0" lvl="0" indent="0" algn="ctr" defTabSz="914400" rtl="0" eaLnBrk="1" fontAlgn="auto" latinLnBrk="0" hangingPunct="1">
-              <a:lnSpc>
-                <a:spcPct val="100000"/>
-              </a:lnSpc>
-              <a:spcBef>
-                <a:spcPts val="0"/>
-              </a:spcBef>
-              <a:spcAft>
-                <a:spcPts val="0"/>
-              </a:spcAft>
-              <a:buClrTx/>
-              <a:buSzTx/>
-              <a:buFontTx/>
-              <a:buNone/>
-              <a:defRPr/>
-            </a:pPr>
-            <a:r>
-              <a:rPr lang="zh-CN" altLang="zh-CN" sz="2400" dirty="0" smtClean="0">
-                <a:solidFill>
-                  <a:schemeClr val="tx1"/>
-                </a:solidFill>
-                <a:latin typeface="微软雅黑" panose="020B0503020204020204" pitchFamily="34" charset="-122"/>
-                <a:ea typeface="微软雅黑" panose="020B0503020204020204" pitchFamily="34" charset="-122"/>
-                <a:sym typeface="+mn-ea"/>
-              </a:rPr>
-              <a:t>结构化提示词与版本管理</a:t>
-            </a:r>
-            <a:endParaRPr lang="zh-CN" altLang="zh-CN" sz="2400" dirty="0" smtClean="0">
-              <a:solidFill>
-                <a:schemeClr val="tx1"/>
-              </a:solidFill>
-              <a:latin typeface="微软雅黑" panose="020B0503020204020204" pitchFamily="34" charset="-122"/>
-              <a:ea typeface="微软雅黑" panose="020B0503020204020204" pitchFamily="34" charset="-122"/>
-              <a:sym typeface="+mn-ea"/>
-            </a:endParaRPr>
-          </a:p>
-        </p:txBody>
-      </p:sp>
-      <p:sp>
-        <p:nvSpPr>
-          <p:cNvPr id="11" name="圆角矩形 34"/>
-          <p:cNvSpPr/>
-          <p:nvPr>
-            <p:custDataLst>
-              <p:tags r:id="rId14"/>
-            </p:custDataLst>
-          </p:nvPr>
-        </p:nvSpPr>
-        <p:spPr>
-          <a:xfrm rot="2700000">
-            <a:off x="8998585" y="2482850"/>
-            <a:ext cx="1892300" cy="1892300"/>
-          </a:xfrm>
-          <a:prstGeom prst="roundRect">
-            <a:avLst>
-              <a:gd name="adj" fmla="val 6319"/>
-            </a:avLst>
-          </a:prstGeom>
-          <a:solidFill>
-            <a:schemeClr val="bg1">
-              <a:lumMod val="95000"/>
-            </a:schemeClr>
-          </a:solidFill>
-          <a:ln>
-            <a:noFill/>
-          </a:ln>
-          <a:effectLst>
-            <a:outerShdw blurRad="152400" dist="63500" dir="8100000" algn="tl" rotWithShape="0">
-              <a:prstClr val="black">
-                <a:alpha val="30000"/>
-              </a:prstClr>
-            </a:outerShdw>
-          </a:effectLst>
-          <a:scene3d>
-            <a:camera prst="orthographicFront"/>
-            <a:lightRig rig="threePt" dir="t"/>
-          </a:scene3d>
-          <a:sp3d prstMaterial="softEdge">
-            <a:bevelT w="38100" h="6350"/>
-          </a:sp3d>
-        </p:spPr>
-        <p:style>
-          <a:lnRef idx="2">
-            <a:schemeClr val="accent1">
-              <a:shade val="50000"/>
-            </a:schemeClr>
-          </a:lnRef>
-          <a:fillRef idx="1">
-            <a:schemeClr val="accent1"/>
-          </a:fillRef>
-          <a:effectRef idx="0">
-            <a:schemeClr val="accent1"/>
-          </a:effectRef>
-          <a:fontRef idx="minor">
-            <a:schemeClr val="lt1"/>
-          </a:fontRef>
-        </p:style>
-        <p:txBody>
-          <a:bodyPr rtlCol="0" anchor="ctr"/>
-          <a:lstStyle/>
-          <a:p>
-            <a:pPr marL="0" marR="0" lvl="0" indent="0" algn="ctr" defTabSz="914400" rtl="0" eaLnBrk="1" fontAlgn="auto" latinLnBrk="0" hangingPunct="1">
-              <a:lnSpc>
-                <a:spcPct val="100000"/>
-              </a:lnSpc>
-              <a:spcBef>
-                <a:spcPts val="0"/>
-              </a:spcBef>
-              <a:spcAft>
-                <a:spcPts val="0"/>
-              </a:spcAft>
-              <a:buClrTx/>
-              <a:buSzTx/>
-              <a:buFontTx/>
-              <a:buNone/>
-              <a:defRPr/>
-            </a:pPr>
-            <a:endParaRPr kumimoji="0" lang="zh-CN" altLang="en-US" sz="2800" b="0" i="0" u="none" strike="noStrike" kern="1200" cap="none" spc="0" normalizeH="0" baseline="0" noProof="0" dirty="0">
-              <a:ln>
-                <a:noFill/>
-              </a:ln>
-              <a:solidFill>
-                <a:prstClr val="white"/>
-              </a:solidFill>
-              <a:effectLst/>
-              <a:uLnTx/>
-              <a:uFillTx/>
-              <a:latin typeface="DIN-BoldItalic" pitchFamily="50" charset="0"/>
-              <a:ea typeface="微软雅黑" panose="020B0503020204020204" pitchFamily="34" charset="-122"/>
-              <a:cs typeface="+mn-cs"/>
-            </a:endParaRPr>
-          </a:p>
-        </p:txBody>
-      </p:sp>
-      <p:sp>
-        <p:nvSpPr>
-          <p:cNvPr id="13" name="圆角矩形 38"/>
-          <p:cNvSpPr/>
-          <p:nvPr>
-            <p:custDataLst>
-              <p:tags r:id="rId15"/>
-            </p:custDataLst>
-          </p:nvPr>
-        </p:nvSpPr>
-        <p:spPr>
-          <a:xfrm rot="2700000">
-            <a:off x="9251214" y="2748280"/>
-            <a:ext cx="1387475" cy="1387475"/>
-          </a:xfrm>
-          <a:prstGeom prst="roundRect">
-            <a:avLst>
-              <a:gd name="adj" fmla="val 6319"/>
-            </a:avLst>
-          </a:prstGeom>
-          <a:solidFill>
-            <a:schemeClr val="tx1">
-              <a:lumMod val="65000"/>
-              <a:lumOff val="35000"/>
-            </a:schemeClr>
-          </a:solidFill>
-          <a:ln>
-            <a:noFill/>
-          </a:ln>
-        </p:spPr>
-        <p:style>
-          <a:lnRef idx="2">
-            <a:schemeClr val="accent1">
-              <a:shade val="50000"/>
-            </a:schemeClr>
-          </a:lnRef>
-          <a:fillRef idx="1">
-            <a:schemeClr val="accent1"/>
-          </a:fillRef>
-          <a:effectRef idx="0">
-            <a:schemeClr val="accent1"/>
-          </a:effectRef>
-          <a:fontRef idx="minor">
-            <a:schemeClr val="lt1"/>
-          </a:fontRef>
-        </p:style>
-        <p:txBody>
-          <a:bodyPr rtlCol="0" anchor="ctr"/>
-          <a:lstStyle/>
-          <a:p>
-            <a:pPr marL="0" marR="0" lvl="0" indent="0" algn="ctr" defTabSz="914400" rtl="0" eaLnBrk="1" fontAlgn="auto" latinLnBrk="0" hangingPunct="1">
-              <a:lnSpc>
-                <a:spcPct val="100000"/>
-              </a:lnSpc>
-              <a:spcBef>
-                <a:spcPts val="0"/>
-              </a:spcBef>
-              <a:spcAft>
-                <a:spcPts val="0"/>
-              </a:spcAft>
-              <a:buClrTx/>
-              <a:buSzTx/>
-              <a:buFontTx/>
-              <a:buNone/>
-              <a:defRPr/>
-            </a:pPr>
-            <a:endParaRPr kumimoji="0" lang="zh-CN" altLang="en-US" sz="1800" b="0" i="0" u="none" strike="noStrike" kern="1200" cap="none" spc="0" normalizeH="0" baseline="0" noProof="0" dirty="0">
-              <a:ln>
-                <a:noFill/>
-              </a:ln>
-              <a:solidFill>
-                <a:prstClr val="white"/>
-              </a:solidFill>
-              <a:effectLst/>
-              <a:uLnTx/>
-              <a:uFillTx/>
-              <a:latin typeface="等线" panose="02010600030101010101" charset="-122"/>
-              <a:ea typeface="微软雅黑" panose="020B0503020204020204" pitchFamily="34" charset="-122"/>
-              <a:cs typeface="+mn-cs"/>
-            </a:endParaRPr>
-          </a:p>
-        </p:txBody>
-      </p:sp>
-      <p:sp>
-        <p:nvSpPr>
-          <p:cNvPr id="14" name="文本框 13"/>
-          <p:cNvSpPr txBox="1"/>
-          <p:nvPr>
-            <p:custDataLst>
-              <p:tags r:id="rId16"/>
-            </p:custDataLst>
-          </p:nvPr>
-        </p:nvSpPr>
-        <p:spPr>
-          <a:xfrm>
-            <a:off x="9603004" y="2908935"/>
-            <a:ext cx="682625" cy="1014730"/>
-          </a:xfrm>
-          <a:prstGeom prst="rect">
-            <a:avLst/>
-          </a:prstGeom>
-          <a:noFill/>
-        </p:spPr>
-        <p:txBody>
-          <a:bodyPr wrap="square" rtlCol="0">
-            <a:spAutoFit/>
-          </a:bodyPr>
-          <a:lstStyle/>
-          <a:p>
-            <a:r>
-              <a:rPr lang="en-US" altLang="zh-CN" sz="6000" b="1">
-                <a:solidFill>
-                  <a:schemeClr val="bg1"/>
-                </a:solidFill>
-                <a:latin typeface="+mj-ea"/>
-                <a:ea typeface="+mj-ea"/>
-              </a:rPr>
-              <a:t>3</a:t>
-            </a:r>
-            <a:endParaRPr lang="en-US" altLang="zh-CN" sz="6000" b="1">
-              <a:solidFill>
-                <a:schemeClr val="bg1"/>
-              </a:solidFill>
-              <a:latin typeface="+mj-ea"/>
-              <a:ea typeface="+mj-ea"/>
-            </a:endParaRPr>
-          </a:p>
-        </p:txBody>
-      </p:sp>
-      <p:sp>
-        <p:nvSpPr>
-          <p:cNvPr id="15" name="任意多边形 42"/>
-          <p:cNvSpPr/>
-          <p:nvPr>
-            <p:custDataLst>
-              <p:tags r:id="rId17"/>
-            </p:custDataLst>
-          </p:nvPr>
-        </p:nvSpPr>
-        <p:spPr>
-          <a:xfrm>
-            <a:off x="9143311" y="1760220"/>
-            <a:ext cx="1940560" cy="1148715"/>
-          </a:xfrm>
-          <a:custGeom>
-            <a:avLst/>
-            <a:gdLst>
-              <a:gd name="connsiteX0" fmla="*/ 0 w 1940313"/>
-              <a:gd name="connsiteY0" fmla="*/ 791737 h 1148576"/>
-              <a:gd name="connsiteX1" fmla="*/ 791737 w 1940313"/>
-              <a:gd name="connsiteY1" fmla="*/ 0 h 1148576"/>
-              <a:gd name="connsiteX2" fmla="*/ 1940313 w 1940313"/>
-              <a:gd name="connsiteY2" fmla="*/ 1148576 h 1148576"/>
-            </a:gdLst>
-            <a:ahLst/>
-            <a:cxnLst>
-              <a:cxn ang="0">
-                <a:pos x="connsiteX0" y="connsiteY0"/>
-              </a:cxn>
-              <a:cxn ang="0">
-                <a:pos x="connsiteX1" y="connsiteY1"/>
-              </a:cxn>
-              <a:cxn ang="0">
-                <a:pos x="connsiteX2" y="connsiteY2"/>
-              </a:cxn>
-            </a:cxnLst>
-            <a:rect l="l" t="t" r="r" b="b"/>
-            <a:pathLst>
-              <a:path w="1940313" h="1148576">
-                <a:moveTo>
-                  <a:pt x="0" y="791737"/>
-                </a:moveTo>
-                <a:lnTo>
-                  <a:pt x="791737" y="0"/>
-                </a:lnTo>
-                <a:lnTo>
-                  <a:pt x="1940313" y="1148576"/>
-                </a:lnTo>
-              </a:path>
-            </a:pathLst>
-          </a:custGeom>
-          <a:noFill/>
-          <a:ln w="12700">
-            <a:solidFill>
-              <a:srgbClr val="8A8B8F"/>
-            </a:solidFill>
-            <a:prstDash val="dash"/>
-            <a:headEnd type="oval" w="med" len="med"/>
-            <a:tailEnd type="triangle" w="med" len="med"/>
-          </a:ln>
-        </p:spPr>
-        <p:style>
-          <a:lnRef idx="2">
-            <a:schemeClr val="accent1">
-              <a:shade val="50000"/>
-            </a:schemeClr>
-          </a:lnRef>
-          <a:fillRef idx="1">
-            <a:schemeClr val="accent1"/>
-          </a:fillRef>
-          <a:effectRef idx="0">
-            <a:schemeClr val="accent1"/>
-          </a:effectRef>
-          <a:fontRef idx="minor">
-            <a:schemeClr val="lt1"/>
-          </a:fontRef>
-        </p:style>
-        <p:txBody>
-          <a:bodyPr rtlCol="0" anchor="ctr"/>
-          <a:lstStyle/>
-          <a:p>
-            <a:pPr marL="0" marR="0" lvl="0" indent="0" algn="ctr" defTabSz="914400" rtl="0" eaLnBrk="1" fontAlgn="auto" latinLnBrk="0" hangingPunct="1">
-              <a:lnSpc>
-                <a:spcPct val="100000"/>
-              </a:lnSpc>
-              <a:spcBef>
-                <a:spcPts val="0"/>
-              </a:spcBef>
-              <a:spcAft>
-                <a:spcPts val="0"/>
-              </a:spcAft>
-              <a:buClrTx/>
-              <a:buSzTx/>
-              <a:buFontTx/>
-              <a:buNone/>
-              <a:defRPr/>
-            </a:pPr>
-            <a:endParaRPr kumimoji="0" lang="zh-CN" altLang="en-US" sz="1800" b="0" i="0" u="none" strike="noStrike" kern="1200" cap="none" spc="0" normalizeH="0" baseline="0" noProof="0" dirty="0">
-              <a:ln>
-                <a:noFill/>
-              </a:ln>
-              <a:solidFill>
-                <a:prstClr val="white"/>
-              </a:solidFill>
-              <a:effectLst/>
-              <a:uLnTx/>
-              <a:uFillTx/>
-              <a:latin typeface="等线" panose="02010600030101010101" charset="-122"/>
-              <a:ea typeface="微软雅黑" panose="020B0503020204020204" pitchFamily="34" charset="-122"/>
-              <a:cs typeface="+mn-cs"/>
             </a:endParaRPr>
           </a:p>
         </p:txBody>
@@ -9265,7 +8714,7 @@
                 <a:cs typeface="微软雅黑" panose="020B0503020204020204" pitchFamily="34" charset="-122"/>
                 <a:sym typeface="+mn-ea"/>
               </a:rPr>
-              <a:t>模型更像一个极其强大但需要明确边界的执行者：它依赖上下文中的具体指令来缩小概率空间，从而生成更符合预期的结果。提示词写法越清楚，模型越容易朝正确方向生成。因此，在设计提示词时，应主动添加限定词和约束条件，如指定角色、目标受众、输出格式、长度限制和风格要求。这些限定词不仅帮助模型理解任务细节，还能有效减少歧义和随机性，使输出更加稳定、可控。通过这种方式，用户可以从</a:t>
+              <a:t>一个可复用的</a:t>
             </a:r>
             <a:r>
               <a:rPr lang="en-US" altLang="zh-CN" dirty="0">
@@ -9277,7 +8726,7 @@
                 <a:cs typeface="微软雅黑" panose="020B0503020204020204" pitchFamily="34" charset="-122"/>
                 <a:sym typeface="+mn-ea"/>
               </a:rPr>
-              <a:t>“</a:t>
+              <a:t>Skill</a:t>
             </a:r>
             <a:r>
               <a:rPr lang="zh-CN" altLang="en-US" dirty="0">
@@ -9289,7 +8738,7 @@
                 <a:cs typeface="微软雅黑" panose="020B0503020204020204" pitchFamily="34" charset="-122"/>
                 <a:sym typeface="+mn-ea"/>
               </a:rPr>
-              <a:t>模糊指令</a:t>
+              <a:t>必须明确其输入输出的形式与规则，这类似于编程中函数的签名。接口定义不清的</a:t>
             </a:r>
             <a:r>
               <a:rPr lang="en-US" altLang="zh-CN" dirty="0">
@@ -9301,7 +8750,7 @@
                 <a:cs typeface="微软雅黑" panose="020B0503020204020204" pitchFamily="34" charset="-122"/>
                 <a:sym typeface="+mn-ea"/>
               </a:rPr>
-              <a:t>”</a:t>
+              <a:t>Skill</a:t>
             </a:r>
             <a:r>
               <a:rPr lang="zh-CN" altLang="en-US" dirty="0">
@@ -9313,7 +8762,7 @@
                 <a:cs typeface="微软雅黑" panose="020B0503020204020204" pitchFamily="34" charset="-122"/>
                 <a:sym typeface="+mn-ea"/>
               </a:rPr>
-              <a:t>转向</a:t>
+              <a:t>会变成黑盒，难以被其他开发者或</a:t>
             </a:r>
             <a:r>
               <a:rPr lang="en-US" altLang="zh-CN" dirty="0">
@@ -9325,7 +8774,7 @@
                 <a:cs typeface="微软雅黑" panose="020B0503020204020204" pitchFamily="34" charset="-122"/>
                 <a:sym typeface="+mn-ea"/>
               </a:rPr>
-              <a:t>“</a:t>
+              <a:t>Agent</a:t>
             </a:r>
             <a:r>
               <a:rPr lang="zh-CN" altLang="en-US" dirty="0">
@@ -9337,7 +8786,7 @@
                 <a:cs typeface="微软雅黑" panose="020B0503020204020204" pitchFamily="34" charset="-122"/>
                 <a:sym typeface="+mn-ea"/>
               </a:rPr>
-              <a:t>精准引导</a:t>
+              <a:t>正确调用。与软件开发类似，接口设计是</a:t>
             </a:r>
             <a:r>
               <a:rPr lang="en-US" altLang="zh-CN" dirty="0">
@@ -9349,7 +8798,7 @@
                 <a:cs typeface="微软雅黑" panose="020B0503020204020204" pitchFamily="34" charset="-122"/>
                 <a:sym typeface="+mn-ea"/>
               </a:rPr>
-              <a:t>”</a:t>
+              <a:t>Skill</a:t>
             </a:r>
             <a:r>
               <a:rPr lang="zh-CN" altLang="en-US" dirty="0">
@@ -9361,7 +8810,55 @@
                 <a:cs typeface="微软雅黑" panose="020B0503020204020204" pitchFamily="34" charset="-122"/>
                 <a:sym typeface="+mn-ea"/>
               </a:rPr>
-              <a:t>，充分发挥大语言模型的能力。</a:t>
+              <a:t>能否被复用的关键。如果输入输出不明确，后续组合或替换</a:t>
+            </a:r>
+            <a:r>
+              <a:rPr lang="en-US" altLang="zh-CN" dirty="0">
+                <a:solidFill>
+                  <a:schemeClr val="bg1"/>
+                </a:solidFill>
+                <a:latin typeface="微软雅黑" panose="020B0503020204020204" pitchFamily="34" charset="-122"/>
+                <a:ea typeface="微软雅黑" panose="020B0503020204020204" pitchFamily="34" charset="-122"/>
+                <a:cs typeface="微软雅黑" panose="020B0503020204020204" pitchFamily="34" charset="-122"/>
+                <a:sym typeface="+mn-ea"/>
+              </a:rPr>
+              <a:t>Skill</a:t>
+            </a:r>
+            <a:r>
+              <a:rPr lang="zh-CN" altLang="en-US" dirty="0">
+                <a:solidFill>
+                  <a:schemeClr val="bg1"/>
+                </a:solidFill>
+                <a:latin typeface="微软雅黑" panose="020B0503020204020204" pitchFamily="34" charset="-122"/>
+                <a:ea typeface="微软雅黑" panose="020B0503020204020204" pitchFamily="34" charset="-122"/>
+                <a:cs typeface="微软雅黑" panose="020B0503020204020204" pitchFamily="34" charset="-122"/>
+                <a:sym typeface="+mn-ea"/>
+              </a:rPr>
+              <a:t>时会非常困难。因此，在设计</a:t>
+            </a:r>
+            <a:r>
+              <a:rPr lang="en-US" altLang="zh-CN" dirty="0">
+                <a:solidFill>
+                  <a:schemeClr val="bg1"/>
+                </a:solidFill>
+                <a:latin typeface="微软雅黑" panose="020B0503020204020204" pitchFamily="34" charset="-122"/>
+                <a:ea typeface="微软雅黑" panose="020B0503020204020204" pitchFamily="34" charset="-122"/>
+                <a:cs typeface="微软雅黑" panose="020B0503020204020204" pitchFamily="34" charset="-122"/>
+                <a:sym typeface="+mn-ea"/>
+              </a:rPr>
+              <a:t>Skill</a:t>
+            </a:r>
+            <a:r>
+              <a:rPr lang="zh-CN" altLang="en-US" dirty="0">
+                <a:solidFill>
+                  <a:schemeClr val="bg1"/>
+                </a:solidFill>
+                <a:latin typeface="微软雅黑" panose="020B0503020204020204" pitchFamily="34" charset="-122"/>
+                <a:ea typeface="微软雅黑" panose="020B0503020204020204" pitchFamily="34" charset="-122"/>
+                <a:cs typeface="微软雅黑" panose="020B0503020204020204" pitchFamily="34" charset="-122"/>
+                <a:sym typeface="+mn-ea"/>
+              </a:rPr>
+              <a:t>时，需要清晰地定义输入参数的类型、结构和含义，以及输出结果的格式和内容。</a:t>
             </a:r>
             <a:endParaRPr lang="zh-CN" altLang="en-US" dirty="0">
               <a:solidFill>
@@ -9920,7 +9417,7 @@
                 <a:cs typeface="微软雅黑" panose="020B0503020204020204" pitchFamily="34" charset="-122"/>
                 <a:sym typeface="+mn-ea"/>
               </a:rPr>
-              <a:t>除了通过身份、维度、长度和风格等限定词来约束模型外，还有一种更直接、更强大的</a:t>
+              <a:t>在实践中，可以先从最简单的</a:t>
             </a:r>
             <a:r>
               <a:rPr lang="en-US" altLang="zh-CN" dirty="0">
@@ -9938,7 +9435,7 @@
                 <a:cs typeface="微软雅黑" panose="020B0503020204020204" pitchFamily="34" charset="-122"/>
                 <a:sym typeface="+mn-ea"/>
               </a:rPr>
-              <a:t>怎么说</a:t>
+              <a:t>输入</a:t>
             </a:r>
             <a:r>
               <a:rPr lang="en-US" altLang="zh-CN" dirty="0">
@@ -9947,7 +9444,7 @@
                 <a:cs typeface="微软雅黑" panose="020B0503020204020204" pitchFamily="34" charset="-122"/>
                 <a:sym typeface="+mn-ea"/>
               </a:rPr>
-              <a:t>”</a:t>
+              <a:t>→</a:t>
             </a:r>
             <a:r>
               <a:rPr lang="zh-CN" altLang="en-US" dirty="0">
@@ -9956,7 +9453,7 @@
                 <a:cs typeface="微软雅黑" panose="020B0503020204020204" pitchFamily="34" charset="-122"/>
                 <a:sym typeface="+mn-ea"/>
               </a:rPr>
-              <a:t>方式：给模型提供示例，即</a:t>
+              <a:t>处理</a:t>
             </a:r>
             <a:r>
               <a:rPr lang="en-US" altLang="zh-CN" dirty="0">
@@ -9965,7 +9462,7 @@
                 <a:cs typeface="微软雅黑" panose="020B0503020204020204" pitchFamily="34" charset="-122"/>
                 <a:sym typeface="+mn-ea"/>
               </a:rPr>
-              <a:t>few-shot</a:t>
+              <a:t>→</a:t>
             </a:r>
             <a:r>
               <a:rPr lang="zh-CN" altLang="en-US" dirty="0">
@@ -9974,7 +9471,7 @@
                 <a:cs typeface="微软雅黑" panose="020B0503020204020204" pitchFamily="34" charset="-122"/>
                 <a:sym typeface="+mn-ea"/>
               </a:rPr>
-              <a:t>提示。这种方法的核心思想是，通过展示一个或多个真实的输入输出示例，让模型模仿示例的格式和内容进行回复。以</a:t>
+              <a:t>输出</a:t>
             </a:r>
             <a:r>
               <a:rPr lang="en-US" altLang="zh-CN" dirty="0">
@@ -9983,7 +9480,7 @@
                 <a:cs typeface="微软雅黑" panose="020B0503020204020204" pitchFamily="34" charset="-122"/>
                 <a:sym typeface="+mn-ea"/>
               </a:rPr>
-              <a:t>“</a:t>
+              <a:t>”</a:t>
             </a:r>
             <a:r>
               <a:rPr lang="zh-CN" altLang="en-US" dirty="0">
@@ -9992,7 +9489,7 @@
                 <a:cs typeface="微软雅黑" panose="020B0503020204020204" pitchFamily="34" charset="-122"/>
                 <a:sym typeface="+mn-ea"/>
               </a:rPr>
-              <a:t>总结文章</a:t>
+              <a:t>模式开始，逐步增加校验、异常处理和版本管理。例如，一个数据清洗</a:t>
             </a:r>
             <a:r>
               <a:rPr lang="en-US" altLang="zh-CN" dirty="0">
@@ -10001,7 +9498,7 @@
                 <a:cs typeface="微软雅黑" panose="020B0503020204020204" pitchFamily="34" charset="-122"/>
                 <a:sym typeface="+mn-ea"/>
               </a:rPr>
-              <a:t>”</a:t>
+              <a:t>Skill</a:t>
             </a:r>
             <a:r>
               <a:rPr lang="zh-CN" altLang="en-US" dirty="0">
@@ -10010,7 +9507,7 @@
                 <a:cs typeface="微软雅黑" panose="020B0503020204020204" pitchFamily="34" charset="-122"/>
                 <a:sym typeface="+mn-ea"/>
               </a:rPr>
-              <a:t>任务为例，即使已经写好了包含身份、读者、提取维度和风格等约束的提示词，模型在处理不同文章时仍可能在某些细节上偏离预期，比如把</a:t>
+              <a:t>的输入可以是一个包含原始数据的</a:t>
             </a:r>
             <a:r>
               <a:rPr lang="en-US" altLang="zh-CN" dirty="0">
@@ -10019,7 +9516,7 @@
                 <a:cs typeface="微软雅黑" panose="020B0503020204020204" pitchFamily="34" charset="-122"/>
                 <a:sym typeface="+mn-ea"/>
               </a:rPr>
-              <a:t>“</a:t>
+              <a:t>JSON</a:t>
             </a:r>
             <a:r>
               <a:rPr lang="zh-CN" altLang="en-US" dirty="0">
@@ -10028,7 +9525,7 @@
                 <a:cs typeface="微软雅黑" panose="020B0503020204020204" pitchFamily="34" charset="-122"/>
                 <a:sym typeface="+mn-ea"/>
               </a:rPr>
-              <a:t>核心观点</a:t>
+              <a:t>对象，输出则是清洗后的规范数据。随着使用场景的扩展，可以逐步加入输入参数校验、错误处理机制以及版本号管理，确保</a:t>
             </a:r>
             <a:r>
               <a:rPr lang="en-US" altLang="zh-CN" dirty="0">
@@ -10037,7 +9534,7 @@
                 <a:cs typeface="微软雅黑" panose="020B0503020204020204" pitchFamily="34" charset="-122"/>
                 <a:sym typeface="+mn-ea"/>
               </a:rPr>
-              <a:t>”</a:t>
+              <a:t>Skill</a:t>
             </a:r>
             <a:r>
               <a:rPr lang="zh-CN" altLang="en-US" dirty="0">
@@ -10046,7 +9543,25 @@
                 <a:cs typeface="微软雅黑" panose="020B0503020204020204" pitchFamily="34" charset="-122"/>
                 <a:sym typeface="+mn-ea"/>
               </a:rPr>
-              <a:t>写成了两句话，或者在企业启示部分写得过于空泛。这时，在提示词中直接放入一个真实的输入输出示例，就能有效解决这些问题。</a:t>
+              <a:t>的稳定性和可追溯性。通过这样的迭代优化，</a:t>
+            </a:r>
+            <a:r>
+              <a:rPr lang="en-US" altLang="zh-CN" dirty="0">
+                <a:latin typeface="微软雅黑" panose="020B0503020204020204" pitchFamily="34" charset="-122"/>
+                <a:ea typeface="微软雅黑" panose="020B0503020204020204" pitchFamily="34" charset="-122"/>
+                <a:cs typeface="微软雅黑" panose="020B0503020204020204" pitchFamily="34" charset="-122"/>
+                <a:sym typeface="+mn-ea"/>
+              </a:rPr>
+              <a:t>Skill</a:t>
+            </a:r>
+            <a:r>
+              <a:rPr lang="zh-CN" altLang="en-US" dirty="0">
+                <a:latin typeface="微软雅黑" panose="020B0503020204020204" pitchFamily="34" charset="-122"/>
+                <a:ea typeface="微软雅黑" panose="020B0503020204020204" pitchFamily="34" charset="-122"/>
+                <a:cs typeface="微软雅黑" panose="020B0503020204020204" pitchFamily="34" charset="-122"/>
+                <a:sym typeface="+mn-ea"/>
+              </a:rPr>
+              <a:t>的接口会越来越健壮，复用性也会越来越高。</a:t>
             </a:r>
             <a:endParaRPr lang="zh-CN" altLang="en-US" dirty="0">
               <a:latin typeface="微软雅黑" panose="020B0503020204020204" pitchFamily="34" charset="-122"/>
@@ -10777,7 +10292,7 @@
                 <a:cs typeface="微软雅黑" panose="020B0503020204020204" pitchFamily="34" charset="-122"/>
                 <a:sym typeface="+mn-ea"/>
               </a:rPr>
-              <a:t>具体来说，可以这样构造</a:t>
+              <a:t>判断一个逻辑是否适合封装为</a:t>
             </a:r>
             <a:r>
               <a:rPr lang="en-US" altLang="zh-CN" dirty="0">
@@ -10786,7 +10301,7 @@
                 <a:cs typeface="微软雅黑" panose="020B0503020204020204" pitchFamily="34" charset="-122"/>
                 <a:sym typeface="+mn-ea"/>
               </a:rPr>
-              <a:t>few-shot</a:t>
+              <a:t>Skill</a:t>
             </a:r>
             <a:r>
               <a:rPr lang="zh-CN" altLang="en-US" dirty="0">
@@ -10795,7 +10310,7 @@
                 <a:cs typeface="微软雅黑" panose="020B0503020204020204" pitchFamily="34" charset="-122"/>
                 <a:sym typeface="+mn-ea"/>
               </a:rPr>
-              <a:t>提示词：在原有指令的末尾，添加一段示例，包括一个示例输入（如某篇文章的片段）和对应的示例输出（如按照指定维度、长度和句式写好的总结）。通过这个示例，模型不仅知道你要什么维度的信息，还看到了每个维度应该写多长、用什么句式、观点和事实如何分离。相比于只有指令的提示词，加上</a:t>
+              <a:t>，可以从三个维度来考量。首先是是否多次使用：如果某段逻辑只在当前对话流程中用到，换一个场景就毫无意义，那就没有必要单独建立</a:t>
             </a:r>
             <a:r>
               <a:rPr lang="en-US" altLang="zh-CN" dirty="0">
@@ -10804,7 +10319,7 @@
                 <a:cs typeface="微软雅黑" panose="020B0503020204020204" pitchFamily="34" charset="-122"/>
                 <a:sym typeface="+mn-ea"/>
               </a:rPr>
-              <a:t>few-shot</a:t>
+              <a:t>Skill</a:t>
             </a:r>
             <a:r>
               <a:rPr lang="zh-CN" altLang="en-US" dirty="0">
@@ -10813,7 +10328,7 @@
                 <a:cs typeface="微软雅黑" panose="020B0503020204020204" pitchFamily="34" charset="-122"/>
                 <a:sym typeface="+mn-ea"/>
               </a:rPr>
-              <a:t>后，输出的稳定性和一致性会再次明显提升。这种方法的优势在于，它用具体的模板替代了抽象的规则，让模型更容易理解并执行复杂任务，尤其适用于需要高度格式化和一致性的场景。</a:t>
+              <a:t>。相反，如果同样的处理步骤在多个业务场景、不同用户请求中都会出现，那么把它固化下来，就能避免每次都重新描述规则的重复劳动。例如需求标准化，将用户口语化、模糊的输入转化为结构化的任务参数，这种转换逻辑在几乎每一个意图理解环节中都会被调用，天然适合封装。数据清洗、结果摘要生成、多语言翻译等也是类似的例子，这些能力一旦做好，就可以在多个下游任务中直接调用。</a:t>
             </a:r>
             <a:endParaRPr lang="zh-CN" altLang="en-US" dirty="0">
               <a:latin typeface="微软雅黑" panose="020B0503020204020204" pitchFamily="34" charset="-122"/>
@@ -10833,1448 +10348,6 @@
 </file>
 
 <file path=ppt/slides/slide13.xml><?xml version="1.0" encoding="utf-8"?>
-<p:sld xmlns:a="http://schemas.openxmlformats.org/drawingml/2006/main" xmlns:r="http://schemas.openxmlformats.org/officeDocument/2006/relationships" xmlns:p="http://schemas.openxmlformats.org/presentationml/2006/main">
-  <p:cSld>
-    <p:spTree>
-      <p:nvGrpSpPr>
-        <p:cNvPr id="1" name=""/>
-        <p:cNvGrpSpPr/>
-        <p:nvPr/>
-      </p:nvGrpSpPr>
-      <p:grpSpPr>
-        <a:xfrm>
-          <a:off x="0" y="0"/>
-          <a:ext cx="0" cy="0"/>
-          <a:chOff x="0" y="0"/>
-          <a:chExt cx="0" cy="0"/>
-        </a:xfrm>
-      </p:grpSpPr>
-      <p:sp>
-        <p:nvSpPr>
-          <p:cNvPr id="21" name="任意多边形 44"/>
-          <p:cNvSpPr/>
-          <p:nvPr>
-            <p:custDataLst>
-              <p:tags r:id="rId1"/>
-            </p:custDataLst>
-          </p:nvPr>
-        </p:nvSpPr>
-        <p:spPr>
-          <a:xfrm flipV="1">
-            <a:off x="5382794" y="3951605"/>
-            <a:ext cx="1940560" cy="1148715"/>
-          </a:xfrm>
-          <a:custGeom>
-            <a:avLst/>
-            <a:gdLst>
-              <a:gd name="connsiteX0" fmla="*/ 0 w 1940313"/>
-              <a:gd name="connsiteY0" fmla="*/ 791737 h 1148576"/>
-              <a:gd name="connsiteX1" fmla="*/ 791737 w 1940313"/>
-              <a:gd name="connsiteY1" fmla="*/ 0 h 1148576"/>
-              <a:gd name="connsiteX2" fmla="*/ 1940313 w 1940313"/>
-              <a:gd name="connsiteY2" fmla="*/ 1148576 h 1148576"/>
-            </a:gdLst>
-            <a:ahLst/>
-            <a:cxnLst>
-              <a:cxn ang="0">
-                <a:pos x="connsiteX0" y="connsiteY0"/>
-              </a:cxn>
-              <a:cxn ang="0">
-                <a:pos x="connsiteX1" y="connsiteY1"/>
-              </a:cxn>
-              <a:cxn ang="0">
-                <a:pos x="connsiteX2" y="connsiteY2"/>
-              </a:cxn>
-            </a:cxnLst>
-            <a:rect l="l" t="t" r="r" b="b"/>
-            <a:pathLst>
-              <a:path w="1940313" h="1148576">
-                <a:moveTo>
-                  <a:pt x="0" y="791737"/>
-                </a:moveTo>
-                <a:lnTo>
-                  <a:pt x="791737" y="0"/>
-                </a:lnTo>
-                <a:lnTo>
-                  <a:pt x="1940313" y="1148576"/>
-                </a:lnTo>
-              </a:path>
-            </a:pathLst>
-          </a:custGeom>
-          <a:noFill/>
-          <a:ln w="12700">
-            <a:solidFill>
-              <a:srgbClr val="8A8B8F"/>
-            </a:solidFill>
-            <a:prstDash val="dash"/>
-            <a:headEnd type="oval" w="med" len="med"/>
-            <a:tailEnd type="triangle" w="med" len="med"/>
-          </a:ln>
-        </p:spPr>
-        <p:style>
-          <a:lnRef idx="2">
-            <a:schemeClr val="accent1">
-              <a:shade val="50000"/>
-            </a:schemeClr>
-          </a:lnRef>
-          <a:fillRef idx="1">
-            <a:schemeClr val="accent1"/>
-          </a:fillRef>
-          <a:effectRef idx="0">
-            <a:schemeClr val="accent1"/>
-          </a:effectRef>
-          <a:fontRef idx="minor">
-            <a:schemeClr val="lt1"/>
-          </a:fontRef>
-        </p:style>
-        <p:txBody>
-          <a:bodyPr rtlCol="0" anchor="ctr"/>
-          <a:lstStyle/>
-          <a:p>
-            <a:pPr marL="0" marR="0" lvl="0" indent="0" algn="ctr" defTabSz="914400" rtl="0" eaLnBrk="1" fontAlgn="auto" latinLnBrk="0" hangingPunct="1">
-              <a:lnSpc>
-                <a:spcPct val="100000"/>
-              </a:lnSpc>
-              <a:spcBef>
-                <a:spcPts val="0"/>
-              </a:spcBef>
-              <a:spcAft>
-                <a:spcPts val="0"/>
-              </a:spcAft>
-              <a:buClrTx/>
-              <a:buSzTx/>
-              <a:buFontTx/>
-              <a:buNone/>
-              <a:defRPr/>
-            </a:pPr>
-            <a:endParaRPr kumimoji="0" lang="zh-CN" altLang="en-US" sz="1800" b="0" i="0" u="none" strike="noStrike" kern="1200" cap="none" spc="0" normalizeH="0" baseline="0" noProof="0" dirty="0">
-              <a:ln>
-                <a:noFill/>
-              </a:ln>
-              <a:solidFill>
-                <a:prstClr val="white"/>
-              </a:solidFill>
-              <a:effectLst/>
-              <a:uLnTx/>
-              <a:uFillTx/>
-              <a:latin typeface="等线" panose="02010600030101010101" charset="-122"/>
-              <a:ea typeface="微软雅黑" panose="020B0503020204020204" pitchFamily="34" charset="-122"/>
-              <a:cs typeface="+mn-cs"/>
-            </a:endParaRPr>
-          </a:p>
-        </p:txBody>
-      </p:sp>
-      <p:grpSp>
-        <p:nvGrpSpPr>
-          <p:cNvPr id="7" name="组合 6"/>
-          <p:cNvGrpSpPr/>
-          <p:nvPr>
-            <p:custDataLst>
-              <p:tags r:id="rId2"/>
-            </p:custDataLst>
-          </p:nvPr>
-        </p:nvGrpSpPr>
-        <p:grpSpPr>
-          <a:xfrm>
-            <a:off x="5236109" y="2458720"/>
-            <a:ext cx="1892300" cy="1892300"/>
-            <a:chOff x="4536" y="4280"/>
-            <a:chExt cx="2980" cy="2980"/>
-          </a:xfrm>
-        </p:grpSpPr>
-        <p:sp>
-          <p:nvSpPr>
-            <p:cNvPr id="12" name="圆角矩形 34"/>
-            <p:cNvSpPr/>
-            <p:nvPr>
-              <p:custDataLst>
-                <p:tags r:id="rId3"/>
-              </p:custDataLst>
-            </p:nvPr>
-          </p:nvSpPr>
-          <p:spPr>
-            <a:xfrm rot="2700000">
-              <a:off x="4536" y="4280"/>
-              <a:ext cx="2980" cy="2980"/>
-            </a:xfrm>
-            <a:prstGeom prst="roundRect">
-              <a:avLst>
-                <a:gd name="adj" fmla="val 6319"/>
-              </a:avLst>
-            </a:prstGeom>
-            <a:solidFill>
-              <a:schemeClr val="bg1">
-                <a:lumMod val="95000"/>
-              </a:schemeClr>
-            </a:solidFill>
-            <a:ln>
-              <a:noFill/>
-            </a:ln>
-            <a:effectLst>
-              <a:outerShdw blurRad="152400" dist="63500" dir="8100000" algn="tl" rotWithShape="0">
-                <a:prstClr val="black">
-                  <a:alpha val="30000"/>
-                </a:prstClr>
-              </a:outerShdw>
-            </a:effectLst>
-            <a:scene3d>
-              <a:camera prst="orthographicFront"/>
-              <a:lightRig rig="threePt" dir="t"/>
-            </a:scene3d>
-            <a:sp3d prstMaterial="softEdge">
-              <a:bevelT w="38100" h="6350"/>
-            </a:sp3d>
-          </p:spPr>
-          <p:style>
-            <a:lnRef idx="2">
-              <a:schemeClr val="accent1">
-                <a:shade val="50000"/>
-              </a:schemeClr>
-            </a:lnRef>
-            <a:fillRef idx="1">
-              <a:schemeClr val="accent1"/>
-            </a:fillRef>
-            <a:effectRef idx="0">
-              <a:schemeClr val="accent1"/>
-            </a:effectRef>
-            <a:fontRef idx="minor">
-              <a:schemeClr val="lt1"/>
-            </a:fontRef>
-          </p:style>
-          <p:txBody>
-            <a:bodyPr rtlCol="0" anchor="ctr"/>
-            <a:lstStyle/>
-            <a:p>
-              <a:pPr marL="0" marR="0" lvl="0" indent="0" algn="ctr" defTabSz="914400" rtl="0" eaLnBrk="1" fontAlgn="auto" latinLnBrk="0" hangingPunct="1">
-                <a:lnSpc>
-                  <a:spcPct val="100000"/>
-                </a:lnSpc>
-                <a:spcBef>
-                  <a:spcPts val="0"/>
-                </a:spcBef>
-                <a:spcAft>
-                  <a:spcPts val="0"/>
-                </a:spcAft>
-                <a:buClrTx/>
-                <a:buSzTx/>
-                <a:buFontTx/>
-                <a:buNone/>
-                <a:defRPr/>
-              </a:pPr>
-              <a:endParaRPr kumimoji="0" lang="zh-CN" altLang="en-US" sz="2800" b="0" i="0" u="none" strike="noStrike" kern="1200" cap="none" spc="0" normalizeH="0" baseline="0" noProof="0" dirty="0">
-                <a:ln>
-                  <a:noFill/>
-                </a:ln>
-                <a:solidFill>
-                  <a:prstClr val="white"/>
-                </a:solidFill>
-                <a:effectLst/>
-                <a:uLnTx/>
-                <a:uFillTx/>
-                <a:latin typeface="DIN-BoldItalic" pitchFamily="50" charset="0"/>
-                <a:ea typeface="微软雅黑" panose="020B0503020204020204" pitchFamily="34" charset="-122"/>
-                <a:cs typeface="+mn-cs"/>
-              </a:endParaRPr>
-            </a:p>
-          </p:txBody>
-        </p:sp>
-        <p:sp>
-          <p:nvSpPr>
-            <p:cNvPr id="16" name="圆角矩形 38"/>
-            <p:cNvSpPr/>
-            <p:nvPr>
-              <p:custDataLst>
-                <p:tags r:id="rId4"/>
-              </p:custDataLst>
-            </p:nvPr>
-          </p:nvSpPr>
-          <p:spPr>
-            <a:xfrm rot="2700000">
-              <a:off x="4943" y="4671"/>
-              <a:ext cx="2185" cy="2185"/>
-            </a:xfrm>
-            <a:prstGeom prst="roundRect">
-              <a:avLst>
-                <a:gd name="adj" fmla="val 6319"/>
-              </a:avLst>
-            </a:prstGeom>
-            <a:solidFill>
-              <a:schemeClr val="tx1">
-                <a:lumMod val="65000"/>
-                <a:lumOff val="35000"/>
-              </a:schemeClr>
-            </a:solidFill>
-            <a:ln>
-              <a:noFill/>
-            </a:ln>
-          </p:spPr>
-          <p:style>
-            <a:lnRef idx="2">
-              <a:schemeClr val="accent1">
-                <a:shade val="50000"/>
-              </a:schemeClr>
-            </a:lnRef>
-            <a:fillRef idx="1">
-              <a:schemeClr val="accent1"/>
-            </a:fillRef>
-            <a:effectRef idx="0">
-              <a:schemeClr val="accent1"/>
-            </a:effectRef>
-            <a:fontRef idx="minor">
-              <a:schemeClr val="lt1"/>
-            </a:fontRef>
-          </p:style>
-          <p:txBody>
-            <a:bodyPr rtlCol="0" anchor="ctr"/>
-            <a:lstStyle/>
-            <a:p>
-              <a:pPr marL="0" marR="0" lvl="0" indent="0" algn="ctr" defTabSz="914400" rtl="0" eaLnBrk="1" fontAlgn="auto" latinLnBrk="0" hangingPunct="1">
-                <a:lnSpc>
-                  <a:spcPct val="100000"/>
-                </a:lnSpc>
-                <a:spcBef>
-                  <a:spcPts val="0"/>
-                </a:spcBef>
-                <a:spcAft>
-                  <a:spcPts val="0"/>
-                </a:spcAft>
-                <a:buClrTx/>
-                <a:buSzTx/>
-                <a:buFontTx/>
-                <a:buNone/>
-                <a:defRPr/>
-              </a:pPr>
-              <a:endParaRPr kumimoji="0" lang="zh-CN" altLang="en-US" sz="1800" b="0" i="0" u="none" strike="noStrike" kern="1200" cap="none" spc="0" normalizeH="0" baseline="0" noProof="0" dirty="0">
-                <a:ln>
-                  <a:noFill/>
-                </a:ln>
-                <a:solidFill>
-                  <a:prstClr val="white"/>
-                </a:solidFill>
-                <a:effectLst/>
-                <a:uLnTx/>
-                <a:uFillTx/>
-                <a:latin typeface="等线" panose="02010600030101010101" charset="-122"/>
-                <a:ea typeface="微软雅黑" panose="020B0503020204020204" pitchFamily="34" charset="-122"/>
-                <a:cs typeface="+mn-cs"/>
-              </a:endParaRPr>
-            </a:p>
-          </p:txBody>
-        </p:sp>
-      </p:grpSp>
-      <p:sp>
-        <p:nvSpPr>
-          <p:cNvPr id="52" name="文本框1"/>
-          <p:cNvSpPr txBox="1"/>
-          <p:nvPr>
-            <p:custDataLst>
-              <p:tags r:id="rId5"/>
-            </p:custDataLst>
-          </p:nvPr>
-        </p:nvSpPr>
-        <p:spPr>
-          <a:xfrm>
-            <a:off x="4388270" y="5137785"/>
-            <a:ext cx="3600000" cy="460375"/>
-          </a:xfrm>
-          <a:prstGeom prst="rect">
-            <a:avLst/>
-          </a:prstGeom>
-          <a:noFill/>
-        </p:spPr>
-        <p:txBody>
-          <a:bodyPr wrap="square" rtlCol="0">
-            <a:spAutoFit/>
-          </a:bodyPr>
-          <a:lstStyle/>
-          <a:p>
-            <a:pPr marL="0" marR="0" lvl="0" indent="0" algn="ctr" defTabSz="914400" rtl="0" eaLnBrk="1" fontAlgn="auto" latinLnBrk="0" hangingPunct="1">
-              <a:lnSpc>
-                <a:spcPct val="100000"/>
-              </a:lnSpc>
-              <a:spcBef>
-                <a:spcPts val="0"/>
-              </a:spcBef>
-              <a:spcAft>
-                <a:spcPts val="0"/>
-              </a:spcAft>
-              <a:buClrTx/>
-              <a:buSzTx/>
-              <a:buFontTx/>
-              <a:buNone/>
-              <a:defRPr/>
-            </a:pPr>
-            <a:r>
-              <a:rPr lang="en-US" altLang="zh-CN" sz="2400" dirty="0" smtClean="0">
-                <a:solidFill>
-                  <a:schemeClr val="tx1"/>
-                </a:solidFill>
-                <a:latin typeface="微软雅黑" panose="020B0503020204020204" pitchFamily="34" charset="-122"/>
-                <a:ea typeface="微软雅黑" panose="020B0503020204020204" pitchFamily="34" charset="-122"/>
-                <a:sym typeface="+mn-ea"/>
-              </a:rPr>
-              <a:t>LLM</a:t>
-            </a:r>
-            <a:r>
-              <a:rPr lang="zh-CN" altLang="en-US" sz="2400" dirty="0" smtClean="0">
-                <a:solidFill>
-                  <a:schemeClr val="tx1"/>
-                </a:solidFill>
-                <a:latin typeface="微软雅黑" panose="020B0503020204020204" pitchFamily="34" charset="-122"/>
-                <a:ea typeface="微软雅黑" panose="020B0503020204020204" pitchFamily="34" charset="-122"/>
-                <a:sym typeface="+mn-ea"/>
-              </a:rPr>
-              <a:t>的工作原理简述</a:t>
-            </a:r>
-            <a:endParaRPr lang="zh-CN" altLang="en-US" sz="2400" dirty="0" smtClean="0">
-              <a:solidFill>
-                <a:schemeClr val="tx1"/>
-              </a:solidFill>
-              <a:latin typeface="微软雅黑" panose="020B0503020204020204" pitchFamily="34" charset="-122"/>
-              <a:ea typeface="微软雅黑" panose="020B0503020204020204" pitchFamily="34" charset="-122"/>
-              <a:sym typeface="+mn-ea"/>
-            </a:endParaRPr>
-          </a:p>
-        </p:txBody>
-      </p:sp>
-      <p:sp>
-        <p:nvSpPr>
-          <p:cNvPr id="10" name="文本框 9"/>
-          <p:cNvSpPr txBox="1"/>
-          <p:nvPr>
-            <p:custDataLst>
-              <p:tags r:id="rId6"/>
-            </p:custDataLst>
-          </p:nvPr>
-        </p:nvSpPr>
-        <p:spPr>
-          <a:xfrm>
-            <a:off x="5826024" y="2936875"/>
-            <a:ext cx="682625" cy="1014730"/>
-          </a:xfrm>
-          <a:prstGeom prst="rect">
-            <a:avLst/>
-          </a:prstGeom>
-          <a:noFill/>
-        </p:spPr>
-        <p:txBody>
-          <a:bodyPr wrap="square" rtlCol="0">
-            <a:spAutoFit/>
-          </a:bodyPr>
-          <a:lstStyle/>
-          <a:p>
-            <a:r>
-              <a:rPr lang="en-US" altLang="zh-CN" sz="6000" b="1">
-                <a:solidFill>
-                  <a:schemeClr val="bg1"/>
-                </a:solidFill>
-                <a:latin typeface="+mj-ea"/>
-                <a:ea typeface="+mj-ea"/>
-              </a:rPr>
-              <a:t>2</a:t>
-            </a:r>
-            <a:endParaRPr lang="en-US" altLang="zh-CN" sz="6000" b="1">
-              <a:solidFill>
-                <a:schemeClr val="bg1"/>
-              </a:solidFill>
-              <a:latin typeface="+mj-ea"/>
-              <a:ea typeface="+mj-ea"/>
-            </a:endParaRPr>
-          </a:p>
-        </p:txBody>
-      </p:sp>
-      <p:sp>
-        <p:nvSpPr>
-          <p:cNvPr id="35" name="文本框 34"/>
-          <p:cNvSpPr txBox="1"/>
-          <p:nvPr/>
-        </p:nvSpPr>
-        <p:spPr>
-          <a:xfrm>
-            <a:off x="0" y="793750"/>
-            <a:ext cx="1351262" cy="2061210"/>
-          </a:xfrm>
-          <a:prstGeom prst="rect">
-            <a:avLst/>
-          </a:prstGeom>
-          <a:noFill/>
-        </p:spPr>
-        <p:txBody>
-          <a:bodyPr wrap="square" rtlCol="0">
-            <a:spAutoFit/>
-            <a:scene3d>
-              <a:camera prst="orthographicFront"/>
-              <a:lightRig rig="threePt" dir="t"/>
-            </a:scene3d>
-            <a:sp3d contourW="12700"/>
-          </a:bodyPr>
-          <a:lstStyle/>
-          <a:p>
-            <a:pPr algn="ctr"/>
-            <a:r>
-              <a:rPr lang="en-US" altLang="zh-CN" sz="3200" dirty="0" smtClean="0">
-                <a:solidFill>
-                  <a:srgbClr val="3F396C"/>
-                </a:solidFill>
-                <a:latin typeface="思源宋体" panose="02020700000000000000" charset="-122"/>
-                <a:ea typeface="思源宋体" panose="02020700000000000000" charset="-122"/>
-                <a:sym typeface="+mn-ea"/>
-              </a:rPr>
-              <a:t>03</a:t>
-            </a:r>
-            <a:endParaRPr lang="en-US" altLang="zh-CN" sz="3200" dirty="0" smtClean="0">
-              <a:solidFill>
-                <a:srgbClr val="3F396C"/>
-              </a:solidFill>
-              <a:latin typeface="思源宋体" panose="02020700000000000000" charset="-122"/>
-              <a:ea typeface="思源宋体" panose="02020700000000000000" charset="-122"/>
-              <a:sym typeface="+mn-ea"/>
-            </a:endParaRPr>
-          </a:p>
-        </p:txBody>
-      </p:sp>
-      <p:sp>
-        <p:nvSpPr>
-          <p:cNvPr id="8" name="文本框1"/>
-          <p:cNvSpPr txBox="1"/>
-          <p:nvPr>
-            <p:custDataLst>
-              <p:tags r:id="rId7"/>
-            </p:custDataLst>
-          </p:nvPr>
-        </p:nvSpPr>
-        <p:spPr>
-          <a:xfrm>
-            <a:off x="594000" y="5166995"/>
-            <a:ext cx="3600000" cy="460375"/>
-          </a:xfrm>
-          <a:prstGeom prst="rect">
-            <a:avLst/>
-          </a:prstGeom>
-          <a:noFill/>
-        </p:spPr>
-        <p:txBody>
-          <a:bodyPr wrap="square" rtlCol="0">
-            <a:spAutoFit/>
-          </a:bodyPr>
-          <a:lstStyle/>
-          <a:p>
-            <a:pPr marL="0" marR="0" lvl="0" indent="0" algn="ctr" defTabSz="914400" rtl="0" eaLnBrk="1" fontAlgn="auto" latinLnBrk="0" hangingPunct="1">
-              <a:lnSpc>
-                <a:spcPct val="100000"/>
-              </a:lnSpc>
-              <a:spcBef>
-                <a:spcPts val="0"/>
-              </a:spcBef>
-              <a:spcAft>
-                <a:spcPts val="0"/>
-              </a:spcAft>
-              <a:buClrTx/>
-              <a:buSzTx/>
-              <a:buFontTx/>
-              <a:buNone/>
-              <a:defRPr/>
-            </a:pPr>
-            <a:r>
-              <a:rPr lang="zh-CN" altLang="zh-CN" sz="2400" dirty="0" smtClean="0">
-                <a:solidFill>
-                  <a:schemeClr val="tx1"/>
-                </a:solidFill>
-                <a:latin typeface="微软雅黑" panose="020B0503020204020204" pitchFamily="34" charset="-122"/>
-                <a:ea typeface="微软雅黑" panose="020B0503020204020204" pitchFamily="34" charset="-122"/>
-                <a:sym typeface="+mn-ea"/>
-              </a:rPr>
-              <a:t>什么是提示词工程</a:t>
-            </a:r>
-            <a:endParaRPr lang="zh-CN" altLang="zh-CN" sz="2400" dirty="0" smtClean="0">
-              <a:solidFill>
-                <a:schemeClr val="tx1"/>
-              </a:solidFill>
-              <a:latin typeface="微软雅黑" panose="020B0503020204020204" pitchFamily="34" charset="-122"/>
-              <a:ea typeface="微软雅黑" panose="020B0503020204020204" pitchFamily="34" charset="-122"/>
-              <a:sym typeface="+mn-ea"/>
-            </a:endParaRPr>
-          </a:p>
-        </p:txBody>
-      </p:sp>
-      <p:grpSp>
-        <p:nvGrpSpPr>
-          <p:cNvPr id="2" name="组合 1"/>
-          <p:cNvGrpSpPr/>
-          <p:nvPr>
-            <p:custDataLst>
-              <p:tags r:id="rId8"/>
-            </p:custDataLst>
-          </p:nvPr>
-        </p:nvGrpSpPr>
-        <p:grpSpPr>
-          <a:xfrm>
-            <a:off x="1443301" y="1852930"/>
-            <a:ext cx="2087245" cy="2570480"/>
-            <a:chOff x="4536" y="3212"/>
-            <a:chExt cx="3287" cy="4048"/>
-          </a:xfrm>
-        </p:grpSpPr>
-        <p:sp>
-          <p:nvSpPr>
-            <p:cNvPr id="3" name="圆角矩形 34"/>
-            <p:cNvSpPr/>
-            <p:nvPr>
-              <p:custDataLst>
-                <p:tags r:id="rId9"/>
-              </p:custDataLst>
-            </p:nvPr>
-          </p:nvSpPr>
-          <p:spPr>
-            <a:xfrm rot="2700000">
-              <a:off x="4536" y="4280"/>
-              <a:ext cx="2980" cy="2980"/>
-            </a:xfrm>
-            <a:prstGeom prst="roundRect">
-              <a:avLst>
-                <a:gd name="adj" fmla="val 6319"/>
-              </a:avLst>
-            </a:prstGeom>
-            <a:solidFill>
-              <a:schemeClr val="bg1">
-                <a:lumMod val="95000"/>
-              </a:schemeClr>
-            </a:solidFill>
-            <a:ln>
-              <a:noFill/>
-            </a:ln>
-            <a:effectLst>
-              <a:outerShdw blurRad="152400" dist="63500" dir="8100000" algn="tl" rotWithShape="0">
-                <a:prstClr val="black">
-                  <a:alpha val="30000"/>
-                </a:prstClr>
-              </a:outerShdw>
-            </a:effectLst>
-            <a:scene3d>
-              <a:camera prst="orthographicFront"/>
-              <a:lightRig rig="threePt" dir="t"/>
-            </a:scene3d>
-            <a:sp3d prstMaterial="softEdge">
-              <a:bevelT w="38100" h="6350"/>
-            </a:sp3d>
-          </p:spPr>
-          <p:style>
-            <a:lnRef idx="2">
-              <a:schemeClr val="accent1">
-                <a:shade val="50000"/>
-              </a:schemeClr>
-            </a:lnRef>
-            <a:fillRef idx="1">
-              <a:schemeClr val="accent1"/>
-            </a:fillRef>
-            <a:effectRef idx="0">
-              <a:schemeClr val="accent1"/>
-            </a:effectRef>
-            <a:fontRef idx="minor">
-              <a:schemeClr val="lt1"/>
-            </a:fontRef>
-          </p:style>
-          <p:txBody>
-            <a:bodyPr rtlCol="0" anchor="ctr"/>
-            <a:lstStyle/>
-            <a:p>
-              <a:pPr marL="0" marR="0" lvl="0" indent="0" algn="ctr" defTabSz="914400" rtl="0" eaLnBrk="1" fontAlgn="auto" latinLnBrk="0" hangingPunct="1">
-                <a:lnSpc>
-                  <a:spcPct val="100000"/>
-                </a:lnSpc>
-                <a:spcBef>
-                  <a:spcPts val="0"/>
-                </a:spcBef>
-                <a:spcAft>
-                  <a:spcPts val="0"/>
-                </a:spcAft>
-                <a:buClrTx/>
-                <a:buSzTx/>
-                <a:buFontTx/>
-                <a:buNone/>
-                <a:defRPr/>
-              </a:pPr>
-              <a:endParaRPr kumimoji="0" lang="zh-CN" altLang="en-US" sz="2800" b="0" i="0" u="none" strike="noStrike" kern="1200" cap="none" spc="0" normalizeH="0" baseline="0" noProof="0" dirty="0">
-                <a:ln>
-                  <a:noFill/>
-                </a:ln>
-                <a:solidFill>
-                  <a:prstClr val="white"/>
-                </a:solidFill>
-                <a:effectLst/>
-                <a:uLnTx/>
-                <a:uFillTx/>
-                <a:latin typeface="DIN-BoldItalic" pitchFamily="50" charset="0"/>
-                <a:ea typeface="微软雅黑" panose="020B0503020204020204" pitchFamily="34" charset="-122"/>
-                <a:cs typeface="+mn-cs"/>
-              </a:endParaRPr>
-            </a:p>
-          </p:txBody>
-        </p:sp>
-        <p:sp>
-          <p:nvSpPr>
-            <p:cNvPr id="4" name="圆角矩形 38"/>
-            <p:cNvSpPr/>
-            <p:nvPr>
-              <p:custDataLst>
-                <p:tags r:id="rId10"/>
-              </p:custDataLst>
-            </p:nvPr>
-          </p:nvSpPr>
-          <p:spPr>
-            <a:xfrm rot="2700000">
-              <a:off x="4943" y="4671"/>
-              <a:ext cx="2185" cy="2185"/>
-            </a:xfrm>
-            <a:prstGeom prst="roundRect">
-              <a:avLst>
-                <a:gd name="adj" fmla="val 6319"/>
-              </a:avLst>
-            </a:prstGeom>
-            <a:solidFill>
-              <a:schemeClr val="tx1">
-                <a:lumMod val="65000"/>
-                <a:lumOff val="35000"/>
-              </a:schemeClr>
-            </a:solidFill>
-            <a:ln>
-              <a:noFill/>
-            </a:ln>
-          </p:spPr>
-          <p:style>
-            <a:lnRef idx="2">
-              <a:schemeClr val="accent1">
-                <a:shade val="50000"/>
-              </a:schemeClr>
-            </a:lnRef>
-            <a:fillRef idx="1">
-              <a:schemeClr val="accent1"/>
-            </a:fillRef>
-            <a:effectRef idx="0">
-              <a:schemeClr val="accent1"/>
-            </a:effectRef>
-            <a:fontRef idx="minor">
-              <a:schemeClr val="lt1"/>
-            </a:fontRef>
-          </p:style>
-          <p:txBody>
-            <a:bodyPr rtlCol="0" anchor="ctr"/>
-            <a:lstStyle/>
-            <a:p>
-              <a:pPr marL="0" marR="0" lvl="0" indent="0" algn="ctr" defTabSz="914400" rtl="0" eaLnBrk="1" fontAlgn="auto" latinLnBrk="0" hangingPunct="1">
-                <a:lnSpc>
-                  <a:spcPct val="100000"/>
-                </a:lnSpc>
-                <a:spcBef>
-                  <a:spcPts val="0"/>
-                </a:spcBef>
-                <a:spcAft>
-                  <a:spcPts val="0"/>
-                </a:spcAft>
-                <a:buClrTx/>
-                <a:buSzTx/>
-                <a:buFontTx/>
-                <a:buNone/>
-                <a:defRPr/>
-              </a:pPr>
-              <a:endParaRPr kumimoji="0" lang="zh-CN" altLang="en-US" sz="1800" b="0" i="0" u="none" strike="noStrike" kern="1200" cap="none" spc="0" normalizeH="0" baseline="0" noProof="0" dirty="0">
-                <a:ln>
-                  <a:noFill/>
-                </a:ln>
-                <a:solidFill>
-                  <a:prstClr val="white"/>
-                </a:solidFill>
-                <a:effectLst/>
-                <a:uLnTx/>
-                <a:uFillTx/>
-                <a:latin typeface="等线" panose="02010600030101010101" charset="-122"/>
-                <a:ea typeface="微软雅黑" panose="020B0503020204020204" pitchFamily="34" charset="-122"/>
-                <a:cs typeface="+mn-cs"/>
-              </a:endParaRPr>
-            </a:p>
-          </p:txBody>
-        </p:sp>
-        <p:sp>
-          <p:nvSpPr>
-            <p:cNvPr id="6" name="任意多边形 42"/>
-            <p:cNvSpPr/>
-            <p:nvPr>
-              <p:custDataLst>
-                <p:tags r:id="rId11"/>
-              </p:custDataLst>
-            </p:nvPr>
-          </p:nvSpPr>
-          <p:spPr>
-            <a:xfrm>
-              <a:off x="4767" y="3212"/>
-              <a:ext cx="3056" cy="1809"/>
-            </a:xfrm>
-            <a:custGeom>
-              <a:avLst/>
-              <a:gdLst>
-                <a:gd name="connsiteX0" fmla="*/ 0 w 1940313"/>
-                <a:gd name="connsiteY0" fmla="*/ 791737 h 1148576"/>
-                <a:gd name="connsiteX1" fmla="*/ 791737 w 1940313"/>
-                <a:gd name="connsiteY1" fmla="*/ 0 h 1148576"/>
-                <a:gd name="connsiteX2" fmla="*/ 1940313 w 1940313"/>
-                <a:gd name="connsiteY2" fmla="*/ 1148576 h 1148576"/>
-              </a:gdLst>
-              <a:ahLst/>
-              <a:cxnLst>
-                <a:cxn ang="0">
-                  <a:pos x="connsiteX0" y="connsiteY0"/>
-                </a:cxn>
-                <a:cxn ang="0">
-                  <a:pos x="connsiteX1" y="connsiteY1"/>
-                </a:cxn>
-                <a:cxn ang="0">
-                  <a:pos x="connsiteX2" y="connsiteY2"/>
-                </a:cxn>
-              </a:cxnLst>
-              <a:rect l="l" t="t" r="r" b="b"/>
-              <a:pathLst>
-                <a:path w="1940313" h="1148576">
-                  <a:moveTo>
-                    <a:pt x="0" y="791737"/>
-                  </a:moveTo>
-                  <a:lnTo>
-                    <a:pt x="791737" y="0"/>
-                  </a:lnTo>
-                  <a:lnTo>
-                    <a:pt x="1940313" y="1148576"/>
-                  </a:lnTo>
-                </a:path>
-              </a:pathLst>
-            </a:custGeom>
-            <a:noFill/>
-            <a:ln w="12700">
-              <a:solidFill>
-                <a:srgbClr val="8A8B8F"/>
-              </a:solidFill>
-              <a:prstDash val="dash"/>
-              <a:headEnd type="oval" w="med" len="med"/>
-              <a:tailEnd type="triangle" w="med" len="med"/>
-            </a:ln>
-          </p:spPr>
-          <p:style>
-            <a:lnRef idx="2">
-              <a:schemeClr val="accent1">
-                <a:shade val="50000"/>
-              </a:schemeClr>
-            </a:lnRef>
-            <a:fillRef idx="1">
-              <a:schemeClr val="accent1"/>
-            </a:fillRef>
-            <a:effectRef idx="0">
-              <a:schemeClr val="accent1"/>
-            </a:effectRef>
-            <a:fontRef idx="minor">
-              <a:schemeClr val="lt1"/>
-            </a:fontRef>
-          </p:style>
-          <p:txBody>
-            <a:bodyPr rtlCol="0" anchor="ctr"/>
-            <a:lstStyle/>
-            <a:p>
-              <a:pPr marL="0" marR="0" lvl="0" indent="0" algn="ctr" defTabSz="914400" rtl="0" eaLnBrk="1" fontAlgn="auto" latinLnBrk="0" hangingPunct="1">
-                <a:lnSpc>
-                  <a:spcPct val="100000"/>
-                </a:lnSpc>
-                <a:spcBef>
-                  <a:spcPts val="0"/>
-                </a:spcBef>
-                <a:spcAft>
-                  <a:spcPts val="0"/>
-                </a:spcAft>
-                <a:buClrTx/>
-                <a:buSzTx/>
-                <a:buFontTx/>
-                <a:buNone/>
-                <a:defRPr/>
-              </a:pPr>
-              <a:endParaRPr kumimoji="0" lang="zh-CN" altLang="en-US" sz="1800" b="0" i="0" u="none" strike="noStrike" kern="1200" cap="none" spc="0" normalizeH="0" baseline="0" noProof="0" dirty="0">
-                <a:ln>
-                  <a:noFill/>
-                </a:ln>
-                <a:solidFill>
-                  <a:prstClr val="white"/>
-                </a:solidFill>
-                <a:effectLst/>
-                <a:uLnTx/>
-                <a:uFillTx/>
-                <a:latin typeface="等线" panose="02010600030101010101" charset="-122"/>
-                <a:ea typeface="微软雅黑" panose="020B0503020204020204" pitchFamily="34" charset="-122"/>
-                <a:cs typeface="+mn-cs"/>
-              </a:endParaRPr>
-            </a:p>
-          </p:txBody>
-        </p:sp>
-      </p:grpSp>
-      <p:sp>
-        <p:nvSpPr>
-          <p:cNvPr id="9" name="文本框 8"/>
-          <p:cNvSpPr txBox="1"/>
-          <p:nvPr>
-            <p:custDataLst>
-              <p:tags r:id="rId12"/>
-            </p:custDataLst>
-          </p:nvPr>
-        </p:nvSpPr>
-        <p:spPr>
-          <a:xfrm>
-            <a:off x="2033216" y="3001645"/>
-            <a:ext cx="682625" cy="1014730"/>
-          </a:xfrm>
-          <a:prstGeom prst="rect">
-            <a:avLst/>
-          </a:prstGeom>
-          <a:noFill/>
-        </p:spPr>
-        <p:txBody>
-          <a:bodyPr wrap="square" rtlCol="0">
-            <a:spAutoFit/>
-          </a:bodyPr>
-          <a:lstStyle/>
-          <a:p>
-            <a:r>
-              <a:rPr lang="en-US" altLang="zh-CN" sz="6000" b="1">
-                <a:solidFill>
-                  <a:schemeClr val="bg1"/>
-                </a:solidFill>
-                <a:latin typeface="+mj-ea"/>
-                <a:ea typeface="+mj-ea"/>
-              </a:rPr>
-              <a:t>1</a:t>
-            </a:r>
-            <a:endParaRPr lang="en-US" altLang="zh-CN" sz="6000" b="1">
-              <a:solidFill>
-                <a:schemeClr val="bg1"/>
-              </a:solidFill>
-              <a:latin typeface="+mj-ea"/>
-              <a:ea typeface="+mj-ea"/>
-            </a:endParaRPr>
-          </a:p>
-        </p:txBody>
-      </p:sp>
-      <p:sp>
-        <p:nvSpPr>
-          <p:cNvPr id="5" name="文本框1"/>
-          <p:cNvSpPr txBox="1"/>
-          <p:nvPr>
-            <p:custDataLst>
-              <p:tags r:id="rId13"/>
-            </p:custDataLst>
-          </p:nvPr>
-        </p:nvSpPr>
-        <p:spPr>
-          <a:xfrm>
-            <a:off x="8146800" y="5168265"/>
-            <a:ext cx="3600000" cy="460375"/>
-          </a:xfrm>
-          <a:prstGeom prst="rect">
-            <a:avLst/>
-          </a:prstGeom>
-          <a:noFill/>
-        </p:spPr>
-        <p:txBody>
-          <a:bodyPr wrap="square" rtlCol="0">
-            <a:spAutoFit/>
-          </a:bodyPr>
-          <a:lstStyle/>
-          <a:p>
-            <a:pPr marL="0" marR="0" lvl="0" indent="0" algn="ctr" defTabSz="914400" rtl="0" eaLnBrk="1" fontAlgn="auto" latinLnBrk="0" hangingPunct="1">
-              <a:lnSpc>
-                <a:spcPct val="100000"/>
-              </a:lnSpc>
-              <a:spcBef>
-                <a:spcPts val="0"/>
-              </a:spcBef>
-              <a:spcAft>
-                <a:spcPts val="0"/>
-              </a:spcAft>
-              <a:buClrTx/>
-              <a:buSzTx/>
-              <a:buFontTx/>
-              <a:buNone/>
-              <a:defRPr/>
-            </a:pPr>
-            <a:r>
-              <a:rPr lang="en-US" altLang="zh-CN" sz="2400" b="1" dirty="0" smtClean="0">
-                <a:solidFill>
-                  <a:srgbClr val="0064D2"/>
-                </a:solidFill>
-                <a:latin typeface="微软雅黑" panose="020B0503020204020204" pitchFamily="34" charset="-122"/>
-                <a:ea typeface="微软雅黑" panose="020B0503020204020204" pitchFamily="34" charset="-122"/>
-                <a:sym typeface="+mn-ea"/>
-              </a:rPr>
-              <a:t>LLM</a:t>
-            </a:r>
-            <a:r>
-              <a:rPr lang="zh-CN" altLang="en-US" sz="2400" b="1" dirty="0" smtClean="0">
-                <a:solidFill>
-                  <a:srgbClr val="0064D2"/>
-                </a:solidFill>
-                <a:latin typeface="微软雅黑" panose="020B0503020204020204" pitchFamily="34" charset="-122"/>
-                <a:ea typeface="微软雅黑" panose="020B0503020204020204" pitchFamily="34" charset="-122"/>
-                <a:sym typeface="+mn-ea"/>
-              </a:rPr>
-              <a:t>的工作原理简述</a:t>
-            </a:r>
-            <a:endParaRPr lang="zh-CN" altLang="en-US" sz="2400" b="1" dirty="0" smtClean="0">
-              <a:solidFill>
-                <a:srgbClr val="0064D2"/>
-              </a:solidFill>
-              <a:latin typeface="微软雅黑" panose="020B0503020204020204" pitchFamily="34" charset="-122"/>
-              <a:ea typeface="微软雅黑" panose="020B0503020204020204" pitchFamily="34" charset="-122"/>
-              <a:sym typeface="+mn-ea"/>
-            </a:endParaRPr>
-          </a:p>
-        </p:txBody>
-      </p:sp>
-      <p:sp>
-        <p:nvSpPr>
-          <p:cNvPr id="11" name="圆角矩形 34"/>
-          <p:cNvSpPr/>
-          <p:nvPr>
-            <p:custDataLst>
-              <p:tags r:id="rId14"/>
-            </p:custDataLst>
-          </p:nvPr>
-        </p:nvSpPr>
-        <p:spPr>
-          <a:xfrm rot="2700000">
-            <a:off x="8998585" y="2482850"/>
-            <a:ext cx="1892300" cy="1892300"/>
-          </a:xfrm>
-          <a:prstGeom prst="roundRect">
-            <a:avLst>
-              <a:gd name="adj" fmla="val 6319"/>
-            </a:avLst>
-          </a:prstGeom>
-          <a:solidFill>
-            <a:schemeClr val="bg1">
-              <a:lumMod val="95000"/>
-            </a:schemeClr>
-          </a:solidFill>
-          <a:ln>
-            <a:noFill/>
-          </a:ln>
-          <a:effectLst>
-            <a:outerShdw blurRad="152400" dist="63500" dir="8100000" algn="tl" rotWithShape="0">
-              <a:prstClr val="black">
-                <a:alpha val="30000"/>
-              </a:prstClr>
-            </a:outerShdw>
-          </a:effectLst>
-          <a:scene3d>
-            <a:camera prst="orthographicFront"/>
-            <a:lightRig rig="threePt" dir="t"/>
-          </a:scene3d>
-          <a:sp3d prstMaterial="softEdge">
-            <a:bevelT w="38100" h="6350"/>
-          </a:sp3d>
-        </p:spPr>
-        <p:style>
-          <a:lnRef idx="2">
-            <a:schemeClr val="accent1">
-              <a:shade val="50000"/>
-            </a:schemeClr>
-          </a:lnRef>
-          <a:fillRef idx="1">
-            <a:schemeClr val="accent1"/>
-          </a:fillRef>
-          <a:effectRef idx="0">
-            <a:schemeClr val="accent1"/>
-          </a:effectRef>
-          <a:fontRef idx="minor">
-            <a:schemeClr val="lt1"/>
-          </a:fontRef>
-        </p:style>
-        <p:txBody>
-          <a:bodyPr rtlCol="0" anchor="ctr"/>
-          <a:lstStyle/>
-          <a:p>
-            <a:pPr marL="0" marR="0" lvl="0" indent="0" algn="ctr" defTabSz="914400" rtl="0" eaLnBrk="1" fontAlgn="auto" latinLnBrk="0" hangingPunct="1">
-              <a:lnSpc>
-                <a:spcPct val="100000"/>
-              </a:lnSpc>
-              <a:spcBef>
-                <a:spcPts val="0"/>
-              </a:spcBef>
-              <a:spcAft>
-                <a:spcPts val="0"/>
-              </a:spcAft>
-              <a:buClrTx/>
-              <a:buSzTx/>
-              <a:buFontTx/>
-              <a:buNone/>
-              <a:defRPr/>
-            </a:pPr>
-            <a:endParaRPr kumimoji="0" lang="zh-CN" altLang="en-US" sz="2800" b="0" i="0" u="none" strike="noStrike" kern="1200" cap="none" spc="0" normalizeH="0" baseline="0" noProof="0" dirty="0">
-              <a:ln>
-                <a:noFill/>
-              </a:ln>
-              <a:solidFill>
-                <a:prstClr val="white"/>
-              </a:solidFill>
-              <a:effectLst/>
-              <a:uLnTx/>
-              <a:uFillTx/>
-              <a:latin typeface="DIN-BoldItalic" pitchFamily="50" charset="0"/>
-              <a:ea typeface="微软雅黑" panose="020B0503020204020204" pitchFamily="34" charset="-122"/>
-              <a:cs typeface="+mn-cs"/>
-            </a:endParaRPr>
-          </a:p>
-        </p:txBody>
-      </p:sp>
-      <p:sp>
-        <p:nvSpPr>
-          <p:cNvPr id="13" name="圆角矩形 38"/>
-          <p:cNvSpPr/>
-          <p:nvPr>
-            <p:custDataLst>
-              <p:tags r:id="rId15"/>
-            </p:custDataLst>
-          </p:nvPr>
-        </p:nvSpPr>
-        <p:spPr>
-          <a:xfrm rot="2700000">
-            <a:off x="9251214" y="2748280"/>
-            <a:ext cx="1387475" cy="1387475"/>
-          </a:xfrm>
-          <a:prstGeom prst="roundRect">
-            <a:avLst>
-              <a:gd name="adj" fmla="val 6319"/>
-            </a:avLst>
-          </a:prstGeom>
-          <a:solidFill>
-            <a:schemeClr val="accent1">
-              <a:lumMod val="75000"/>
-            </a:schemeClr>
-          </a:solidFill>
-          <a:ln>
-            <a:noFill/>
-          </a:ln>
-        </p:spPr>
-        <p:style>
-          <a:lnRef idx="2">
-            <a:schemeClr val="accent1">
-              <a:shade val="50000"/>
-            </a:schemeClr>
-          </a:lnRef>
-          <a:fillRef idx="1">
-            <a:schemeClr val="accent1"/>
-          </a:fillRef>
-          <a:effectRef idx="0">
-            <a:schemeClr val="accent1"/>
-          </a:effectRef>
-          <a:fontRef idx="minor">
-            <a:schemeClr val="lt1"/>
-          </a:fontRef>
-        </p:style>
-        <p:txBody>
-          <a:bodyPr rtlCol="0" anchor="ctr"/>
-          <a:lstStyle/>
-          <a:p>
-            <a:pPr marL="0" marR="0" lvl="0" indent="0" algn="ctr" defTabSz="914400" rtl="0" eaLnBrk="1" fontAlgn="auto" latinLnBrk="0" hangingPunct="1">
-              <a:lnSpc>
-                <a:spcPct val="100000"/>
-              </a:lnSpc>
-              <a:spcBef>
-                <a:spcPts val="0"/>
-              </a:spcBef>
-              <a:spcAft>
-                <a:spcPts val="0"/>
-              </a:spcAft>
-              <a:buClrTx/>
-              <a:buSzTx/>
-              <a:buFontTx/>
-              <a:buNone/>
-              <a:defRPr/>
-            </a:pPr>
-            <a:endParaRPr kumimoji="0" lang="zh-CN" altLang="en-US" sz="1800" b="0" i="0" u="none" strike="noStrike" kern="1200" cap="none" spc="0" normalizeH="0" baseline="0" noProof="0" dirty="0">
-              <a:ln>
-                <a:noFill/>
-              </a:ln>
-              <a:solidFill>
-                <a:prstClr val="white"/>
-              </a:solidFill>
-              <a:effectLst/>
-              <a:uLnTx/>
-              <a:uFillTx/>
-              <a:latin typeface="等线" panose="02010600030101010101" charset="-122"/>
-              <a:ea typeface="微软雅黑" panose="020B0503020204020204" pitchFamily="34" charset="-122"/>
-              <a:cs typeface="+mn-cs"/>
-            </a:endParaRPr>
-          </a:p>
-        </p:txBody>
-      </p:sp>
-      <p:sp>
-        <p:nvSpPr>
-          <p:cNvPr id="14" name="文本框 13"/>
-          <p:cNvSpPr txBox="1"/>
-          <p:nvPr>
-            <p:custDataLst>
-              <p:tags r:id="rId16"/>
-            </p:custDataLst>
-          </p:nvPr>
-        </p:nvSpPr>
-        <p:spPr>
-          <a:xfrm>
-            <a:off x="9603004" y="2908935"/>
-            <a:ext cx="682625" cy="1014730"/>
-          </a:xfrm>
-          <a:prstGeom prst="rect">
-            <a:avLst/>
-          </a:prstGeom>
-          <a:noFill/>
-        </p:spPr>
-        <p:txBody>
-          <a:bodyPr wrap="square" rtlCol="0">
-            <a:spAutoFit/>
-          </a:bodyPr>
-          <a:lstStyle/>
-          <a:p>
-            <a:r>
-              <a:rPr lang="en-US" altLang="zh-CN" sz="6000" b="1">
-                <a:solidFill>
-                  <a:schemeClr val="bg1"/>
-                </a:solidFill>
-                <a:latin typeface="+mj-ea"/>
-                <a:ea typeface="+mj-ea"/>
-              </a:rPr>
-              <a:t>3</a:t>
-            </a:r>
-            <a:endParaRPr lang="en-US" altLang="zh-CN" sz="6000" b="1">
-              <a:solidFill>
-                <a:schemeClr val="bg1"/>
-              </a:solidFill>
-              <a:latin typeface="+mj-ea"/>
-              <a:ea typeface="+mj-ea"/>
-            </a:endParaRPr>
-          </a:p>
-        </p:txBody>
-      </p:sp>
-      <p:sp>
-        <p:nvSpPr>
-          <p:cNvPr id="15" name="任意多边形 42"/>
-          <p:cNvSpPr/>
-          <p:nvPr>
-            <p:custDataLst>
-              <p:tags r:id="rId17"/>
-            </p:custDataLst>
-          </p:nvPr>
-        </p:nvSpPr>
-        <p:spPr>
-          <a:xfrm>
-            <a:off x="9143311" y="1760220"/>
-            <a:ext cx="1940560" cy="1148715"/>
-          </a:xfrm>
-          <a:custGeom>
-            <a:avLst/>
-            <a:gdLst>
-              <a:gd name="connsiteX0" fmla="*/ 0 w 1940313"/>
-              <a:gd name="connsiteY0" fmla="*/ 791737 h 1148576"/>
-              <a:gd name="connsiteX1" fmla="*/ 791737 w 1940313"/>
-              <a:gd name="connsiteY1" fmla="*/ 0 h 1148576"/>
-              <a:gd name="connsiteX2" fmla="*/ 1940313 w 1940313"/>
-              <a:gd name="connsiteY2" fmla="*/ 1148576 h 1148576"/>
-            </a:gdLst>
-            <a:ahLst/>
-            <a:cxnLst>
-              <a:cxn ang="0">
-                <a:pos x="connsiteX0" y="connsiteY0"/>
-              </a:cxn>
-              <a:cxn ang="0">
-                <a:pos x="connsiteX1" y="connsiteY1"/>
-              </a:cxn>
-              <a:cxn ang="0">
-                <a:pos x="connsiteX2" y="connsiteY2"/>
-              </a:cxn>
-            </a:cxnLst>
-            <a:rect l="l" t="t" r="r" b="b"/>
-            <a:pathLst>
-              <a:path w="1940313" h="1148576">
-                <a:moveTo>
-                  <a:pt x="0" y="791737"/>
-                </a:moveTo>
-                <a:lnTo>
-                  <a:pt x="791737" y="0"/>
-                </a:lnTo>
-                <a:lnTo>
-                  <a:pt x="1940313" y="1148576"/>
-                </a:lnTo>
-              </a:path>
-            </a:pathLst>
-          </a:custGeom>
-          <a:noFill/>
-          <a:ln w="12700">
-            <a:solidFill>
-              <a:srgbClr val="8A8B8F"/>
-            </a:solidFill>
-            <a:prstDash val="dash"/>
-            <a:headEnd type="oval" w="med" len="med"/>
-            <a:tailEnd type="triangle" w="med" len="med"/>
-          </a:ln>
-        </p:spPr>
-        <p:style>
-          <a:lnRef idx="2">
-            <a:schemeClr val="accent1">
-              <a:shade val="50000"/>
-            </a:schemeClr>
-          </a:lnRef>
-          <a:fillRef idx="1">
-            <a:schemeClr val="accent1"/>
-          </a:fillRef>
-          <a:effectRef idx="0">
-            <a:schemeClr val="accent1"/>
-          </a:effectRef>
-          <a:fontRef idx="minor">
-            <a:schemeClr val="lt1"/>
-          </a:fontRef>
-        </p:style>
-        <p:txBody>
-          <a:bodyPr rtlCol="0" anchor="ctr"/>
-          <a:lstStyle/>
-          <a:p>
-            <a:pPr marL="0" marR="0" lvl="0" indent="0" algn="ctr" defTabSz="914400" rtl="0" eaLnBrk="1" fontAlgn="auto" latinLnBrk="0" hangingPunct="1">
-              <a:lnSpc>
-                <a:spcPct val="100000"/>
-              </a:lnSpc>
-              <a:spcBef>
-                <a:spcPts val="0"/>
-              </a:spcBef>
-              <a:spcAft>
-                <a:spcPts val="0"/>
-              </a:spcAft>
-              <a:buClrTx/>
-              <a:buSzTx/>
-              <a:buFontTx/>
-              <a:buNone/>
-              <a:defRPr/>
-            </a:pPr>
-            <a:endParaRPr kumimoji="0" lang="zh-CN" altLang="en-US" sz="1800" b="0" i="0" u="none" strike="noStrike" kern="1200" cap="none" spc="0" normalizeH="0" baseline="0" noProof="0" dirty="0">
-              <a:ln>
-                <a:noFill/>
-              </a:ln>
-              <a:solidFill>
-                <a:prstClr val="white"/>
-              </a:solidFill>
-              <a:effectLst/>
-              <a:uLnTx/>
-              <a:uFillTx/>
-              <a:latin typeface="等线" panose="02010600030101010101" charset="-122"/>
-              <a:ea typeface="微软雅黑" panose="020B0503020204020204" pitchFamily="34" charset="-122"/>
-              <a:cs typeface="+mn-cs"/>
-            </a:endParaRPr>
-          </a:p>
-        </p:txBody>
-      </p:sp>
-      <p:sp>
-        <p:nvSpPr>
-          <p:cNvPr id="17" name="文本框 16"/>
-          <p:cNvSpPr txBox="1"/>
-          <p:nvPr/>
-        </p:nvSpPr>
-        <p:spPr>
-          <a:xfrm>
-            <a:off x="1278000" y="792000"/>
-            <a:ext cx="3932555" cy="583565"/>
-          </a:xfrm>
-          <a:prstGeom prst="rect">
-            <a:avLst/>
-          </a:prstGeom>
-          <a:noFill/>
-        </p:spPr>
-        <p:txBody>
-          <a:bodyPr wrap="square" rtlCol="0">
-            <a:spAutoFit/>
-            <a:scene3d>
-              <a:camera prst="orthographicFront"/>
-              <a:lightRig rig="threePt" dir="t"/>
-            </a:scene3d>
-            <a:sp3d contourW="12700"/>
-          </a:bodyPr>
-          <a:lstStyle>
-            <a:defPPr>
-              <a:defRPr lang="en-US"/>
-            </a:defPPr>
-            <a:lvl1pPr algn="ctr">
-              <a:defRPr sz="3200">
-                <a:gradFill>
-                  <a:gsLst>
-                    <a:gs pos="0">
-                      <a:schemeClr val="tx1">
-                        <a:lumMod val="50000"/>
-                        <a:lumOff val="50000"/>
-                      </a:schemeClr>
-                    </a:gs>
-                    <a:gs pos="100000">
-                      <a:schemeClr val="tx1">
-                        <a:lumMod val="85000"/>
-                        <a:lumOff val="15000"/>
-                      </a:schemeClr>
-                    </a:gs>
-                  </a:gsLst>
-                  <a:lin ang="5400000" scaled="1"/>
-                </a:gradFill>
-              </a:defRPr>
-            </a:lvl1pPr>
-          </a:lstStyle>
-          <a:p>
-            <a:pPr marL="0" marR="0" lvl="0" indent="0" algn="l" defTabSz="914400" rtl="0" eaLnBrk="1" fontAlgn="auto" latinLnBrk="0" hangingPunct="1">
-              <a:lnSpc>
-                <a:spcPct val="100000"/>
-              </a:lnSpc>
-              <a:spcBef>
-                <a:spcPts val="0"/>
-              </a:spcBef>
-              <a:spcAft>
-                <a:spcPts val="0"/>
-              </a:spcAft>
-              <a:buClrTx/>
-              <a:buSzTx/>
-              <a:buFontTx/>
-              <a:buNone/>
-              <a:defRPr/>
-            </a:pPr>
-            <a:r>
-              <a:rPr lang="zh-CN" altLang="zh-CN" b="1" dirty="0">
-                <a:solidFill>
-                  <a:schemeClr val="accent1">
-                    <a:lumMod val="75000"/>
-                  </a:schemeClr>
-                </a:solidFill>
-                <a:latin typeface="微软雅黑" panose="020B0503020204020204" pitchFamily="34" charset="-122"/>
-                <a:ea typeface="微软雅黑" panose="020B0503020204020204" pitchFamily="34" charset="-122"/>
-                <a:cs typeface="微软雅黑" panose="020B0503020204020204" pitchFamily="34" charset="-122"/>
-                <a:sym typeface="+mn-lt"/>
-              </a:rPr>
-              <a:t>知识储备</a:t>
-            </a:r>
-            <a:endParaRPr lang="zh-CN" altLang="zh-CN" b="1" dirty="0">
-              <a:solidFill>
-                <a:schemeClr val="accent1">
-                  <a:lumMod val="75000"/>
-                </a:schemeClr>
-              </a:solidFill>
-              <a:latin typeface="微软雅黑" panose="020B0503020204020204" pitchFamily="34" charset="-122"/>
-              <a:ea typeface="微软雅黑" panose="020B0503020204020204" pitchFamily="34" charset="-122"/>
-              <a:cs typeface="微软雅黑" panose="020B0503020204020204" pitchFamily="34" charset="-122"/>
-              <a:sym typeface="+mn-lt"/>
-            </a:endParaRPr>
-          </a:p>
-        </p:txBody>
-      </p:sp>
-    </p:spTree>
-  </p:cSld>
-  <p:clrMapOvr>
-    <a:masterClrMapping/>
-  </p:clrMapOvr>
-</p:sld>
-</file>
-
-<file path=ppt/slides/slide14.xml><?xml version="1.0" encoding="utf-8"?>
 <p:sld xmlns:a="http://schemas.openxmlformats.org/drawingml/2006/main" xmlns:r="http://schemas.openxmlformats.org/officeDocument/2006/relationships" xmlns:p="http://schemas.openxmlformats.org/presentationml/2006/main">
   <p:cSld>
     <p:spTree>
@@ -13297,7 +11370,7 @@
                 <a:cs typeface="微软雅黑" panose="020B0503020204020204" pitchFamily="34" charset="-122"/>
                 <a:sym typeface="+mn-ea"/>
               </a:rPr>
-              <a:t>在构建大模型的系统提示词时，结构化设计是确保模型输出稳定性、准确性和专业性的核心方法。与碎片化的指令不同，结构化的提示词能够为模型建立一个清晰的逻辑框架，其核心思想是将复杂的任务拆解为若干个标准化的模块。通过使用清晰的分隔符和逻辑层次，可以引导模型更精准地理解人类意图。一个成熟的结构化提示词通常包含五个核心模块：角色设定，用于定义模型的身份；背景信息，提供任务的上下文或目标受众；任务目标，明确模型需要执行的具体动作；约束与规则，规定模型</a:t>
+              <a:t>其次是输入输出是否稳定。</a:t>
             </a:r>
             <a:r>
               <a:rPr lang="en-US" altLang="zh-CN" dirty="0">
@@ -13306,7 +11379,7 @@
                 <a:cs typeface="微软雅黑" panose="020B0503020204020204" pitchFamily="34" charset="-122"/>
                 <a:sym typeface="+mn-ea"/>
               </a:rPr>
-              <a:t>“</a:t>
+              <a:t>Skill</a:t>
             </a:r>
             <a:r>
               <a:rPr lang="zh-CN" altLang="en-US" dirty="0">
@@ -13315,7 +11388,7 @@
                 <a:cs typeface="微软雅黑" panose="020B0503020204020204" pitchFamily="34" charset="-122"/>
                 <a:sym typeface="+mn-ea"/>
               </a:rPr>
-              <a:t>能做</a:t>
+              <a:t>的本质类似于编程中的函数，要想被放心地调用，就必须有明确、可靠的签名。这意味着输入参数要类型明确、结构固定，不能随上下文变化；输出结构也应当相对确定，调用者能够稳定地预期结果格式。如果一个逻辑的输入高度依赖于当前对话的瞬时状态，比如</a:t>
             </a:r>
             <a:r>
               <a:rPr lang="en-US" altLang="zh-CN" dirty="0">
@@ -13324,7 +11397,7 @@
                 <a:cs typeface="微软雅黑" panose="020B0503020204020204" pitchFamily="34" charset="-122"/>
                 <a:sym typeface="+mn-ea"/>
               </a:rPr>
-              <a:t>”</a:t>
+              <a:t>“</a:t>
             </a:r>
             <a:r>
               <a:rPr lang="zh-CN" altLang="en-US" dirty="0">
@@ -13333,7 +11406,7 @@
                 <a:cs typeface="微软雅黑" panose="020B0503020204020204" pitchFamily="34" charset="-122"/>
                 <a:sym typeface="+mn-ea"/>
               </a:rPr>
-              <a:t>和</a:t>
+              <a:t>把上一轮回答中的第二个数字加</a:t>
             </a:r>
             <a:r>
               <a:rPr lang="en-US" altLang="zh-CN" dirty="0">
@@ -13342,7 +11415,7 @@
                 <a:cs typeface="微软雅黑" panose="020B0503020204020204" pitchFamily="34" charset="-122"/>
                 <a:sym typeface="+mn-ea"/>
               </a:rPr>
-              <a:t>“</a:t>
+              <a:t>1”</a:t>
             </a:r>
             <a:r>
               <a:rPr lang="zh-CN" altLang="en-US" dirty="0">
@@ -13351,7 +11424,7 @@
                 <a:cs typeface="微软雅黑" panose="020B0503020204020204" pitchFamily="34" charset="-122"/>
                 <a:sym typeface="+mn-ea"/>
               </a:rPr>
-              <a:t>不能做</a:t>
+              <a:t>，这种指令与特定对话历史紧紧绑在一起，换一个对话就完全失效，那就很难作为独立的</a:t>
             </a:r>
             <a:r>
               <a:rPr lang="en-US" altLang="zh-CN" dirty="0">
@@ -13360,7 +11433,7 @@
                 <a:cs typeface="微软雅黑" panose="020B0503020204020204" pitchFamily="34" charset="-122"/>
                 <a:sym typeface="+mn-ea"/>
               </a:rPr>
-              <a:t>”</a:t>
+              <a:t>Skill</a:t>
             </a:r>
             <a:r>
               <a:rPr lang="zh-CN" altLang="en-US" dirty="0">
@@ -13369,7 +11442,25 @@
                 <a:cs typeface="微软雅黑" panose="020B0503020204020204" pitchFamily="34" charset="-122"/>
                 <a:sym typeface="+mn-ea"/>
               </a:rPr>
-              <a:t>的边界；输出格式，规定返回结果的具体形式。这五个模块共同构成了一个完整的指令体系。</a:t>
+              <a:t>来设计。此外，过于简单的逻辑，比如一句代码就能完成的类型转换，封装成</a:t>
+            </a:r>
+            <a:r>
+              <a:rPr lang="en-US" altLang="zh-CN" dirty="0">
+                <a:latin typeface="微软雅黑" panose="020B0503020204020204" pitchFamily="34" charset="-122"/>
+                <a:ea typeface="微软雅黑" panose="020B0503020204020204" pitchFamily="34" charset="-122"/>
+                <a:cs typeface="微软雅黑" panose="020B0503020204020204" pitchFamily="34" charset="-122"/>
+                <a:sym typeface="+mn-ea"/>
+              </a:rPr>
+              <a:t>Skill</a:t>
+            </a:r>
+            <a:r>
+              <a:rPr lang="zh-CN" altLang="en-US" dirty="0">
+                <a:latin typeface="微软雅黑" panose="020B0503020204020204" pitchFamily="34" charset="-122"/>
+                <a:ea typeface="微软雅黑" panose="020B0503020204020204" pitchFamily="34" charset="-122"/>
+                <a:cs typeface="微软雅黑" panose="020B0503020204020204" pitchFamily="34" charset="-122"/>
+                <a:sym typeface="+mn-ea"/>
+              </a:rPr>
+              <a:t>虽然形式上满足输入输出稳定，但实际上增加了调用链的复杂度，得不偿失。</a:t>
             </a:r>
             <a:endParaRPr lang="zh-CN" altLang="en-US" dirty="0">
               <a:latin typeface="微软雅黑" panose="020B0503020204020204" pitchFamily="34" charset="-122"/>
@@ -13388,7 +11479,7 @@
 </p:sld>
 </file>
 
-<file path=ppt/slides/slide15.xml><?xml version="1.0" encoding="utf-8"?>
+<file path=ppt/slides/slide14.xml><?xml version="1.0" encoding="utf-8"?>
 <p:sld xmlns:a="http://schemas.openxmlformats.org/drawingml/2006/main" xmlns:r="http://schemas.openxmlformats.org/officeDocument/2006/relationships" xmlns:p="http://schemas.openxmlformats.org/presentationml/2006/main">
   <p:cSld>
     <p:spTree>
@@ -13482,7 +11573,7 @@
                 <a:cs typeface="微软雅黑" panose="020B0503020204020204" pitchFamily="34" charset="-122"/>
                 <a:sym typeface="+mn-ea"/>
               </a:rPr>
-              <a:t>相较于将提示词编辑成一段连续的长文本，模型更容易识别具有物理边界的段落结构。因此，建议在编写系统提示词时使用</a:t>
+              <a:t>最后是是否值得单独维护。一个适合封装的</a:t>
             </a:r>
             <a:r>
               <a:rPr lang="en-US" altLang="zh-CN" dirty="0">
@@ -13491,7 +11582,7 @@
                 <a:cs typeface="微软雅黑" panose="020B0503020204020204" pitchFamily="34" charset="-122"/>
                 <a:sym typeface="+mn-ea"/>
               </a:rPr>
-              <a:t>Markdown</a:t>
+              <a:t>Skill</a:t>
             </a:r>
             <a:r>
               <a:rPr lang="zh-CN" altLang="en-US" dirty="0">
@@ -13500,7 +11591,7 @@
                 <a:cs typeface="微软雅黑" panose="020B0503020204020204" pitchFamily="34" charset="-122"/>
                 <a:sym typeface="+mn-ea"/>
               </a:rPr>
-              <a:t>标题、分隔符（如</a:t>
+              <a:t>应当是相对独立的，不与其他能力高度耦合，职责清晰。同时，需要预见到它在未来有迭代优化的可能，比如数据清洗规则会随着业务变化而调整，或者翻译术语库需要持续更新。将这些逻辑聚拢在一个</a:t>
             </a:r>
             <a:r>
               <a:rPr lang="en-US" altLang="zh-CN" dirty="0">
@@ -13509,7 +11600,7 @@
                 <a:cs typeface="微软雅黑" panose="020B0503020204020204" pitchFamily="34" charset="-122"/>
                 <a:sym typeface="+mn-ea"/>
               </a:rPr>
-              <a:t>---</a:t>
+              <a:t>Skill</a:t>
             </a:r>
             <a:r>
               <a:rPr lang="zh-CN" altLang="en-US" dirty="0">
@@ -13518,115 +11609,7 @@
                 <a:cs typeface="微软雅黑" panose="020B0503020204020204" pitchFamily="34" charset="-122"/>
                 <a:sym typeface="+mn-ea"/>
               </a:rPr>
-              <a:t>或</a:t>
-            </a:r>
-            <a:r>
-              <a:rPr lang="en-US" altLang="zh-CN" dirty="0">
-                <a:latin typeface="微软雅黑" panose="020B0503020204020204" pitchFamily="34" charset="-122"/>
-                <a:ea typeface="微软雅黑" panose="020B0503020204020204" pitchFamily="34" charset="-122"/>
-                <a:cs typeface="微软雅黑" panose="020B0503020204020204" pitchFamily="34" charset="-122"/>
-                <a:sym typeface="+mn-ea"/>
-              </a:rPr>
-              <a:t>###</a:t>
-            </a:r>
-            <a:r>
-              <a:rPr lang="zh-CN" altLang="en-US" dirty="0">
-                <a:latin typeface="微软雅黑" panose="020B0503020204020204" pitchFamily="34" charset="-122"/>
-                <a:ea typeface="微软雅黑" panose="020B0503020204020204" pitchFamily="34" charset="-122"/>
-                <a:cs typeface="微软雅黑" panose="020B0503020204020204" pitchFamily="34" charset="-122"/>
-                <a:sym typeface="+mn-ea"/>
-              </a:rPr>
-              <a:t>）或特定的标签（如</a:t>
-            </a:r>
-            <a:r>
-              <a:rPr lang="en-US" altLang="zh-CN" dirty="0">
-                <a:latin typeface="微软雅黑" panose="020B0503020204020204" pitchFamily="34" charset="-122"/>
-                <a:ea typeface="微软雅黑" panose="020B0503020204020204" pitchFamily="34" charset="-122"/>
-                <a:cs typeface="微软雅黑" panose="020B0503020204020204" pitchFamily="34" charset="-122"/>
-                <a:sym typeface="+mn-ea"/>
-              </a:rPr>
-              <a:t>&lt;Task&gt;&lt;/Task&gt;</a:t>
-            </a:r>
-            <a:r>
-              <a:rPr lang="zh-CN" altLang="en-US" dirty="0">
-                <a:latin typeface="微软雅黑" panose="020B0503020204020204" pitchFamily="34" charset="-122"/>
-                <a:ea typeface="微软雅黑" panose="020B0503020204020204" pitchFamily="34" charset="-122"/>
-                <a:cs typeface="微软雅黑" panose="020B0503020204020204" pitchFamily="34" charset="-122"/>
-                <a:sym typeface="+mn-ea"/>
-              </a:rPr>
-              <a:t>）来组织内容。结构化构建不仅是为了提升模型的表现，更是为了增强提示词的可维护性。当模型输出不符合预期时，你可以快速定位问题所在</a:t>
-            </a:r>
-            <a:r>
-              <a:rPr lang="en-US" altLang="zh-CN" dirty="0">
-                <a:latin typeface="微软雅黑" panose="020B0503020204020204" pitchFamily="34" charset="-122"/>
-                <a:ea typeface="微软雅黑" panose="020B0503020204020204" pitchFamily="34" charset="-122"/>
-                <a:cs typeface="微软雅黑" panose="020B0503020204020204" pitchFamily="34" charset="-122"/>
-                <a:sym typeface="+mn-ea"/>
-              </a:rPr>
-              <a:t>——</a:t>
-            </a:r>
-            <a:r>
-              <a:rPr lang="zh-CN" altLang="en-US" dirty="0">
-                <a:latin typeface="微软雅黑" panose="020B0503020204020204" pitchFamily="34" charset="-122"/>
-                <a:ea typeface="微软雅黑" panose="020B0503020204020204" pitchFamily="34" charset="-122"/>
-                <a:cs typeface="微软雅黑" panose="020B0503020204020204" pitchFamily="34" charset="-122"/>
-                <a:sym typeface="+mn-ea"/>
-              </a:rPr>
-              <a:t>是角色设定不够具体，还是约束条件存在冲突</a:t>
-            </a:r>
-            <a:r>
-              <a:rPr lang="en-US" altLang="zh-CN" dirty="0">
-                <a:latin typeface="微软雅黑" panose="020B0503020204020204" pitchFamily="34" charset="-122"/>
-                <a:ea typeface="微软雅黑" panose="020B0503020204020204" pitchFamily="34" charset="-122"/>
-                <a:cs typeface="微软雅黑" panose="020B0503020204020204" pitchFamily="34" charset="-122"/>
-                <a:sym typeface="+mn-ea"/>
-              </a:rPr>
-              <a:t>——</a:t>
-            </a:r>
-            <a:r>
-              <a:rPr lang="zh-CN" altLang="en-US" dirty="0">
-                <a:latin typeface="微软雅黑" panose="020B0503020204020204" pitchFamily="34" charset="-122"/>
-                <a:ea typeface="微软雅黑" panose="020B0503020204020204" pitchFamily="34" charset="-122"/>
-                <a:cs typeface="微软雅黑" panose="020B0503020204020204" pitchFamily="34" charset="-122"/>
-                <a:sym typeface="+mn-ea"/>
-              </a:rPr>
-              <a:t>从而进行针对性的优化。这种设计思路将提示词工程从难以捉摸的</a:t>
-            </a:r>
-            <a:r>
-              <a:rPr lang="en-US" altLang="zh-CN" dirty="0">
-                <a:latin typeface="微软雅黑" panose="020B0503020204020204" pitchFamily="34" charset="-122"/>
-                <a:ea typeface="微软雅黑" panose="020B0503020204020204" pitchFamily="34" charset="-122"/>
-                <a:cs typeface="微软雅黑" panose="020B0503020204020204" pitchFamily="34" charset="-122"/>
-                <a:sym typeface="+mn-ea"/>
-              </a:rPr>
-              <a:t>“</a:t>
-            </a:r>
-            <a:r>
-              <a:rPr lang="zh-CN" altLang="en-US" dirty="0">
-                <a:latin typeface="微软雅黑" panose="020B0503020204020204" pitchFamily="34" charset="-122"/>
-                <a:ea typeface="微软雅黑" panose="020B0503020204020204" pitchFamily="34" charset="-122"/>
-                <a:cs typeface="微软雅黑" panose="020B0503020204020204" pitchFamily="34" charset="-122"/>
-                <a:sym typeface="+mn-ea"/>
-              </a:rPr>
-              <a:t>玄学</a:t>
-            </a:r>
-            <a:r>
-              <a:rPr lang="en-US" altLang="zh-CN" dirty="0">
-                <a:latin typeface="微软雅黑" panose="020B0503020204020204" pitchFamily="34" charset="-122"/>
-                <a:ea typeface="微软雅黑" panose="020B0503020204020204" pitchFamily="34" charset="-122"/>
-                <a:cs typeface="微软雅黑" panose="020B0503020204020204" pitchFamily="34" charset="-122"/>
-                <a:sym typeface="+mn-ea"/>
-              </a:rPr>
-              <a:t>”</a:t>
-            </a:r>
-            <a:r>
-              <a:rPr lang="zh-CN" altLang="en-US" dirty="0">
-                <a:latin typeface="微软雅黑" panose="020B0503020204020204" pitchFamily="34" charset="-122"/>
-                <a:ea typeface="微软雅黑" panose="020B0503020204020204" pitchFamily="34" charset="-122"/>
-                <a:cs typeface="微软雅黑" panose="020B0503020204020204" pitchFamily="34" charset="-122"/>
-                <a:sym typeface="+mn-ea"/>
-              </a:rPr>
-              <a:t>转化为可科学迭代的过程，使得每一次调整都有据可依。</a:t>
+              <a:t>内部，后续的修改就只需要在一个地方进行，不会牵一发而动全身。相反，如果某段逻辑只在一个特定流程里用一次，且未来几乎不会再变，单独把它抽出来反而会增加项目的理解和导航成本。因此，在决定是否封装时，需要综合评估复用频率、接口稳定性和维护收益。</a:t>
             </a:r>
             <a:endParaRPr lang="zh-CN" altLang="en-US" dirty="0">
               <a:latin typeface="微软雅黑" panose="020B0503020204020204" pitchFamily="34" charset="-122"/>
@@ -13693,1210 +11676,6 @@
       <p:sp>
         <p:nvSpPr>
           <p:cNvPr id="2" name="文本框 1"/>
-          <p:cNvSpPr txBox="1"/>
-          <p:nvPr/>
-        </p:nvSpPr>
-        <p:spPr>
-          <a:xfrm>
-            <a:off x="0" y="793750"/>
-            <a:ext cx="1351262" cy="583565"/>
-          </a:xfrm>
-          <a:prstGeom prst="rect">
-            <a:avLst/>
-          </a:prstGeom>
-          <a:noFill/>
-        </p:spPr>
-        <p:txBody>
-          <a:bodyPr wrap="square" rtlCol="0">
-            <a:spAutoFit/>
-            <a:scene3d>
-              <a:camera prst="orthographicFront"/>
-              <a:lightRig rig="threePt" dir="t"/>
-            </a:scene3d>
-            <a:sp3d contourW="12700"/>
-          </a:bodyPr>
-          <a:lstStyle/>
-          <a:p>
-            <a:pPr algn="ctr"/>
-            <a:r>
-              <a:rPr lang="en-US" sz="3200" dirty="0" smtClean="0">
-                <a:solidFill>
-                  <a:srgbClr val="3F396C"/>
-                </a:solidFill>
-                <a:latin typeface="思源宋体" panose="02020700000000000000" charset="-122"/>
-                <a:ea typeface="思源宋体" panose="02020700000000000000" charset="-122"/>
-              </a:rPr>
-              <a:t>03</a:t>
-            </a:r>
-            <a:endParaRPr lang="en-US" sz="3200" dirty="0" smtClean="0">
-              <a:solidFill>
-                <a:srgbClr val="3F396C"/>
-              </a:solidFill>
-              <a:latin typeface="思源宋体" panose="02020700000000000000" charset="-122"/>
-              <a:ea typeface="思源宋体" panose="02020700000000000000" charset="-122"/>
-            </a:endParaRPr>
-          </a:p>
-        </p:txBody>
-      </p:sp>
-      <p:sp>
-        <p:nvSpPr>
-          <p:cNvPr id="17" name="文本框 16"/>
-          <p:cNvSpPr txBox="1"/>
-          <p:nvPr/>
-        </p:nvSpPr>
-        <p:spPr>
-          <a:xfrm>
-            <a:off x="1278000" y="792000"/>
-            <a:ext cx="3932555" cy="583565"/>
-          </a:xfrm>
-          <a:prstGeom prst="rect">
-            <a:avLst/>
-          </a:prstGeom>
-          <a:noFill/>
-        </p:spPr>
-        <p:txBody>
-          <a:bodyPr wrap="square" rtlCol="0">
-            <a:spAutoFit/>
-            <a:scene3d>
-              <a:camera prst="orthographicFront"/>
-              <a:lightRig rig="threePt" dir="t"/>
-            </a:scene3d>
-            <a:sp3d contourW="12700"/>
-          </a:bodyPr>
-          <a:lstStyle>
-            <a:defPPr>
-              <a:defRPr lang="en-US"/>
-            </a:defPPr>
-            <a:lvl1pPr algn="ctr">
-              <a:defRPr sz="3200">
-                <a:gradFill>
-                  <a:gsLst>
-                    <a:gs pos="0">
-                      <a:schemeClr val="tx1">
-                        <a:lumMod val="50000"/>
-                        <a:lumOff val="50000"/>
-                      </a:schemeClr>
-                    </a:gs>
-                    <a:gs pos="100000">
-                      <a:schemeClr val="tx1">
-                        <a:lumMod val="85000"/>
-                        <a:lumOff val="15000"/>
-                      </a:schemeClr>
-                    </a:gs>
-                  </a:gsLst>
-                  <a:lin ang="5400000" scaled="1"/>
-                </a:gradFill>
-              </a:defRPr>
-            </a:lvl1pPr>
-          </a:lstStyle>
-          <a:p>
-            <a:pPr marL="0" marR="0" lvl="0" indent="0" algn="l" defTabSz="914400" rtl="0" eaLnBrk="1" fontAlgn="auto" latinLnBrk="0" hangingPunct="1">
-              <a:lnSpc>
-                <a:spcPct val="100000"/>
-              </a:lnSpc>
-              <a:spcBef>
-                <a:spcPts val="0"/>
-              </a:spcBef>
-              <a:spcAft>
-                <a:spcPts val="0"/>
-              </a:spcAft>
-              <a:buClrTx/>
-              <a:buSzTx/>
-              <a:buFontTx/>
-              <a:buNone/>
-              <a:defRPr/>
-            </a:pPr>
-            <a:r>
-              <a:rPr lang="zh-CN" altLang="en-US" b="1" dirty="0">
-                <a:solidFill>
-                  <a:schemeClr val="accent1">
-                    <a:lumMod val="75000"/>
-                  </a:schemeClr>
-                </a:solidFill>
-                <a:latin typeface="微软雅黑" panose="020B0503020204020204" pitchFamily="34" charset="-122"/>
-                <a:ea typeface="微软雅黑" panose="020B0503020204020204" pitchFamily="34" charset="-122"/>
-                <a:cs typeface="微软雅黑" panose="020B0503020204020204" pitchFamily="34" charset="-122"/>
-                <a:sym typeface="+mn-lt"/>
-              </a:rPr>
-              <a:t>知识储备</a:t>
-            </a:r>
-            <a:endParaRPr lang="en-US" altLang="zh-CN" b="1" dirty="0">
-              <a:solidFill>
-                <a:schemeClr val="accent1">
-                  <a:lumMod val="75000"/>
-                </a:schemeClr>
-              </a:solidFill>
-              <a:latin typeface="微软雅黑" panose="020B0503020204020204" pitchFamily="34" charset="-122"/>
-              <a:ea typeface="微软雅黑" panose="020B0503020204020204" pitchFamily="34" charset="-122"/>
-              <a:cs typeface="微软雅黑" panose="020B0503020204020204" pitchFamily="34" charset="-122"/>
-              <a:sym typeface="+mn-lt"/>
-            </a:endParaRPr>
-          </a:p>
-        </p:txBody>
-      </p:sp>
-    </p:spTree>
-  </p:cSld>
-  <p:clrMapOvr>
-    <a:masterClrMapping/>
-  </p:clrMapOvr>
-</p:sld>
-</file>
-
-<file path=ppt/slides/slide16.xml><?xml version="1.0" encoding="utf-8"?>
-<p:sld xmlns:a="http://schemas.openxmlformats.org/drawingml/2006/main" xmlns:r="http://schemas.openxmlformats.org/officeDocument/2006/relationships" xmlns:p="http://schemas.openxmlformats.org/presentationml/2006/main">
-  <p:cSld>
-    <p:spTree>
-      <p:nvGrpSpPr>
-        <p:cNvPr id="1" name=""/>
-        <p:cNvGrpSpPr/>
-        <p:nvPr/>
-      </p:nvGrpSpPr>
-      <p:grpSpPr>
-        <a:xfrm>
-          <a:off x="0" y="0"/>
-          <a:ext cx="0" cy="0"/>
-          <a:chOff x="0" y="0"/>
-          <a:chExt cx="0" cy="0"/>
-        </a:xfrm>
-      </p:grpSpPr>
-      <p:grpSp>
-        <p:nvGrpSpPr>
-          <p:cNvPr id="3" name="组合 2"/>
-          <p:cNvGrpSpPr/>
-          <p:nvPr/>
-        </p:nvGrpSpPr>
-        <p:grpSpPr>
-          <a:xfrm>
-            <a:off x="4169907" y="1773555"/>
-            <a:ext cx="7664450" cy="4690745"/>
-            <a:chOff x="450850" y="1397000"/>
-            <a:chExt cx="5784850" cy="4690745"/>
-          </a:xfrm>
-        </p:grpSpPr>
-        <p:sp>
-          <p:nvSpPr>
-            <p:cNvPr id="11" name="矩形 10"/>
-            <p:cNvSpPr/>
-            <p:nvPr>
-              <p:custDataLst>
-                <p:tags r:id="rId1"/>
-              </p:custDataLst>
-            </p:nvPr>
-          </p:nvSpPr>
-          <p:spPr>
-            <a:xfrm>
-              <a:off x="450850" y="1397000"/>
-              <a:ext cx="5784850" cy="4690745"/>
-            </a:xfrm>
-            <a:prstGeom prst="rect">
-              <a:avLst/>
-            </a:prstGeom>
-          </p:spPr>
-          <p:style>
-            <a:lnRef idx="2">
-              <a:schemeClr val="accent1"/>
-            </a:lnRef>
-            <a:fillRef idx="1">
-              <a:schemeClr val="lt1"/>
-            </a:fillRef>
-            <a:effectRef idx="0">
-              <a:schemeClr val="accent1"/>
-            </a:effectRef>
-            <a:fontRef idx="minor">
-              <a:schemeClr val="dk1"/>
-            </a:fontRef>
-          </p:style>
-          <p:txBody>
-            <a:bodyPr rtlCol="0" anchor="ctr">
-              <a:normAutofit/>
-            </a:bodyPr>
-            <a:lstStyle/>
-            <a:p>
-              <a:pPr>
-                <a:lnSpc>
-                  <a:spcPct val="120000"/>
-                </a:lnSpc>
-              </a:pPr>
-              <a:endParaRPr lang="zh-CN" altLang="en-US" sz="1400" spc="150" dirty="0">
-                <a:latin typeface="Arial" panose="020B0604020202020204" pitchFamily="34" charset="0"/>
-                <a:ea typeface="微软雅黑" panose="020B0503020204020204" pitchFamily="34" charset="-122"/>
-                <a:sym typeface="Arial" panose="020B0604020202020204" pitchFamily="34" charset="0"/>
-              </a:endParaRPr>
-            </a:p>
-          </p:txBody>
-        </p:sp>
-        <p:sp>
-          <p:nvSpPr>
-            <p:cNvPr id="12" name="矩形 11"/>
-            <p:cNvSpPr/>
-            <p:nvPr>
-              <p:custDataLst>
-                <p:tags r:id="rId2"/>
-              </p:custDataLst>
-            </p:nvPr>
-          </p:nvSpPr>
-          <p:spPr>
-            <a:xfrm>
-              <a:off x="574040" y="1519555"/>
-              <a:ext cx="5521960" cy="4351655"/>
-            </a:xfrm>
-            <a:prstGeom prst="rect">
-              <a:avLst/>
-            </a:prstGeom>
-            <a:solidFill>
-              <a:srgbClr val="4276AA"/>
-            </a:solidFill>
-            <a:ln>
-              <a:noFill/>
-            </a:ln>
-          </p:spPr>
-          <p:style>
-            <a:lnRef idx="2">
-              <a:srgbClr val="8590CA">
-                <a:shade val="50000"/>
-              </a:srgbClr>
-            </a:lnRef>
-            <a:fillRef idx="1">
-              <a:srgbClr val="8590CA"/>
-            </a:fillRef>
-            <a:effectRef idx="0">
-              <a:srgbClr val="8590CA"/>
-            </a:effectRef>
-            <a:fontRef idx="minor">
-              <a:sysClr val="window" lastClr="FFFFFF"/>
-            </a:fontRef>
-          </p:style>
-          <p:txBody>
-            <a:bodyPr rtlCol="0" anchor="ctr">
-              <a:normAutofit/>
-            </a:bodyPr>
-            <a:lstStyle/>
-            <a:p>
-              <a:pPr>
-                <a:lnSpc>
-                  <a:spcPct val="120000"/>
-                </a:lnSpc>
-              </a:pPr>
-              <a:endParaRPr lang="zh-CN" altLang="en-US" sz="1400" spc="150" dirty="0">
-                <a:latin typeface="Arial" panose="020B0604020202020204" pitchFamily="34" charset="0"/>
-                <a:ea typeface="微软雅黑" panose="020B0503020204020204" pitchFamily="34" charset="-122"/>
-                <a:sym typeface="Arial" panose="020B0604020202020204" pitchFamily="34" charset="0"/>
-              </a:endParaRPr>
-            </a:p>
-          </p:txBody>
-        </p:sp>
-      </p:grpSp>
-      <p:sp>
-        <p:nvSpPr>
-          <p:cNvPr id="13" name="文本框 12"/>
-          <p:cNvSpPr txBox="1"/>
-          <p:nvPr>
-            <p:custDataLst>
-              <p:tags r:id="rId3"/>
-            </p:custDataLst>
-          </p:nvPr>
-        </p:nvSpPr>
-        <p:spPr>
-          <a:xfrm>
-            <a:off x="4493895" y="1978025"/>
-            <a:ext cx="6997700" cy="4181475"/>
-          </a:xfrm>
-          <a:prstGeom prst="rect">
-            <a:avLst/>
-          </a:prstGeom>
-          <a:noFill/>
-        </p:spPr>
-        <p:txBody>
-          <a:bodyPr wrap="square" rtlCol="0" anchor="t">
-            <a:noAutofit/>
-          </a:bodyPr>
-          <a:lstStyle/>
-          <a:p>
-            <a:pPr indent="457200" fontAlgn="auto">
-              <a:lnSpc>
-                <a:spcPct val="150000"/>
-              </a:lnSpc>
-            </a:pPr>
-            <a:r>
-              <a:rPr lang="zh-CN" dirty="0">
-                <a:solidFill>
-                  <a:schemeClr val="bg1"/>
-                </a:solidFill>
-                <a:latin typeface="微软雅黑" panose="020B0503020204020204" pitchFamily="34" charset="-122"/>
-                <a:ea typeface="微软雅黑" panose="020B0503020204020204" pitchFamily="34" charset="-122"/>
-                <a:cs typeface="微软雅黑" panose="020B0503020204020204" pitchFamily="34" charset="-122"/>
-                <a:sym typeface="+mn-ea"/>
-              </a:rPr>
-              <a:t>许多初学者在调整提示词时，常见的问题不是不会写，而是改乱了。修改了一句之后，效果变好还是变差往往说不清楚；模型参数变了还是提示词变了，也记不住。久而久之，优化过程就变成了</a:t>
-            </a:r>
-            <a:r>
-              <a:rPr lang="en-US" altLang="zh-CN" dirty="0">
-                <a:solidFill>
-                  <a:schemeClr val="bg1"/>
-                </a:solidFill>
-                <a:latin typeface="微软雅黑" panose="020B0503020204020204" pitchFamily="34" charset="-122"/>
-                <a:ea typeface="微软雅黑" panose="020B0503020204020204" pitchFamily="34" charset="-122"/>
-                <a:cs typeface="微软雅黑" panose="020B0503020204020204" pitchFamily="34" charset="-122"/>
-                <a:sym typeface="+mn-ea"/>
-              </a:rPr>
-              <a:t>“</a:t>
-            </a:r>
-            <a:r>
-              <a:rPr lang="zh-CN" altLang="en-US" dirty="0">
-                <a:solidFill>
-                  <a:schemeClr val="bg1"/>
-                </a:solidFill>
-                <a:latin typeface="微软雅黑" panose="020B0503020204020204" pitchFamily="34" charset="-122"/>
-                <a:ea typeface="微软雅黑" panose="020B0503020204020204" pitchFamily="34" charset="-122"/>
-                <a:cs typeface="微软雅黑" panose="020B0503020204020204" pitchFamily="34" charset="-122"/>
-                <a:sym typeface="+mn-ea"/>
-              </a:rPr>
-              <a:t>玄学试错</a:t>
-            </a:r>
-            <a:r>
-              <a:rPr lang="en-US" altLang="zh-CN" dirty="0">
-                <a:solidFill>
-                  <a:schemeClr val="bg1"/>
-                </a:solidFill>
-                <a:latin typeface="微软雅黑" panose="020B0503020204020204" pitchFamily="34" charset="-122"/>
-                <a:ea typeface="微软雅黑" panose="020B0503020204020204" pitchFamily="34" charset="-122"/>
-                <a:cs typeface="微软雅黑" panose="020B0503020204020204" pitchFamily="34" charset="-122"/>
-                <a:sym typeface="+mn-ea"/>
-              </a:rPr>
-              <a:t>”</a:t>
-            </a:r>
-            <a:r>
-              <a:rPr lang="zh-CN" altLang="en-US" dirty="0">
-                <a:solidFill>
-                  <a:schemeClr val="bg1"/>
-                </a:solidFill>
-                <a:latin typeface="微软雅黑" panose="020B0503020204020204" pitchFamily="34" charset="-122"/>
-                <a:ea typeface="微软雅黑" panose="020B0503020204020204" pitchFamily="34" charset="-122"/>
-                <a:cs typeface="微软雅黑" panose="020B0503020204020204" pitchFamily="34" charset="-122"/>
-                <a:sym typeface="+mn-ea"/>
-              </a:rPr>
-              <a:t>。因此，提示词工程必须建立版本管理的意识。至少要做到以下几点：每次修改只改变一个关键变量，例如只修改角色描述，或只调整输出格式；为每个提示词版本进行编号，例如</a:t>
-            </a:r>
-            <a:r>
-              <a:rPr lang="en-US" altLang="zh-CN" dirty="0">
-                <a:solidFill>
-                  <a:schemeClr val="bg1"/>
-                </a:solidFill>
-                <a:latin typeface="微软雅黑" panose="020B0503020204020204" pitchFamily="34" charset="-122"/>
-                <a:ea typeface="微软雅黑" panose="020B0503020204020204" pitchFamily="34" charset="-122"/>
-                <a:cs typeface="微软雅黑" panose="020B0503020204020204" pitchFamily="34" charset="-122"/>
-                <a:sym typeface="+mn-ea"/>
-              </a:rPr>
-              <a:t>v1.0</a:t>
-            </a:r>
-            <a:r>
-              <a:rPr lang="zh-CN" altLang="en-US" dirty="0">
-                <a:solidFill>
-                  <a:schemeClr val="bg1"/>
-                </a:solidFill>
-                <a:latin typeface="微软雅黑" panose="020B0503020204020204" pitchFamily="34" charset="-122"/>
-                <a:ea typeface="微软雅黑" panose="020B0503020204020204" pitchFamily="34" charset="-122"/>
-                <a:cs typeface="微软雅黑" panose="020B0503020204020204" pitchFamily="34" charset="-122"/>
-                <a:sym typeface="+mn-ea"/>
-              </a:rPr>
-              <a:t>、</a:t>
-            </a:r>
-            <a:r>
-              <a:rPr lang="en-US" altLang="zh-CN" dirty="0">
-                <a:solidFill>
-                  <a:schemeClr val="bg1"/>
-                </a:solidFill>
-                <a:latin typeface="微软雅黑" panose="020B0503020204020204" pitchFamily="34" charset="-122"/>
-                <a:ea typeface="微软雅黑" panose="020B0503020204020204" pitchFamily="34" charset="-122"/>
-                <a:cs typeface="微软雅黑" panose="020B0503020204020204" pitchFamily="34" charset="-122"/>
-                <a:sym typeface="+mn-ea"/>
-              </a:rPr>
-              <a:t>v1.1</a:t>
-            </a:r>
-            <a:r>
-              <a:rPr lang="zh-CN" altLang="en-US" dirty="0">
-                <a:solidFill>
-                  <a:schemeClr val="bg1"/>
-                </a:solidFill>
-                <a:latin typeface="微软雅黑" panose="020B0503020204020204" pitchFamily="34" charset="-122"/>
-                <a:ea typeface="微软雅黑" panose="020B0503020204020204" pitchFamily="34" charset="-122"/>
-                <a:cs typeface="微软雅黑" panose="020B0503020204020204" pitchFamily="34" charset="-122"/>
-                <a:sym typeface="+mn-ea"/>
-              </a:rPr>
-              <a:t>、</a:t>
-            </a:r>
-            <a:r>
-              <a:rPr lang="en-US" altLang="zh-CN" dirty="0">
-                <a:solidFill>
-                  <a:schemeClr val="bg1"/>
-                </a:solidFill>
-                <a:latin typeface="微软雅黑" panose="020B0503020204020204" pitchFamily="34" charset="-122"/>
-                <a:ea typeface="微软雅黑" panose="020B0503020204020204" pitchFamily="34" charset="-122"/>
-                <a:cs typeface="微软雅黑" panose="020B0503020204020204" pitchFamily="34" charset="-122"/>
-                <a:sym typeface="+mn-ea"/>
-              </a:rPr>
-              <a:t>v2.0</a:t>
-            </a:r>
-            <a:r>
-              <a:rPr lang="zh-CN" altLang="en-US" dirty="0">
-                <a:solidFill>
-                  <a:schemeClr val="bg1"/>
-                </a:solidFill>
-                <a:latin typeface="微软雅黑" panose="020B0503020204020204" pitchFamily="34" charset="-122"/>
-                <a:ea typeface="微软雅黑" panose="020B0503020204020204" pitchFamily="34" charset="-122"/>
-                <a:cs typeface="微软雅黑" panose="020B0503020204020204" pitchFamily="34" charset="-122"/>
-                <a:sym typeface="+mn-ea"/>
-              </a:rPr>
-              <a:t>；记录每次修改的目的，例如</a:t>
-            </a:r>
-            <a:r>
-              <a:rPr lang="en-US" altLang="zh-CN" dirty="0">
-                <a:solidFill>
-                  <a:schemeClr val="bg1"/>
-                </a:solidFill>
-                <a:latin typeface="微软雅黑" panose="020B0503020204020204" pitchFamily="34" charset="-122"/>
-                <a:ea typeface="微软雅黑" panose="020B0503020204020204" pitchFamily="34" charset="-122"/>
-                <a:cs typeface="微软雅黑" panose="020B0503020204020204" pitchFamily="34" charset="-122"/>
-                <a:sym typeface="+mn-ea"/>
-              </a:rPr>
-              <a:t>“</a:t>
-            </a:r>
-            <a:r>
-              <a:rPr lang="zh-CN" altLang="en-US" dirty="0">
-                <a:solidFill>
-                  <a:schemeClr val="bg1"/>
-                </a:solidFill>
-                <a:latin typeface="微软雅黑" panose="020B0503020204020204" pitchFamily="34" charset="-122"/>
-                <a:ea typeface="微软雅黑" panose="020B0503020204020204" pitchFamily="34" charset="-122"/>
-                <a:cs typeface="微软雅黑" panose="020B0503020204020204" pitchFamily="34" charset="-122"/>
-                <a:sym typeface="+mn-ea"/>
-              </a:rPr>
-              <a:t>增加拒答机制</a:t>
-            </a:r>
-            <a:r>
-              <a:rPr lang="en-US" altLang="zh-CN" dirty="0">
-                <a:solidFill>
-                  <a:schemeClr val="bg1"/>
-                </a:solidFill>
-                <a:latin typeface="微软雅黑" panose="020B0503020204020204" pitchFamily="34" charset="-122"/>
-                <a:ea typeface="微软雅黑" panose="020B0503020204020204" pitchFamily="34" charset="-122"/>
-                <a:cs typeface="微软雅黑" panose="020B0503020204020204" pitchFamily="34" charset="-122"/>
-                <a:sym typeface="+mn-ea"/>
-              </a:rPr>
-              <a:t>”</a:t>
-            </a:r>
-            <a:r>
-              <a:rPr lang="zh-CN" altLang="en-US" dirty="0">
-                <a:solidFill>
-                  <a:schemeClr val="bg1"/>
-                </a:solidFill>
-                <a:latin typeface="微软雅黑" panose="020B0503020204020204" pitchFamily="34" charset="-122"/>
-                <a:ea typeface="微软雅黑" panose="020B0503020204020204" pitchFamily="34" charset="-122"/>
-                <a:cs typeface="微软雅黑" panose="020B0503020204020204" pitchFamily="34" charset="-122"/>
-                <a:sym typeface="+mn-ea"/>
-              </a:rPr>
-              <a:t>、</a:t>
-            </a:r>
-            <a:r>
-              <a:rPr lang="en-US" altLang="zh-CN" dirty="0">
-                <a:solidFill>
-                  <a:schemeClr val="bg1"/>
-                </a:solidFill>
-                <a:latin typeface="微软雅黑" panose="020B0503020204020204" pitchFamily="34" charset="-122"/>
-                <a:ea typeface="微软雅黑" panose="020B0503020204020204" pitchFamily="34" charset="-122"/>
-                <a:cs typeface="微软雅黑" panose="020B0503020204020204" pitchFamily="34" charset="-122"/>
-                <a:sym typeface="+mn-ea"/>
-              </a:rPr>
-              <a:t>“</a:t>
-            </a:r>
-            <a:r>
-              <a:rPr lang="zh-CN" altLang="en-US" dirty="0">
-                <a:solidFill>
-                  <a:schemeClr val="bg1"/>
-                </a:solidFill>
-                <a:latin typeface="微软雅黑" panose="020B0503020204020204" pitchFamily="34" charset="-122"/>
-                <a:ea typeface="微软雅黑" panose="020B0503020204020204" pitchFamily="34" charset="-122"/>
-                <a:cs typeface="微软雅黑" panose="020B0503020204020204" pitchFamily="34" charset="-122"/>
-                <a:sym typeface="+mn-ea"/>
-              </a:rPr>
-              <a:t>优化表格输出</a:t>
-            </a:r>
-            <a:r>
-              <a:rPr lang="en-US" altLang="zh-CN" dirty="0">
-                <a:solidFill>
-                  <a:schemeClr val="bg1"/>
-                </a:solidFill>
-                <a:latin typeface="微软雅黑" panose="020B0503020204020204" pitchFamily="34" charset="-122"/>
-                <a:ea typeface="微软雅黑" panose="020B0503020204020204" pitchFamily="34" charset="-122"/>
-                <a:cs typeface="微软雅黑" panose="020B0503020204020204" pitchFamily="34" charset="-122"/>
-                <a:sym typeface="+mn-ea"/>
-              </a:rPr>
-              <a:t>”</a:t>
-            </a:r>
-            <a:r>
-              <a:rPr lang="zh-CN" altLang="en-US" dirty="0">
-                <a:solidFill>
-                  <a:schemeClr val="bg1"/>
-                </a:solidFill>
-                <a:latin typeface="微软雅黑" panose="020B0503020204020204" pitchFamily="34" charset="-122"/>
-                <a:ea typeface="微软雅黑" panose="020B0503020204020204" pitchFamily="34" charset="-122"/>
-                <a:cs typeface="微软雅黑" panose="020B0503020204020204" pitchFamily="34" charset="-122"/>
-                <a:sym typeface="+mn-ea"/>
-              </a:rPr>
-              <a:t>或</a:t>
-            </a:r>
-            <a:r>
-              <a:rPr lang="en-US" altLang="zh-CN" dirty="0">
-                <a:solidFill>
-                  <a:schemeClr val="bg1"/>
-                </a:solidFill>
-                <a:latin typeface="微软雅黑" panose="020B0503020204020204" pitchFamily="34" charset="-122"/>
-                <a:ea typeface="微软雅黑" panose="020B0503020204020204" pitchFamily="34" charset="-122"/>
-                <a:cs typeface="微软雅黑" panose="020B0503020204020204" pitchFamily="34" charset="-122"/>
-                <a:sym typeface="+mn-ea"/>
-              </a:rPr>
-              <a:t>“</a:t>
-            </a:r>
-            <a:r>
-              <a:rPr lang="zh-CN" altLang="en-US" dirty="0">
-                <a:solidFill>
-                  <a:schemeClr val="bg1"/>
-                </a:solidFill>
-                <a:latin typeface="微软雅黑" panose="020B0503020204020204" pitchFamily="34" charset="-122"/>
-                <a:ea typeface="微软雅黑" panose="020B0503020204020204" pitchFamily="34" charset="-122"/>
-                <a:cs typeface="微软雅黑" panose="020B0503020204020204" pitchFamily="34" charset="-122"/>
-                <a:sym typeface="+mn-ea"/>
-              </a:rPr>
-              <a:t>减少废话</a:t>
-            </a:r>
-            <a:r>
-              <a:rPr lang="en-US" altLang="zh-CN" dirty="0">
-                <a:solidFill>
-                  <a:schemeClr val="bg1"/>
-                </a:solidFill>
-                <a:latin typeface="微软雅黑" panose="020B0503020204020204" pitchFamily="34" charset="-122"/>
-                <a:ea typeface="微软雅黑" panose="020B0503020204020204" pitchFamily="34" charset="-122"/>
-                <a:cs typeface="微软雅黑" panose="020B0503020204020204" pitchFamily="34" charset="-122"/>
-                <a:sym typeface="+mn-ea"/>
-              </a:rPr>
-              <a:t>”</a:t>
-            </a:r>
-            <a:r>
-              <a:rPr lang="zh-CN" altLang="en-US" dirty="0">
-                <a:solidFill>
-                  <a:schemeClr val="bg1"/>
-                </a:solidFill>
-                <a:latin typeface="微软雅黑" panose="020B0503020204020204" pitchFamily="34" charset="-122"/>
-                <a:ea typeface="微软雅黑" panose="020B0503020204020204" pitchFamily="34" charset="-122"/>
-                <a:cs typeface="微软雅黑" panose="020B0503020204020204" pitchFamily="34" charset="-122"/>
-                <a:sym typeface="+mn-ea"/>
-              </a:rPr>
-              <a:t>；固定测试样本，避免每次都换问题导致无法公平比较；记录评估结果，包括准确率、完整性、格式稳定性以及是否出现幻觉。</a:t>
-            </a:r>
-            <a:endParaRPr lang="zh-CN" altLang="en-US" dirty="0">
-              <a:solidFill>
-                <a:schemeClr val="bg1"/>
-              </a:solidFill>
-              <a:latin typeface="微软雅黑" panose="020B0503020204020204" pitchFamily="34" charset="-122"/>
-              <a:ea typeface="微软雅黑" panose="020B0503020204020204" pitchFamily="34" charset="-122"/>
-              <a:cs typeface="微软雅黑" panose="020B0503020204020204" pitchFamily="34" charset="-122"/>
-              <a:sym typeface="+mn-ea"/>
-            </a:endParaRPr>
-          </a:p>
-        </p:txBody>
-      </p:sp>
-      <p:sp>
-        <p:nvSpPr>
-          <p:cNvPr id="15" name="矩形 14"/>
-          <p:cNvSpPr/>
-          <p:nvPr/>
-        </p:nvSpPr>
-        <p:spPr>
-          <a:xfrm>
-            <a:off x="429756" y="1773555"/>
-            <a:ext cx="3507243" cy="4690745"/>
-          </a:xfrm>
-          <a:prstGeom prst="rect">
-            <a:avLst/>
-          </a:prstGeom>
-          <a:noFill/>
-        </p:spPr>
-        <p:style>
-          <a:lnRef idx="2">
-            <a:schemeClr val="accent1">
-              <a:shade val="50000"/>
-            </a:schemeClr>
-          </a:lnRef>
-          <a:fillRef idx="1">
-            <a:schemeClr val="accent1"/>
-          </a:fillRef>
-          <a:effectRef idx="0">
-            <a:schemeClr val="accent1"/>
-          </a:effectRef>
-          <a:fontRef idx="minor">
-            <a:schemeClr val="lt1"/>
-          </a:fontRef>
-        </p:style>
-        <p:txBody>
-          <a:bodyPr rtlCol="0" anchor="ctr"/>
-          <a:lstStyle/>
-          <a:p>
-            <a:pPr algn="ctr"/>
-            <a:r>
-              <a:rPr lang="zh-CN" altLang="en-US" dirty="0" smtClean="0">
-                <a:solidFill>
-                  <a:schemeClr val="tx1"/>
-                </a:solidFill>
-              </a:rPr>
-              <a:t>教材对应知识的图片</a:t>
-            </a:r>
-            <a:endParaRPr lang="zh-CN" altLang="en-US" dirty="0">
-              <a:solidFill>
-                <a:schemeClr val="tx1"/>
-              </a:solidFill>
-            </a:endParaRPr>
-          </a:p>
-        </p:txBody>
-      </p:sp>
-      <p:sp>
-        <p:nvSpPr>
-          <p:cNvPr id="4" name="文本框 3"/>
-          <p:cNvSpPr txBox="1"/>
-          <p:nvPr/>
-        </p:nvSpPr>
-        <p:spPr>
-          <a:xfrm>
-            <a:off x="0" y="793750"/>
-            <a:ext cx="1351262" cy="583565"/>
-          </a:xfrm>
-          <a:prstGeom prst="rect">
-            <a:avLst/>
-          </a:prstGeom>
-          <a:noFill/>
-        </p:spPr>
-        <p:txBody>
-          <a:bodyPr wrap="square" rtlCol="0">
-            <a:spAutoFit/>
-            <a:scene3d>
-              <a:camera prst="orthographicFront"/>
-              <a:lightRig rig="threePt" dir="t"/>
-            </a:scene3d>
-            <a:sp3d contourW="12700"/>
-          </a:bodyPr>
-          <a:lstStyle/>
-          <a:p>
-            <a:pPr algn="ctr"/>
-            <a:r>
-              <a:rPr lang="en-US" sz="3200" dirty="0" smtClean="0">
-                <a:solidFill>
-                  <a:srgbClr val="3F396C"/>
-                </a:solidFill>
-                <a:latin typeface="思源宋体" panose="02020700000000000000" charset="-122"/>
-                <a:ea typeface="思源宋体" panose="02020700000000000000" charset="-122"/>
-              </a:rPr>
-              <a:t>03</a:t>
-            </a:r>
-            <a:endParaRPr lang="en-US" sz="3200" dirty="0" smtClean="0">
-              <a:solidFill>
-                <a:srgbClr val="3F396C"/>
-              </a:solidFill>
-              <a:latin typeface="思源宋体" panose="02020700000000000000" charset="-122"/>
-              <a:ea typeface="思源宋体" panose="02020700000000000000" charset="-122"/>
-            </a:endParaRPr>
-          </a:p>
-        </p:txBody>
-      </p:sp>
-      <p:sp>
-        <p:nvSpPr>
-          <p:cNvPr id="17" name="文本框 16"/>
-          <p:cNvSpPr txBox="1"/>
-          <p:nvPr/>
-        </p:nvSpPr>
-        <p:spPr>
-          <a:xfrm>
-            <a:off x="1278000" y="792000"/>
-            <a:ext cx="3932555" cy="583565"/>
-          </a:xfrm>
-          <a:prstGeom prst="rect">
-            <a:avLst/>
-          </a:prstGeom>
-          <a:noFill/>
-        </p:spPr>
-        <p:txBody>
-          <a:bodyPr wrap="square" rtlCol="0">
-            <a:spAutoFit/>
-            <a:scene3d>
-              <a:camera prst="orthographicFront"/>
-              <a:lightRig rig="threePt" dir="t"/>
-            </a:scene3d>
-            <a:sp3d contourW="12700"/>
-          </a:bodyPr>
-          <a:lstStyle>
-            <a:defPPr>
-              <a:defRPr lang="en-US"/>
-            </a:defPPr>
-            <a:lvl1pPr algn="ctr">
-              <a:defRPr sz="3200">
-                <a:gradFill>
-                  <a:gsLst>
-                    <a:gs pos="0">
-                      <a:schemeClr val="tx1">
-                        <a:lumMod val="50000"/>
-                        <a:lumOff val="50000"/>
-                      </a:schemeClr>
-                    </a:gs>
-                    <a:gs pos="100000">
-                      <a:schemeClr val="tx1">
-                        <a:lumMod val="85000"/>
-                        <a:lumOff val="15000"/>
-                      </a:schemeClr>
-                    </a:gs>
-                  </a:gsLst>
-                  <a:lin ang="5400000" scaled="1"/>
-                </a:gradFill>
-              </a:defRPr>
-            </a:lvl1pPr>
-          </a:lstStyle>
-          <a:p>
-            <a:pPr marL="0" marR="0" lvl="0" indent="0" algn="l" defTabSz="914400" rtl="0" eaLnBrk="1" fontAlgn="auto" latinLnBrk="0" hangingPunct="1">
-              <a:lnSpc>
-                <a:spcPct val="100000"/>
-              </a:lnSpc>
-              <a:spcBef>
-                <a:spcPts val="0"/>
-              </a:spcBef>
-              <a:spcAft>
-                <a:spcPts val="0"/>
-              </a:spcAft>
-              <a:buClrTx/>
-              <a:buSzTx/>
-              <a:buFontTx/>
-              <a:buNone/>
-              <a:defRPr/>
-            </a:pPr>
-            <a:r>
-              <a:rPr lang="zh-CN" altLang="en-US" b="1" dirty="0">
-                <a:solidFill>
-                  <a:schemeClr val="accent1">
-                    <a:lumMod val="75000"/>
-                  </a:schemeClr>
-                </a:solidFill>
-                <a:latin typeface="微软雅黑" panose="020B0503020204020204" pitchFamily="34" charset="-122"/>
-                <a:ea typeface="微软雅黑" panose="020B0503020204020204" pitchFamily="34" charset="-122"/>
-                <a:cs typeface="微软雅黑" panose="020B0503020204020204" pitchFamily="34" charset="-122"/>
-                <a:sym typeface="+mn-lt"/>
-              </a:rPr>
-              <a:t>知识储备</a:t>
-            </a:r>
-            <a:endParaRPr lang="en-US" altLang="zh-CN" b="1" dirty="0">
-              <a:solidFill>
-                <a:schemeClr val="accent1">
-                  <a:lumMod val="75000"/>
-                </a:schemeClr>
-              </a:solidFill>
-              <a:latin typeface="微软雅黑" panose="020B0503020204020204" pitchFamily="34" charset="-122"/>
-              <a:ea typeface="微软雅黑" panose="020B0503020204020204" pitchFamily="34" charset="-122"/>
-              <a:cs typeface="微软雅黑" panose="020B0503020204020204" pitchFamily="34" charset="-122"/>
-              <a:sym typeface="+mn-lt"/>
-            </a:endParaRPr>
-          </a:p>
-        </p:txBody>
-      </p:sp>
-    </p:spTree>
-  </p:cSld>
-  <p:clrMapOvr>
-    <a:masterClrMapping/>
-  </p:clrMapOvr>
-</p:sld>
-</file>
-
-<file path=ppt/slides/slide17.xml><?xml version="1.0" encoding="utf-8"?>
-<p:sld xmlns:a="http://schemas.openxmlformats.org/drawingml/2006/main" xmlns:r="http://schemas.openxmlformats.org/officeDocument/2006/relationships" xmlns:p="http://schemas.openxmlformats.org/presentationml/2006/main">
-  <p:cSld>
-    <p:spTree>
-      <p:nvGrpSpPr>
-        <p:cNvPr id="1" name=""/>
-        <p:cNvGrpSpPr/>
-        <p:nvPr/>
-      </p:nvGrpSpPr>
-      <p:grpSpPr>
-        <a:xfrm>
-          <a:off x="0" y="0"/>
-          <a:ext cx="0" cy="0"/>
-          <a:chOff x="0" y="0"/>
-          <a:chExt cx="0" cy="0"/>
-        </a:xfrm>
-      </p:grpSpPr>
-      <p:sp>
-        <p:nvSpPr>
-          <p:cNvPr id="4" name="文本框 3"/>
-          <p:cNvSpPr txBox="1"/>
-          <p:nvPr/>
-        </p:nvSpPr>
-        <p:spPr>
-          <a:xfrm>
-            <a:off x="1010285" y="1899920"/>
-            <a:ext cx="6406515" cy="3884930"/>
-          </a:xfrm>
-          <a:prstGeom prst="rect">
-            <a:avLst/>
-          </a:prstGeom>
-          <a:noFill/>
-          <a:ln w="9525">
-            <a:noFill/>
-          </a:ln>
-        </p:spPr>
-        <p:txBody>
-          <a:bodyPr wrap="square">
-            <a:noAutofit/>
-          </a:bodyPr>
-          <a:lstStyle/>
-          <a:p>
-            <a:pPr indent="457200" fontAlgn="auto">
-              <a:lnSpc>
-                <a:spcPct val="150000"/>
-              </a:lnSpc>
-            </a:pPr>
-            <a:r>
-              <a:rPr lang="zh-CN" dirty="0">
-                <a:latin typeface="微软雅黑" panose="020B0503020204020204" pitchFamily="34" charset="-122"/>
-                <a:ea typeface="微软雅黑" panose="020B0503020204020204" pitchFamily="34" charset="-122"/>
-                <a:cs typeface="微软雅黑" panose="020B0503020204020204" pitchFamily="34" charset="-122"/>
-              </a:rPr>
-              <a:t>一个简单的版本记录表可以帮助你系统化地追踪优化过程。例如，初始版本</a:t>
-            </a:r>
-            <a:r>
-              <a:rPr lang="en-US" altLang="zh-CN" dirty="0">
-                <a:latin typeface="微软雅黑" panose="020B0503020204020204" pitchFamily="34" charset="-122"/>
-                <a:ea typeface="微软雅黑" panose="020B0503020204020204" pitchFamily="34" charset="-122"/>
-                <a:cs typeface="微软雅黑" panose="020B0503020204020204" pitchFamily="34" charset="-122"/>
-              </a:rPr>
-              <a:t>v1.0</a:t>
-            </a:r>
-            <a:r>
-              <a:rPr lang="zh-CN" altLang="en-US" dirty="0">
-                <a:latin typeface="微软雅黑" panose="020B0503020204020204" pitchFamily="34" charset="-122"/>
-                <a:ea typeface="微软雅黑" panose="020B0503020204020204" pitchFamily="34" charset="-122"/>
-                <a:cs typeface="微软雅黑" panose="020B0503020204020204" pitchFamily="34" charset="-122"/>
-              </a:rPr>
-              <a:t>用于完成基础问答，测试</a:t>
-            </a:r>
-            <a:r>
-              <a:rPr lang="en-US" altLang="zh-CN" dirty="0">
-                <a:latin typeface="微软雅黑" panose="020B0503020204020204" pitchFamily="34" charset="-122"/>
-                <a:ea typeface="微软雅黑" panose="020B0503020204020204" pitchFamily="34" charset="-122"/>
-                <a:cs typeface="微软雅黑" panose="020B0503020204020204" pitchFamily="34" charset="-122"/>
-              </a:rPr>
-              <a:t>3</a:t>
-            </a:r>
-            <a:r>
-              <a:rPr lang="zh-CN" altLang="en-US" dirty="0">
-                <a:latin typeface="微软雅黑" panose="020B0503020204020204" pitchFamily="34" charset="-122"/>
-                <a:ea typeface="微软雅黑" panose="020B0503020204020204" pitchFamily="34" charset="-122"/>
-                <a:cs typeface="微软雅黑" panose="020B0503020204020204" pitchFamily="34" charset="-122"/>
-              </a:rPr>
-              <a:t>个用户问题后评价为</a:t>
-            </a:r>
-            <a:r>
-              <a:rPr lang="en-US" altLang="zh-CN" dirty="0">
-                <a:latin typeface="微软雅黑" panose="020B0503020204020204" pitchFamily="34" charset="-122"/>
-                <a:ea typeface="微软雅黑" panose="020B0503020204020204" pitchFamily="34" charset="-122"/>
-                <a:cs typeface="微软雅黑" panose="020B0503020204020204" pitchFamily="34" charset="-122"/>
-              </a:rPr>
-              <a:t>“</a:t>
-            </a:r>
-            <a:r>
-              <a:rPr lang="zh-CN" altLang="en-US" dirty="0">
-                <a:latin typeface="微软雅黑" panose="020B0503020204020204" pitchFamily="34" charset="-122"/>
-                <a:ea typeface="微软雅黑" panose="020B0503020204020204" pitchFamily="34" charset="-122"/>
-                <a:cs typeface="微软雅黑" panose="020B0503020204020204" pitchFamily="34" charset="-122"/>
-              </a:rPr>
-              <a:t>输出较泛</a:t>
-            </a:r>
-            <a:r>
-              <a:rPr lang="en-US" altLang="zh-CN" dirty="0">
-                <a:latin typeface="微软雅黑" panose="020B0503020204020204" pitchFamily="34" charset="-122"/>
-                <a:ea typeface="微软雅黑" panose="020B0503020204020204" pitchFamily="34" charset="-122"/>
-                <a:cs typeface="微软雅黑" panose="020B0503020204020204" pitchFamily="34" charset="-122"/>
-              </a:rPr>
-              <a:t>”</a:t>
-            </a:r>
-            <a:r>
-              <a:rPr lang="zh-CN" altLang="en-US" dirty="0">
-                <a:latin typeface="微软雅黑" panose="020B0503020204020204" pitchFamily="34" charset="-122"/>
-                <a:ea typeface="微软雅黑" panose="020B0503020204020204" pitchFamily="34" charset="-122"/>
-                <a:cs typeface="微软雅黑" panose="020B0503020204020204" pitchFamily="34" charset="-122"/>
-              </a:rPr>
-              <a:t>；在</a:t>
-            </a:r>
-            <a:r>
-              <a:rPr lang="en-US" altLang="zh-CN" dirty="0">
-                <a:latin typeface="微软雅黑" panose="020B0503020204020204" pitchFamily="34" charset="-122"/>
-                <a:ea typeface="微软雅黑" panose="020B0503020204020204" pitchFamily="34" charset="-122"/>
-                <a:cs typeface="微软雅黑" panose="020B0503020204020204" pitchFamily="34" charset="-122"/>
-              </a:rPr>
-              <a:t>v1.1</a:t>
-            </a:r>
-            <a:r>
-              <a:rPr lang="zh-CN" altLang="en-US" dirty="0">
-                <a:latin typeface="微软雅黑" panose="020B0503020204020204" pitchFamily="34" charset="-122"/>
-                <a:ea typeface="微软雅黑" panose="020B0503020204020204" pitchFamily="34" charset="-122"/>
-                <a:cs typeface="微软雅黑" panose="020B0503020204020204" pitchFamily="34" charset="-122"/>
-              </a:rPr>
-              <a:t>版本中增加了角色和业务背景，目的是提升专业性，使用同样的</a:t>
-            </a:r>
-            <a:r>
-              <a:rPr lang="en-US" altLang="zh-CN" dirty="0">
-                <a:latin typeface="微软雅黑" panose="020B0503020204020204" pitchFamily="34" charset="-122"/>
-                <a:ea typeface="微软雅黑" panose="020B0503020204020204" pitchFamily="34" charset="-122"/>
-                <a:cs typeface="微软雅黑" panose="020B0503020204020204" pitchFamily="34" charset="-122"/>
-              </a:rPr>
-              <a:t>3</a:t>
-            </a:r>
-            <a:r>
-              <a:rPr lang="zh-CN" altLang="en-US" dirty="0">
-                <a:latin typeface="微软雅黑" panose="020B0503020204020204" pitchFamily="34" charset="-122"/>
-                <a:ea typeface="微软雅黑" panose="020B0503020204020204" pitchFamily="34" charset="-122"/>
-                <a:cs typeface="微软雅黑" panose="020B0503020204020204" pitchFamily="34" charset="-122"/>
-              </a:rPr>
-              <a:t>个问题测试后，评价为</a:t>
-            </a:r>
-            <a:r>
-              <a:rPr lang="en-US" altLang="zh-CN" dirty="0">
-                <a:latin typeface="微软雅黑" panose="020B0503020204020204" pitchFamily="34" charset="-122"/>
-                <a:ea typeface="微软雅黑" panose="020B0503020204020204" pitchFamily="34" charset="-122"/>
-                <a:cs typeface="微软雅黑" panose="020B0503020204020204" pitchFamily="34" charset="-122"/>
-              </a:rPr>
-              <a:t>“</a:t>
-            </a:r>
-            <a:r>
-              <a:rPr lang="zh-CN" altLang="en-US" dirty="0">
-                <a:latin typeface="微软雅黑" panose="020B0503020204020204" pitchFamily="34" charset="-122"/>
-                <a:ea typeface="微软雅黑" panose="020B0503020204020204" pitchFamily="34" charset="-122"/>
-                <a:cs typeface="微软雅黑" panose="020B0503020204020204" pitchFamily="34" charset="-122"/>
-              </a:rPr>
-              <a:t>更贴近场景</a:t>
-            </a:r>
-            <a:r>
-              <a:rPr lang="en-US" altLang="zh-CN" dirty="0">
-                <a:latin typeface="微软雅黑" panose="020B0503020204020204" pitchFamily="34" charset="-122"/>
-                <a:ea typeface="微软雅黑" panose="020B0503020204020204" pitchFamily="34" charset="-122"/>
-                <a:cs typeface="微软雅黑" panose="020B0503020204020204" pitchFamily="34" charset="-122"/>
-              </a:rPr>
-              <a:t>”</a:t>
-            </a:r>
-            <a:r>
-              <a:rPr lang="zh-CN" altLang="en-US" dirty="0">
-                <a:latin typeface="微软雅黑" panose="020B0503020204020204" pitchFamily="34" charset="-122"/>
-                <a:ea typeface="微软雅黑" panose="020B0503020204020204" pitchFamily="34" charset="-122"/>
-                <a:cs typeface="微软雅黑" panose="020B0503020204020204" pitchFamily="34" charset="-122"/>
-              </a:rPr>
-              <a:t>；在</a:t>
-            </a:r>
-            <a:r>
-              <a:rPr lang="en-US" altLang="zh-CN" dirty="0">
-                <a:latin typeface="微软雅黑" panose="020B0503020204020204" pitchFamily="34" charset="-122"/>
-                <a:ea typeface="微软雅黑" panose="020B0503020204020204" pitchFamily="34" charset="-122"/>
-                <a:cs typeface="微软雅黑" panose="020B0503020204020204" pitchFamily="34" charset="-122"/>
-              </a:rPr>
-              <a:t>v1.2</a:t>
-            </a:r>
-            <a:r>
-              <a:rPr lang="zh-CN" altLang="en-US" dirty="0">
-                <a:latin typeface="微软雅黑" panose="020B0503020204020204" pitchFamily="34" charset="-122"/>
-                <a:ea typeface="微软雅黑" panose="020B0503020204020204" pitchFamily="34" charset="-122"/>
-                <a:cs typeface="微软雅黑" panose="020B0503020204020204" pitchFamily="34" charset="-122"/>
-              </a:rPr>
-              <a:t>版本中进一步增加了输出格式和拒答规则，目的是提升稳定性，测试后评价为</a:t>
-            </a:r>
-            <a:r>
-              <a:rPr lang="en-US" altLang="zh-CN" dirty="0">
-                <a:latin typeface="微软雅黑" panose="020B0503020204020204" pitchFamily="34" charset="-122"/>
-                <a:ea typeface="微软雅黑" panose="020B0503020204020204" pitchFamily="34" charset="-122"/>
-                <a:cs typeface="微软雅黑" panose="020B0503020204020204" pitchFamily="34" charset="-122"/>
-              </a:rPr>
-              <a:t>“</a:t>
-            </a:r>
-            <a:r>
-              <a:rPr lang="zh-CN" altLang="en-US" dirty="0">
-                <a:latin typeface="微软雅黑" panose="020B0503020204020204" pitchFamily="34" charset="-122"/>
-                <a:ea typeface="微软雅黑" panose="020B0503020204020204" pitchFamily="34" charset="-122"/>
-                <a:cs typeface="微软雅黑" panose="020B0503020204020204" pitchFamily="34" charset="-122"/>
-              </a:rPr>
-              <a:t>结构更统一</a:t>
-            </a:r>
-            <a:r>
-              <a:rPr lang="en-US" altLang="zh-CN" dirty="0">
-                <a:latin typeface="微软雅黑" panose="020B0503020204020204" pitchFamily="34" charset="-122"/>
-                <a:ea typeface="微软雅黑" panose="020B0503020204020204" pitchFamily="34" charset="-122"/>
-                <a:cs typeface="微软雅黑" panose="020B0503020204020204" pitchFamily="34" charset="-122"/>
-              </a:rPr>
-              <a:t>”</a:t>
-            </a:r>
-            <a:r>
-              <a:rPr lang="zh-CN" altLang="en-US" dirty="0">
-                <a:latin typeface="微软雅黑" panose="020B0503020204020204" pitchFamily="34" charset="-122"/>
-                <a:ea typeface="微软雅黑" panose="020B0503020204020204" pitchFamily="34" charset="-122"/>
-                <a:cs typeface="微软雅黑" panose="020B0503020204020204" pitchFamily="34" charset="-122"/>
-              </a:rPr>
-              <a:t>。通过这样的迭代记录，你可以清晰地看到每次修改带来的变化，从而将提示词优化从无序的试错转变为有据可查的科学过程。</a:t>
-            </a:r>
-            <a:endParaRPr lang="zh-CN" altLang="en-US" dirty="0">
-              <a:latin typeface="微软雅黑" panose="020B0503020204020204" pitchFamily="34" charset="-122"/>
-              <a:ea typeface="微软雅黑" panose="020B0503020204020204" pitchFamily="34" charset="-122"/>
-              <a:cs typeface="微软雅黑" panose="020B0503020204020204" pitchFamily="34" charset="-122"/>
-            </a:endParaRPr>
-          </a:p>
-        </p:txBody>
-      </p:sp>
-      <p:sp>
-        <p:nvSpPr>
-          <p:cNvPr id="2" name="矩形 10"/>
-          <p:cNvSpPr/>
-          <p:nvPr/>
-        </p:nvSpPr>
-        <p:spPr>
-          <a:xfrm>
-            <a:off x="674370" y="1619885"/>
-            <a:ext cx="7019290" cy="4445635"/>
-          </a:xfrm>
-          <a:custGeom>
-            <a:avLst/>
-            <a:gdLst/>
-            <a:ahLst/>
-            <a:cxnLst/>
-            <a:rect l="l" t="t" r="r" b="b"/>
-            <a:pathLst>
-              <a:path w="1759038" h="1334706">
-                <a:moveTo>
-                  <a:pt x="65637" y="63758"/>
-                </a:moveTo>
-                <a:lnTo>
-                  <a:pt x="65637" y="1271391"/>
-                </a:lnTo>
-                <a:lnTo>
-                  <a:pt x="1711798" y="1271391"/>
-                </a:lnTo>
-                <a:lnTo>
-                  <a:pt x="1711798" y="63758"/>
-                </a:lnTo>
-                <a:close/>
-                <a:moveTo>
-                  <a:pt x="0" y="0"/>
-                </a:moveTo>
-                <a:lnTo>
-                  <a:pt x="1759038" y="0"/>
-                </a:lnTo>
-                <a:lnTo>
-                  <a:pt x="1759038" y="1334706"/>
-                </a:lnTo>
-                <a:lnTo>
-                  <a:pt x="0" y="1334706"/>
-                </a:lnTo>
-                <a:close/>
-              </a:path>
-            </a:pathLst>
-          </a:custGeom>
-          <a:solidFill>
-            <a:schemeClr val="accent2">
-              <a:lumMod val="75000"/>
-            </a:schemeClr>
-          </a:solidFill>
-          <a:ln>
-            <a:noFill/>
-          </a:ln>
-        </p:spPr>
-        <p:style>
-          <a:lnRef idx="2">
-            <a:schemeClr val="accent1">
-              <a:shade val="50000"/>
-            </a:schemeClr>
-          </a:lnRef>
-          <a:fillRef idx="1">
-            <a:schemeClr val="accent1"/>
-          </a:fillRef>
-          <a:effectRef idx="0">
-            <a:schemeClr val="accent1"/>
-          </a:effectRef>
-          <a:fontRef idx="minor">
-            <a:schemeClr val="lt1"/>
-          </a:fontRef>
-        </p:style>
-        <p:txBody>
-          <a:bodyPr rtlCol="0" anchor="t"/>
-          <a:lstStyle/>
-          <a:p>
-            <a:pPr>
-              <a:lnSpc>
-                <a:spcPct val="120000"/>
-              </a:lnSpc>
-            </a:pPr>
-            <a:endParaRPr lang="zh-CN" altLang="en-US">
-              <a:solidFill>
-                <a:srgbClr val="000000"/>
-              </a:solidFill>
-              <a:cs typeface="+mn-ea"/>
-              <a:sym typeface="+mn-lt"/>
-            </a:endParaRPr>
-          </a:p>
-        </p:txBody>
-      </p:sp>
-      <p:sp>
-        <p:nvSpPr>
-          <p:cNvPr id="9" name="矩形 8"/>
-          <p:cNvSpPr/>
-          <p:nvPr/>
-        </p:nvSpPr>
-        <p:spPr>
-          <a:xfrm>
-            <a:off x="8086725" y="2372361"/>
-            <a:ext cx="3798570" cy="2991484"/>
-          </a:xfrm>
-          <a:prstGeom prst="rect">
-            <a:avLst/>
-          </a:prstGeom>
-          <a:noFill/>
-        </p:spPr>
-        <p:style>
-          <a:lnRef idx="2">
-            <a:schemeClr val="accent1">
-              <a:shade val="50000"/>
-            </a:schemeClr>
-          </a:lnRef>
-          <a:fillRef idx="1">
-            <a:schemeClr val="accent1"/>
-          </a:fillRef>
-          <a:effectRef idx="0">
-            <a:schemeClr val="accent1"/>
-          </a:effectRef>
-          <a:fontRef idx="minor">
-            <a:schemeClr val="lt1"/>
-          </a:fontRef>
-        </p:style>
-        <p:txBody>
-          <a:bodyPr rtlCol="0" anchor="ctr"/>
-          <a:lstStyle/>
-          <a:p>
-            <a:pPr algn="ctr"/>
-            <a:r>
-              <a:rPr lang="zh-CN" altLang="en-US" dirty="0" smtClean="0">
-                <a:solidFill>
-                  <a:schemeClr val="tx1"/>
-                </a:solidFill>
-              </a:rPr>
-              <a:t>教材对应知识的图片</a:t>
-            </a:r>
-            <a:endParaRPr lang="zh-CN" altLang="en-US" dirty="0">
-              <a:solidFill>
-                <a:schemeClr val="tx1"/>
-              </a:solidFill>
-            </a:endParaRPr>
-          </a:p>
-        </p:txBody>
-      </p:sp>
-      <p:sp>
-        <p:nvSpPr>
-          <p:cNvPr id="3" name="文本框 2"/>
           <p:cNvSpPr txBox="1"/>
           <p:nvPr/>
         </p:nvSpPr>
@@ -16069,7 +12848,7 @@
                 <a:cs typeface="微软雅黑" panose="020B0503020204020204" pitchFamily="34" charset="-122"/>
                 <a:sym typeface="+mn-ea"/>
               </a:rPr>
-              <a:t>大型语言模型（</a:t>
+              <a:t>在</a:t>
             </a:r>
             <a:r>
               <a:rPr lang="en-US" altLang="zh-CN" dirty="0">
@@ -16078,7 +12857,7 @@
                 <a:cs typeface="微软雅黑" panose="020B0503020204020204" pitchFamily="34" charset="-122"/>
                 <a:sym typeface="+mn-ea"/>
               </a:rPr>
-              <a:t>LLM</a:t>
+              <a:t>RAGflow</a:t>
             </a:r>
             <a:r>
               <a:rPr lang="zh-CN" altLang="en-US" dirty="0">
@@ -16087,7 +12866,7 @@
                 <a:cs typeface="微软雅黑" panose="020B0503020204020204" pitchFamily="34" charset="-122"/>
                 <a:sym typeface="+mn-ea"/>
               </a:rPr>
-              <a:t>）本身擅长语言理解与生成，但它并不会天然知道当前系统的目标、边界和优先级。</a:t>
+              <a:t>的平台实践中，学员会接触到两类工具调用能力：平台内置工具和</a:t>
             </a:r>
             <a:r>
               <a:rPr lang="en-US" altLang="zh-CN" dirty="0">
@@ -16096,7 +12875,7 @@
                 <a:cs typeface="微软雅黑" panose="020B0503020204020204" pitchFamily="34" charset="-122"/>
                 <a:sym typeface="+mn-ea"/>
               </a:rPr>
-              <a:t>Agent</a:t>
+              <a:t>Function Calling</a:t>
             </a:r>
             <a:r>
               <a:rPr lang="zh-CN" altLang="en-US" dirty="0">
@@ -16105,7 +12884,7 @@
                 <a:cs typeface="微软雅黑" panose="020B0503020204020204" pitchFamily="34" charset="-122"/>
                 <a:sym typeface="+mn-ea"/>
               </a:rPr>
-              <a:t>则是在</a:t>
+              <a:t>（自定义函数）。内置工具接入门槛低，适合快速体验和原型验证；而</a:t>
             </a:r>
             <a:r>
               <a:rPr lang="en-US" altLang="zh-CN" dirty="0">
@@ -16114,7 +12893,7 @@
                 <a:cs typeface="微软雅黑" panose="020B0503020204020204" pitchFamily="34" charset="-122"/>
                 <a:sym typeface="+mn-ea"/>
               </a:rPr>
-              <a:t>LLM</a:t>
+              <a:t>Function Calling</a:t>
             </a:r>
             <a:r>
               <a:rPr lang="zh-CN" altLang="en-US" dirty="0">
@@ -16123,7 +12902,7 @@
                 <a:cs typeface="微软雅黑" panose="020B0503020204020204" pitchFamily="34" charset="-122"/>
                 <a:sym typeface="+mn-ea"/>
               </a:rPr>
-              <a:t>基础上叠加了记忆、规划、工具调用和行动能力的系统。此时，提示词起到的作用就不再只是发起一次对话，而是持续塑造</a:t>
+              <a:t>灵活度高，能够更贴合具体业务需求。无论选择哪种方式，两者共同的工程要求是必须拥有清晰的输入输出定义，最好以结构化的方式明确字段类型并稳定输出内容。同时，必须为每个工具调用设计兜底结果，以应对调用失败或异常场景。如果工具返回的是长篇原始文本，后续节点往往难以有效消费这些数据；相反，如果返回的是结构化字段（如</a:t>
             </a:r>
             <a:r>
               <a:rPr lang="en-US" altLang="zh-CN" dirty="0">
@@ -16132,7 +12911,7 @@
                 <a:cs typeface="微软雅黑" panose="020B0503020204020204" pitchFamily="34" charset="-122"/>
                 <a:sym typeface="+mn-ea"/>
               </a:rPr>
-              <a:t>Agent</a:t>
+              <a:t>JSON</a:t>
             </a:r>
             <a:r>
               <a:rPr lang="zh-CN" altLang="en-US" dirty="0">
@@ -16141,151 +12920,7 @@
                 <a:cs typeface="微软雅黑" panose="020B0503020204020204" pitchFamily="34" charset="-122"/>
                 <a:sym typeface="+mn-ea"/>
               </a:rPr>
-              <a:t>的决策逻辑。例如，在一个客服智能体中，提示词可以规定：你是售后服务助手，不是销售顾问；先判断用户问题类别，再决定是否查询知识库；若知识库无答案，不允许编造，必须明确告知</a:t>
-            </a:r>
-            <a:r>
-              <a:rPr lang="en-US" altLang="zh-CN" dirty="0">
-                <a:latin typeface="微软雅黑" panose="020B0503020204020204" pitchFamily="34" charset="-122"/>
-                <a:ea typeface="微软雅黑" panose="020B0503020204020204" pitchFamily="34" charset="-122"/>
-                <a:cs typeface="微软雅黑" panose="020B0503020204020204" pitchFamily="34" charset="-122"/>
-                <a:sym typeface="+mn-ea"/>
-              </a:rPr>
-              <a:t>“</a:t>
-            </a:r>
-            <a:r>
-              <a:rPr lang="zh-CN" altLang="en-US" dirty="0">
-                <a:latin typeface="微软雅黑" panose="020B0503020204020204" pitchFamily="34" charset="-122"/>
-                <a:ea typeface="微软雅黑" panose="020B0503020204020204" pitchFamily="34" charset="-122"/>
-                <a:cs typeface="微软雅黑" panose="020B0503020204020204" pitchFamily="34" charset="-122"/>
-                <a:sym typeface="+mn-ea"/>
-              </a:rPr>
-              <a:t>暂无法确认</a:t>
-            </a:r>
-            <a:r>
-              <a:rPr lang="en-US" altLang="zh-CN" dirty="0">
-                <a:latin typeface="微软雅黑" panose="020B0503020204020204" pitchFamily="34" charset="-122"/>
-                <a:ea typeface="微软雅黑" panose="020B0503020204020204" pitchFamily="34" charset="-122"/>
-                <a:cs typeface="微软雅黑" panose="020B0503020204020204" pitchFamily="34" charset="-122"/>
-                <a:sym typeface="+mn-ea"/>
-              </a:rPr>
-              <a:t>”</a:t>
-            </a:r>
-            <a:r>
-              <a:rPr lang="zh-CN" altLang="en-US" dirty="0">
-                <a:latin typeface="微软雅黑" panose="020B0503020204020204" pitchFamily="34" charset="-122"/>
-                <a:ea typeface="微软雅黑" panose="020B0503020204020204" pitchFamily="34" charset="-122"/>
-                <a:cs typeface="微软雅黑" panose="020B0503020204020204" pitchFamily="34" charset="-122"/>
-                <a:sym typeface="+mn-ea"/>
-              </a:rPr>
-              <a:t>；输出必须包含</a:t>
-            </a:r>
-            <a:r>
-              <a:rPr lang="en-US" altLang="zh-CN" dirty="0">
-                <a:latin typeface="微软雅黑" panose="020B0503020204020204" pitchFamily="34" charset="-122"/>
-                <a:ea typeface="微软雅黑" panose="020B0503020204020204" pitchFamily="34" charset="-122"/>
-                <a:cs typeface="微软雅黑" panose="020B0503020204020204" pitchFamily="34" charset="-122"/>
-                <a:sym typeface="+mn-ea"/>
-              </a:rPr>
-              <a:t>“</a:t>
-            </a:r>
-            <a:r>
-              <a:rPr lang="zh-CN" altLang="en-US" dirty="0">
-                <a:latin typeface="微软雅黑" panose="020B0503020204020204" pitchFamily="34" charset="-122"/>
-                <a:ea typeface="微软雅黑" panose="020B0503020204020204" pitchFamily="34" charset="-122"/>
-                <a:cs typeface="微软雅黑" panose="020B0503020204020204" pitchFamily="34" charset="-122"/>
-                <a:sym typeface="+mn-ea"/>
-              </a:rPr>
-              <a:t>问题判断</a:t>
-            </a:r>
-            <a:r>
-              <a:rPr lang="en-US" altLang="zh-CN" dirty="0">
-                <a:latin typeface="微软雅黑" panose="020B0503020204020204" pitchFamily="34" charset="-122"/>
-                <a:ea typeface="微软雅黑" panose="020B0503020204020204" pitchFamily="34" charset="-122"/>
-                <a:cs typeface="微软雅黑" panose="020B0503020204020204" pitchFamily="34" charset="-122"/>
-                <a:sym typeface="+mn-ea"/>
-              </a:rPr>
-              <a:t>”</a:t>
-            </a:r>
-            <a:r>
-              <a:rPr lang="zh-CN" altLang="en-US" dirty="0">
-                <a:latin typeface="微软雅黑" panose="020B0503020204020204" pitchFamily="34" charset="-122"/>
-                <a:ea typeface="微软雅黑" panose="020B0503020204020204" pitchFamily="34" charset="-122"/>
-                <a:cs typeface="微软雅黑" panose="020B0503020204020204" pitchFamily="34" charset="-122"/>
-                <a:sym typeface="+mn-ea"/>
-              </a:rPr>
-              <a:t>、</a:t>
-            </a:r>
-            <a:r>
-              <a:rPr lang="en-US" altLang="zh-CN" dirty="0">
-                <a:latin typeface="微软雅黑" panose="020B0503020204020204" pitchFamily="34" charset="-122"/>
-                <a:ea typeface="微软雅黑" panose="020B0503020204020204" pitchFamily="34" charset="-122"/>
-                <a:cs typeface="微软雅黑" panose="020B0503020204020204" pitchFamily="34" charset="-122"/>
-                <a:sym typeface="+mn-ea"/>
-              </a:rPr>
-              <a:t>“</a:t>
-            </a:r>
-            <a:r>
-              <a:rPr lang="zh-CN" altLang="en-US" dirty="0">
-                <a:latin typeface="微软雅黑" panose="020B0503020204020204" pitchFamily="34" charset="-122"/>
-                <a:ea typeface="微软雅黑" panose="020B0503020204020204" pitchFamily="34" charset="-122"/>
-                <a:cs typeface="微软雅黑" panose="020B0503020204020204" pitchFamily="34" charset="-122"/>
-                <a:sym typeface="+mn-ea"/>
-              </a:rPr>
-              <a:t>处理建议</a:t>
-            </a:r>
-            <a:r>
-              <a:rPr lang="en-US" altLang="zh-CN" dirty="0">
-                <a:latin typeface="微软雅黑" panose="020B0503020204020204" pitchFamily="34" charset="-122"/>
-                <a:ea typeface="微软雅黑" panose="020B0503020204020204" pitchFamily="34" charset="-122"/>
-                <a:cs typeface="微软雅黑" panose="020B0503020204020204" pitchFamily="34" charset="-122"/>
-                <a:sym typeface="+mn-ea"/>
-              </a:rPr>
-              <a:t>”</a:t>
-            </a:r>
-            <a:r>
-              <a:rPr lang="zh-CN" altLang="en-US" dirty="0">
-                <a:latin typeface="微软雅黑" panose="020B0503020204020204" pitchFamily="34" charset="-122"/>
-                <a:ea typeface="微软雅黑" panose="020B0503020204020204" pitchFamily="34" charset="-122"/>
-                <a:cs typeface="微软雅黑" panose="020B0503020204020204" pitchFamily="34" charset="-122"/>
-                <a:sym typeface="+mn-ea"/>
-              </a:rPr>
-              <a:t>以及</a:t>
-            </a:r>
-            <a:r>
-              <a:rPr lang="en-US" altLang="zh-CN" dirty="0">
-                <a:latin typeface="微软雅黑" panose="020B0503020204020204" pitchFamily="34" charset="-122"/>
-                <a:ea typeface="微软雅黑" panose="020B0503020204020204" pitchFamily="34" charset="-122"/>
-                <a:cs typeface="微软雅黑" panose="020B0503020204020204" pitchFamily="34" charset="-122"/>
-                <a:sym typeface="+mn-ea"/>
-              </a:rPr>
-              <a:t>“</a:t>
-            </a:r>
-            <a:r>
-              <a:rPr lang="zh-CN" altLang="en-US" dirty="0">
-                <a:latin typeface="微软雅黑" panose="020B0503020204020204" pitchFamily="34" charset="-122"/>
-                <a:ea typeface="微软雅黑" panose="020B0503020204020204" pitchFamily="34" charset="-122"/>
-                <a:cs typeface="微软雅黑" panose="020B0503020204020204" pitchFamily="34" charset="-122"/>
-                <a:sym typeface="+mn-ea"/>
-              </a:rPr>
-              <a:t>是否需要人工介入</a:t>
-            </a:r>
-            <a:r>
-              <a:rPr lang="en-US" altLang="zh-CN" dirty="0">
-                <a:latin typeface="微软雅黑" panose="020B0503020204020204" pitchFamily="34" charset="-122"/>
-                <a:ea typeface="微软雅黑" panose="020B0503020204020204" pitchFamily="34" charset="-122"/>
-                <a:cs typeface="微软雅黑" panose="020B0503020204020204" pitchFamily="34" charset="-122"/>
-                <a:sym typeface="+mn-ea"/>
-              </a:rPr>
-              <a:t>”</a:t>
-            </a:r>
-            <a:r>
-              <a:rPr lang="zh-CN" altLang="en-US" dirty="0">
-                <a:latin typeface="微软雅黑" panose="020B0503020204020204" pitchFamily="34" charset="-122"/>
-                <a:ea typeface="微软雅黑" panose="020B0503020204020204" pitchFamily="34" charset="-122"/>
-                <a:cs typeface="微软雅黑" panose="020B0503020204020204" pitchFamily="34" charset="-122"/>
-                <a:sym typeface="+mn-ea"/>
-              </a:rPr>
-              <a:t>三个字段。这几句话看似自然语言，实则已经在约束智能体的角色、流程、容错机制和输出结构。提示词写得越清晰，智能体的行为越可控；提示词写得越模糊，智能体越容易漂移。</a:t>
+              <a:t>对象），则工作流更容易稳定运行。这一判断是工具设计中的核心工程原则，直接影响工作流的健壮性和可维护性。</a:t>
             </a:r>
             <a:endParaRPr lang="zh-CN" altLang="en-US" dirty="0">
               <a:latin typeface="微软雅黑" panose="020B0503020204020204" pitchFamily="34" charset="-122"/>
@@ -16398,7 +13033,7 @@
                 <a:cs typeface="微软雅黑" panose="020B0503020204020204" pitchFamily="34" charset="-122"/>
                 <a:sym typeface="+mn-ea"/>
               </a:rPr>
-              <a:t>一个优质提示词，通常要兼顾以下三个目标：确定性、逻辑性和效率。确定性并不是要求模型每次一字不差，而是要求模型在相同输入下尽量给出风格稳定、结构稳定、结论边界稳定的回答。对于企业级智能体而言，稳定性往往比偶尔的一次惊艳回答更重要。逻辑性是指提示词要让模型清楚：先做什么，再做什么；依据什么判断；遇到异常怎么办；什么情况下该拒绝回答。逻辑清楚，模型的中间推理和最终输出才不容易跳步。效率既包括模型响应效率，也包括开发效率和</a:t>
+              <a:t>对低代码工作流而言，工具调用前的门控机制是一项基础却极易被忽视的设计。许多学员在接好工具后，习惯性地将用户输入直接连接到工具节点，期望系统</a:t>
             </a:r>
             <a:r>
               <a:rPr lang="en-US" altLang="zh-CN" dirty="0">
@@ -16407,7 +13042,7 @@
                 <a:cs typeface="微软雅黑" panose="020B0503020204020204" pitchFamily="34" charset="-122"/>
                 <a:sym typeface="+mn-ea"/>
               </a:rPr>
-              <a:t>Token</a:t>
+              <a:t>“</a:t>
             </a:r>
             <a:r>
               <a:rPr lang="zh-CN" altLang="en-US" dirty="0">
@@ -16416,7 +13051,25 @@
                 <a:cs typeface="微软雅黑" panose="020B0503020204020204" pitchFamily="34" charset="-122"/>
                 <a:sym typeface="+mn-ea"/>
               </a:rPr>
-              <a:t>成本。一个优质提示词不应堆砌无关描述，而应在有限上下文内，把最关键的约束表达清楚。这三个目标的关系可以概括为：确定性保证可用，逻辑性保证可信，效率保证可落地。</a:t>
+              <a:t>边理解边执行</a:t>
+            </a:r>
+            <a:r>
+              <a:rPr lang="en-US" altLang="zh-CN" dirty="0">
+                <a:latin typeface="微软雅黑" panose="020B0503020204020204" pitchFamily="34" charset="-122"/>
+                <a:ea typeface="微软雅黑" panose="020B0503020204020204" pitchFamily="34" charset="-122"/>
+                <a:cs typeface="微软雅黑" panose="020B0503020204020204" pitchFamily="34" charset="-122"/>
+                <a:sym typeface="+mn-ea"/>
+              </a:rPr>
+              <a:t>”</a:t>
+            </a:r>
+            <a:r>
+              <a:rPr lang="zh-CN" altLang="en-US" dirty="0">
+                <a:latin typeface="微软雅黑" panose="020B0503020204020204" pitchFamily="34" charset="-122"/>
+                <a:ea typeface="微软雅黑" panose="020B0503020204020204" pitchFamily="34" charset="-122"/>
+                <a:cs typeface="微软雅黑" panose="020B0503020204020204" pitchFamily="34" charset="-122"/>
+                <a:sym typeface="+mn-ea"/>
+              </a:rPr>
+              <a:t>。这种做法在演示环境中偶尔能跑通，但在真实任务中非常容易失控，导致接口被错误触发或参数不完整。更专业的做法是先做门控，再进行调用。所谓门控，就是在进入工具节点前，先判断当前任务是否已具备执行条件。以市场需求分析场景为例，至少应先确认产品方向、行业范围、关注主题等关键信息是否齐全；如果条件不足，则应走追问分支，而不是勉强发起调用。</a:t>
             </a:r>
             <a:endParaRPr lang="zh-CN" altLang="en-US" dirty="0">
               <a:latin typeface="微软雅黑" panose="020B0503020204020204" pitchFamily="34" charset="-122"/>
@@ -16817,7 +13470,7 @@
                 <a:cs typeface="微软雅黑" panose="020B0503020204020204" pitchFamily="34" charset="-122"/>
                 <a:sym typeface="+mn-ea"/>
               </a:rPr>
-              <a:t>提示词的质量直接决定智能体输出的效果。下面通过同一任务场景的两种系统提示词写法，展示优化前后的差异。糟糕的提示词存在多个潜在问题：角色太泛，未定义具体领域身份，模型不知道以何种专业角度回答；缺少上下文，没有说明业务场景，无法准确理解</a:t>
+              <a:t>在</a:t>
             </a:r>
             <a:r>
               <a:rPr lang="en-US" altLang="zh-CN" dirty="0">
@@ -16829,7 +13482,7 @@
                 <a:cs typeface="微软雅黑" panose="020B0503020204020204" pitchFamily="34" charset="-122"/>
                 <a:sym typeface="+mn-ea"/>
               </a:rPr>
-              <a:t>“</a:t>
+              <a:t>RAGflow</a:t>
             </a:r>
             <a:r>
               <a:rPr lang="zh-CN" altLang="en-US" dirty="0">
@@ -16841,7 +13494,7 @@
                 <a:cs typeface="微软雅黑" panose="020B0503020204020204" pitchFamily="34" charset="-122"/>
                 <a:sym typeface="+mn-ea"/>
               </a:rPr>
-              <a:t>用户的问题</a:t>
+              <a:t>中，</a:t>
             </a:r>
             <a:r>
               <a:rPr lang="en-US" altLang="zh-CN" dirty="0">
@@ -16853,7 +13506,7 @@
                 <a:cs typeface="微软雅黑" panose="020B0503020204020204" pitchFamily="34" charset="-122"/>
                 <a:sym typeface="+mn-ea"/>
               </a:rPr>
-              <a:t>”</a:t>
+              <a:t>IF</a:t>
             </a:r>
             <a:r>
               <a:rPr lang="zh-CN" altLang="en-US" dirty="0">
@@ -16865,7 +13518,103 @@
                 <a:cs typeface="微软雅黑" panose="020B0503020204020204" pitchFamily="34" charset="-122"/>
                 <a:sym typeface="+mn-ea"/>
               </a:rPr>
-              <a:t>；无流程要求，模型不知道应先分类、再检索还是直接回答；无输出约束，回答格式不固定，后续程序难以解析。这些问题会导致模型输出不稳定、不可靠，难以在实际业务中落地。</a:t>
+              <a:t>节点可以很好地实现门控机制。学员需要理解，</a:t>
+            </a:r>
+            <a:r>
+              <a:rPr lang="en-US" altLang="zh-CN" dirty="0">
+                <a:solidFill>
+                  <a:schemeClr val="bg1"/>
+                </a:solidFill>
+                <a:latin typeface="微软雅黑" panose="020B0503020204020204" pitchFamily="34" charset="-122"/>
+                <a:ea typeface="微软雅黑" panose="020B0503020204020204" pitchFamily="34" charset="-122"/>
+                <a:cs typeface="微软雅黑" panose="020B0503020204020204" pitchFamily="34" charset="-122"/>
+                <a:sym typeface="+mn-ea"/>
+              </a:rPr>
+              <a:t>IF</a:t>
+            </a:r>
+            <a:r>
+              <a:rPr lang="zh-CN" altLang="en-US" dirty="0">
+                <a:solidFill>
+                  <a:schemeClr val="bg1"/>
+                </a:solidFill>
+                <a:latin typeface="微软雅黑" panose="020B0503020204020204" pitchFamily="34" charset="-122"/>
+                <a:ea typeface="微软雅黑" panose="020B0503020204020204" pitchFamily="34" charset="-122"/>
+                <a:cs typeface="微软雅黑" panose="020B0503020204020204" pitchFamily="34" charset="-122"/>
+                <a:sym typeface="+mn-ea"/>
+              </a:rPr>
+              <a:t>节点在这里不仅是一个流程语法，更承担着</a:t>
+            </a:r>
+            <a:r>
+              <a:rPr lang="en-US" altLang="zh-CN" dirty="0">
+                <a:solidFill>
+                  <a:schemeClr val="bg1"/>
+                </a:solidFill>
+                <a:latin typeface="微软雅黑" panose="020B0503020204020204" pitchFamily="34" charset="-122"/>
+                <a:ea typeface="微软雅黑" panose="020B0503020204020204" pitchFamily="34" charset="-122"/>
+                <a:cs typeface="微软雅黑" panose="020B0503020204020204" pitchFamily="34" charset="-122"/>
+                <a:sym typeface="+mn-ea"/>
+              </a:rPr>
+              <a:t>“</a:t>
+            </a:r>
+            <a:r>
+              <a:rPr lang="zh-CN" altLang="en-US" dirty="0">
+                <a:solidFill>
+                  <a:schemeClr val="bg1"/>
+                </a:solidFill>
+                <a:latin typeface="微软雅黑" panose="020B0503020204020204" pitchFamily="34" charset="-122"/>
+                <a:ea typeface="微软雅黑" panose="020B0503020204020204" pitchFamily="34" charset="-122"/>
+                <a:cs typeface="微软雅黑" panose="020B0503020204020204" pitchFamily="34" charset="-122"/>
+                <a:sym typeface="+mn-ea"/>
+              </a:rPr>
+              <a:t>执行授权</a:t>
+            </a:r>
+            <a:r>
+              <a:rPr lang="en-US" altLang="zh-CN" dirty="0">
+                <a:solidFill>
+                  <a:schemeClr val="bg1"/>
+                </a:solidFill>
+                <a:latin typeface="微软雅黑" panose="020B0503020204020204" pitchFamily="34" charset="-122"/>
+                <a:ea typeface="微软雅黑" panose="020B0503020204020204" pitchFamily="34" charset="-122"/>
+                <a:cs typeface="微软雅黑" panose="020B0503020204020204" pitchFamily="34" charset="-122"/>
+                <a:sym typeface="+mn-ea"/>
+              </a:rPr>
+              <a:t>”</a:t>
+            </a:r>
+            <a:r>
+              <a:rPr lang="zh-CN" altLang="en-US" dirty="0">
+                <a:solidFill>
+                  <a:schemeClr val="bg1"/>
+                </a:solidFill>
+                <a:latin typeface="微软雅黑" panose="020B0503020204020204" pitchFamily="34" charset="-122"/>
+                <a:ea typeface="微软雅黑" panose="020B0503020204020204" pitchFamily="34" charset="-122"/>
+                <a:cs typeface="微软雅黑" panose="020B0503020204020204" pitchFamily="34" charset="-122"/>
+                <a:sym typeface="+mn-ea"/>
+              </a:rPr>
+              <a:t>的角色</a:t>
+            </a:r>
+            <a:r>
+              <a:rPr lang="en-US" altLang="zh-CN" dirty="0">
+                <a:solidFill>
+                  <a:schemeClr val="bg1"/>
+                </a:solidFill>
+                <a:latin typeface="微软雅黑" panose="020B0503020204020204" pitchFamily="34" charset="-122"/>
+                <a:ea typeface="微软雅黑" panose="020B0503020204020204" pitchFamily="34" charset="-122"/>
+                <a:cs typeface="微软雅黑" panose="020B0503020204020204" pitchFamily="34" charset="-122"/>
+                <a:sym typeface="+mn-ea"/>
+              </a:rPr>
+              <a:t>——</a:t>
+            </a:r>
+            <a:r>
+              <a:rPr lang="zh-CN" altLang="en-US" dirty="0">
+                <a:solidFill>
+                  <a:schemeClr val="bg1"/>
+                </a:solidFill>
+                <a:latin typeface="微软雅黑" panose="020B0503020204020204" pitchFamily="34" charset="-122"/>
+                <a:ea typeface="微软雅黑" panose="020B0503020204020204" pitchFamily="34" charset="-122"/>
+                <a:cs typeface="微软雅黑" panose="020B0503020204020204" pitchFamily="34" charset="-122"/>
+                <a:sym typeface="+mn-ea"/>
+              </a:rPr>
+              <a:t>只有当前置条件满足时，工具节点才获得执行资格。这种设计带来三个核心价值：第一，减少无意义调用，避免接口被错误触发，节省资源；第二，提高参数质量，降低调用失败率，确保每次调用都有完整输入；第三，让后续排障更清晰，能够快速定位问题出在条件判断环节还是调用本身。学员应借此建立认知：工作流中的每一次外部调用，都应被视为有成本、有风险的动作，而不是模型想到就做的随手行为。</a:t>
             </a:r>
             <a:endParaRPr lang="zh-CN" altLang="en-US" dirty="0">
               <a:solidFill>
@@ -17103,478 +13852,6 @@
       </p:grpSpPr>
       <p:sp>
         <p:nvSpPr>
-          <p:cNvPr id="4" name="文本框 3"/>
-          <p:cNvSpPr txBox="1"/>
-          <p:nvPr/>
-        </p:nvSpPr>
-        <p:spPr>
-          <a:xfrm>
-            <a:off x="1010285" y="1899920"/>
-            <a:ext cx="6406515" cy="3884930"/>
-          </a:xfrm>
-          <a:prstGeom prst="rect">
-            <a:avLst/>
-          </a:prstGeom>
-          <a:noFill/>
-          <a:ln w="9525">
-            <a:noFill/>
-          </a:ln>
-        </p:spPr>
-        <p:txBody>
-          <a:bodyPr wrap="square">
-            <a:noAutofit/>
-          </a:bodyPr>
-          <a:lstStyle/>
-          <a:p>
-            <a:pPr indent="457200" fontAlgn="auto">
-              <a:lnSpc>
-                <a:spcPct val="150000"/>
-              </a:lnSpc>
-            </a:pPr>
-            <a:r>
-              <a:rPr lang="zh-CN" dirty="0">
-                <a:latin typeface="微软雅黑" panose="020B0503020204020204" pitchFamily="34" charset="-122"/>
-                <a:ea typeface="微软雅黑" panose="020B0503020204020204" pitchFamily="34" charset="-122"/>
-                <a:cs typeface="微软雅黑" panose="020B0503020204020204" pitchFamily="34" charset="-122"/>
-              </a:rPr>
-              <a:t>针对糟糕提示词中暴露的问题，可以通过优化点逐一解决。优化后的提示词明确了角色与业务范围，限定为</a:t>
-            </a:r>
-            <a:r>
-              <a:rPr lang="en-US" altLang="zh-CN" dirty="0">
-                <a:latin typeface="微软雅黑" panose="020B0503020204020204" pitchFamily="34" charset="-122"/>
-                <a:ea typeface="微软雅黑" panose="020B0503020204020204" pitchFamily="34" charset="-122"/>
-                <a:cs typeface="微软雅黑" panose="020B0503020204020204" pitchFamily="34" charset="-122"/>
-              </a:rPr>
-              <a:t>“</a:t>
-            </a:r>
-            <a:r>
-              <a:rPr lang="zh-CN" altLang="en-US" dirty="0">
-                <a:latin typeface="微软雅黑" panose="020B0503020204020204" pitchFamily="34" charset="-122"/>
-                <a:ea typeface="微软雅黑" panose="020B0503020204020204" pitchFamily="34" charset="-122"/>
-                <a:cs typeface="微软雅黑" panose="020B0503020204020204" pitchFamily="34" charset="-122"/>
-              </a:rPr>
-              <a:t>智能门锁售后支持</a:t>
-            </a:r>
-            <a:r>
-              <a:rPr lang="en-US" altLang="zh-CN" dirty="0">
-                <a:latin typeface="微软雅黑" panose="020B0503020204020204" pitchFamily="34" charset="-122"/>
-                <a:ea typeface="微软雅黑" panose="020B0503020204020204" pitchFamily="34" charset="-122"/>
-                <a:cs typeface="微软雅黑" panose="020B0503020204020204" pitchFamily="34" charset="-122"/>
-              </a:rPr>
-              <a:t>”</a:t>
-            </a:r>
-            <a:r>
-              <a:rPr lang="zh-CN" altLang="en-US" dirty="0">
-                <a:latin typeface="微软雅黑" panose="020B0503020204020204" pitchFamily="34" charset="-122"/>
-                <a:ea typeface="微软雅黑" panose="020B0503020204020204" pitchFamily="34" charset="-122"/>
-                <a:cs typeface="微软雅黑" panose="020B0503020204020204" pitchFamily="34" charset="-122"/>
-              </a:rPr>
-              <a:t>，缩小任务边界；增加了步骤约束，引导模型按</a:t>
-            </a:r>
-            <a:r>
-              <a:rPr lang="en-US" altLang="zh-CN" dirty="0">
-                <a:latin typeface="微软雅黑" panose="020B0503020204020204" pitchFamily="34" charset="-122"/>
-                <a:ea typeface="微软雅黑" panose="020B0503020204020204" pitchFamily="34" charset="-122"/>
-                <a:cs typeface="微软雅黑" panose="020B0503020204020204" pitchFamily="34" charset="-122"/>
-              </a:rPr>
-              <a:t>“</a:t>
-            </a:r>
-            <a:r>
-              <a:rPr lang="zh-CN" altLang="en-US" dirty="0">
-                <a:latin typeface="微软雅黑" panose="020B0503020204020204" pitchFamily="34" charset="-122"/>
-                <a:ea typeface="微软雅黑" panose="020B0503020204020204" pitchFamily="34" charset="-122"/>
-                <a:cs typeface="微软雅黑" panose="020B0503020204020204" pitchFamily="34" charset="-122"/>
-              </a:rPr>
-              <a:t>分类</a:t>
-            </a:r>
-            <a:r>
-              <a:rPr lang="en-US" altLang="zh-CN" dirty="0">
-                <a:latin typeface="微软雅黑" panose="020B0503020204020204" pitchFamily="34" charset="-122"/>
-                <a:ea typeface="微软雅黑" panose="020B0503020204020204" pitchFamily="34" charset="-122"/>
-                <a:cs typeface="微软雅黑" panose="020B0503020204020204" pitchFamily="34" charset="-122"/>
-              </a:rPr>
-              <a:t>→</a:t>
-            </a:r>
-            <a:r>
-              <a:rPr lang="zh-CN" altLang="en-US" dirty="0">
-                <a:latin typeface="微软雅黑" panose="020B0503020204020204" pitchFamily="34" charset="-122"/>
-                <a:ea typeface="微软雅黑" panose="020B0503020204020204" pitchFamily="34" charset="-122"/>
-                <a:cs typeface="微软雅黑" panose="020B0503020204020204" pitchFamily="34" charset="-122"/>
-              </a:rPr>
-              <a:t>诊断</a:t>
-            </a:r>
-            <a:r>
-              <a:rPr lang="en-US" altLang="zh-CN" dirty="0">
-                <a:latin typeface="微软雅黑" panose="020B0503020204020204" pitchFamily="34" charset="-122"/>
-                <a:ea typeface="微软雅黑" panose="020B0503020204020204" pitchFamily="34" charset="-122"/>
-                <a:cs typeface="微软雅黑" panose="020B0503020204020204" pitchFamily="34" charset="-122"/>
-              </a:rPr>
-              <a:t>→</a:t>
-            </a:r>
-            <a:r>
-              <a:rPr lang="zh-CN" altLang="en-US" dirty="0">
-                <a:latin typeface="微软雅黑" panose="020B0503020204020204" pitchFamily="34" charset="-122"/>
-                <a:ea typeface="微软雅黑" panose="020B0503020204020204" pitchFamily="34" charset="-122"/>
-                <a:cs typeface="微软雅黑" panose="020B0503020204020204" pitchFamily="34" charset="-122"/>
-              </a:rPr>
-              <a:t>补全信息</a:t>
-            </a:r>
-            <a:r>
-              <a:rPr lang="en-US" altLang="zh-CN" dirty="0">
-                <a:latin typeface="微软雅黑" panose="020B0503020204020204" pitchFamily="34" charset="-122"/>
-                <a:ea typeface="微软雅黑" panose="020B0503020204020204" pitchFamily="34" charset="-122"/>
-                <a:cs typeface="微软雅黑" panose="020B0503020204020204" pitchFamily="34" charset="-122"/>
-              </a:rPr>
-              <a:t>→</a:t>
-            </a:r>
-            <a:r>
-              <a:rPr lang="zh-CN" altLang="en-US" dirty="0">
-                <a:latin typeface="微软雅黑" panose="020B0503020204020204" pitchFamily="34" charset="-122"/>
-                <a:ea typeface="微软雅黑" panose="020B0503020204020204" pitchFamily="34" charset="-122"/>
-                <a:cs typeface="微软雅黑" panose="020B0503020204020204" pitchFamily="34" charset="-122"/>
-              </a:rPr>
-              <a:t>拒答</a:t>
-            </a:r>
-            <a:r>
-              <a:rPr lang="en-US" altLang="zh-CN" dirty="0">
-                <a:latin typeface="微软雅黑" panose="020B0503020204020204" pitchFamily="34" charset="-122"/>
-                <a:ea typeface="微软雅黑" panose="020B0503020204020204" pitchFamily="34" charset="-122"/>
-                <a:cs typeface="微软雅黑" panose="020B0503020204020204" pitchFamily="34" charset="-122"/>
-              </a:rPr>
-              <a:t>”</a:t>
-            </a:r>
-            <a:r>
-              <a:rPr lang="zh-CN" altLang="en-US" dirty="0">
-                <a:latin typeface="微软雅黑" panose="020B0503020204020204" pitchFamily="34" charset="-122"/>
-                <a:ea typeface="微软雅黑" panose="020B0503020204020204" pitchFamily="34" charset="-122"/>
-                <a:cs typeface="微软雅黑" panose="020B0503020204020204" pitchFamily="34" charset="-122"/>
-              </a:rPr>
-              <a:t>顺序处理；增加了拒答规则，明确禁止编造，降低幻觉风险；固定了输出格式，便于程序自动化解析，减少后处理成本。通过这样的优化，提示词从模糊、不可控变得清晰、可执行，显著提升了智能体输出的质量和稳定性。</a:t>
-            </a:r>
-            <a:endParaRPr lang="zh-CN" altLang="en-US" dirty="0">
-              <a:latin typeface="微软雅黑" panose="020B0503020204020204" pitchFamily="34" charset="-122"/>
-              <a:ea typeface="微软雅黑" panose="020B0503020204020204" pitchFamily="34" charset="-122"/>
-              <a:cs typeface="微软雅黑" panose="020B0503020204020204" pitchFamily="34" charset="-122"/>
-            </a:endParaRPr>
-          </a:p>
-        </p:txBody>
-      </p:sp>
-      <p:sp>
-        <p:nvSpPr>
-          <p:cNvPr id="2" name="矩形 10"/>
-          <p:cNvSpPr/>
-          <p:nvPr/>
-        </p:nvSpPr>
-        <p:spPr>
-          <a:xfrm>
-            <a:off x="674370" y="1619885"/>
-            <a:ext cx="7019290" cy="4445635"/>
-          </a:xfrm>
-          <a:custGeom>
-            <a:avLst/>
-            <a:gdLst/>
-            <a:ahLst/>
-            <a:cxnLst/>
-            <a:rect l="l" t="t" r="r" b="b"/>
-            <a:pathLst>
-              <a:path w="1759038" h="1334706">
-                <a:moveTo>
-                  <a:pt x="65637" y="63758"/>
-                </a:moveTo>
-                <a:lnTo>
-                  <a:pt x="65637" y="1271391"/>
-                </a:lnTo>
-                <a:lnTo>
-                  <a:pt x="1711798" y="1271391"/>
-                </a:lnTo>
-                <a:lnTo>
-                  <a:pt x="1711798" y="63758"/>
-                </a:lnTo>
-                <a:close/>
-                <a:moveTo>
-                  <a:pt x="0" y="0"/>
-                </a:moveTo>
-                <a:lnTo>
-                  <a:pt x="1759038" y="0"/>
-                </a:lnTo>
-                <a:lnTo>
-                  <a:pt x="1759038" y="1334706"/>
-                </a:lnTo>
-                <a:lnTo>
-                  <a:pt x="0" y="1334706"/>
-                </a:lnTo>
-                <a:close/>
-              </a:path>
-            </a:pathLst>
-          </a:custGeom>
-          <a:solidFill>
-            <a:schemeClr val="accent2">
-              <a:lumMod val="75000"/>
-            </a:schemeClr>
-          </a:solidFill>
-          <a:ln>
-            <a:noFill/>
-          </a:ln>
-        </p:spPr>
-        <p:style>
-          <a:lnRef idx="2">
-            <a:schemeClr val="accent1">
-              <a:shade val="50000"/>
-            </a:schemeClr>
-          </a:lnRef>
-          <a:fillRef idx="1">
-            <a:schemeClr val="accent1"/>
-          </a:fillRef>
-          <a:effectRef idx="0">
-            <a:schemeClr val="accent1"/>
-          </a:effectRef>
-          <a:fontRef idx="minor">
-            <a:schemeClr val="lt1"/>
-          </a:fontRef>
-        </p:style>
-        <p:txBody>
-          <a:bodyPr rtlCol="0" anchor="t"/>
-          <a:lstStyle/>
-          <a:p>
-            <a:pPr>
-              <a:lnSpc>
-                <a:spcPct val="120000"/>
-              </a:lnSpc>
-            </a:pPr>
-            <a:endParaRPr lang="zh-CN" altLang="en-US">
-              <a:solidFill>
-                <a:srgbClr val="000000"/>
-              </a:solidFill>
-              <a:cs typeface="+mn-ea"/>
-              <a:sym typeface="+mn-lt"/>
-            </a:endParaRPr>
-          </a:p>
-        </p:txBody>
-      </p:sp>
-      <p:sp>
-        <p:nvSpPr>
-          <p:cNvPr id="9" name="矩形 8"/>
-          <p:cNvSpPr/>
-          <p:nvPr/>
-        </p:nvSpPr>
-        <p:spPr>
-          <a:xfrm>
-            <a:off x="8086725" y="2372361"/>
-            <a:ext cx="3798570" cy="2991484"/>
-          </a:xfrm>
-          <a:prstGeom prst="rect">
-            <a:avLst/>
-          </a:prstGeom>
-          <a:noFill/>
-        </p:spPr>
-        <p:style>
-          <a:lnRef idx="2">
-            <a:schemeClr val="accent1">
-              <a:shade val="50000"/>
-            </a:schemeClr>
-          </a:lnRef>
-          <a:fillRef idx="1">
-            <a:schemeClr val="accent1"/>
-          </a:fillRef>
-          <a:effectRef idx="0">
-            <a:schemeClr val="accent1"/>
-          </a:effectRef>
-          <a:fontRef idx="minor">
-            <a:schemeClr val="lt1"/>
-          </a:fontRef>
-        </p:style>
-        <p:txBody>
-          <a:bodyPr rtlCol="0" anchor="ctr"/>
-          <a:lstStyle/>
-          <a:p>
-            <a:pPr algn="ctr"/>
-            <a:r>
-              <a:rPr lang="zh-CN" altLang="en-US" dirty="0" smtClean="0">
-                <a:solidFill>
-                  <a:schemeClr val="tx1"/>
-                </a:solidFill>
-              </a:rPr>
-              <a:t>教材对应知识的图片</a:t>
-            </a:r>
-            <a:endParaRPr lang="zh-CN" altLang="en-US" dirty="0">
-              <a:solidFill>
-                <a:schemeClr val="tx1"/>
-              </a:solidFill>
-            </a:endParaRPr>
-          </a:p>
-        </p:txBody>
-      </p:sp>
-      <p:sp>
-        <p:nvSpPr>
-          <p:cNvPr id="3" name="文本框 2"/>
-          <p:cNvSpPr txBox="1"/>
-          <p:nvPr/>
-        </p:nvSpPr>
-        <p:spPr>
-          <a:xfrm>
-            <a:off x="0" y="793750"/>
-            <a:ext cx="1351262" cy="583565"/>
-          </a:xfrm>
-          <a:prstGeom prst="rect">
-            <a:avLst/>
-          </a:prstGeom>
-          <a:noFill/>
-        </p:spPr>
-        <p:txBody>
-          <a:bodyPr wrap="square" rtlCol="0">
-            <a:spAutoFit/>
-            <a:scene3d>
-              <a:camera prst="orthographicFront"/>
-              <a:lightRig rig="threePt" dir="t"/>
-            </a:scene3d>
-            <a:sp3d contourW="12700"/>
-          </a:bodyPr>
-          <a:lstStyle/>
-          <a:p>
-            <a:pPr algn="ctr"/>
-            <a:r>
-              <a:rPr lang="en-US" sz="3200" dirty="0" smtClean="0">
-                <a:solidFill>
-                  <a:srgbClr val="3F396C"/>
-                </a:solidFill>
-                <a:latin typeface="思源宋体" panose="02020700000000000000" charset="-122"/>
-                <a:ea typeface="思源宋体" panose="02020700000000000000" charset="-122"/>
-              </a:rPr>
-              <a:t>03</a:t>
-            </a:r>
-            <a:endParaRPr lang="en-US" sz="3200" dirty="0" smtClean="0">
-              <a:solidFill>
-                <a:srgbClr val="3F396C"/>
-              </a:solidFill>
-              <a:latin typeface="思源宋体" panose="02020700000000000000" charset="-122"/>
-              <a:ea typeface="思源宋体" panose="02020700000000000000" charset="-122"/>
-            </a:endParaRPr>
-          </a:p>
-        </p:txBody>
-      </p:sp>
-      <p:sp>
-        <p:nvSpPr>
-          <p:cNvPr id="17" name="文本框 16"/>
-          <p:cNvSpPr txBox="1"/>
-          <p:nvPr/>
-        </p:nvSpPr>
-        <p:spPr>
-          <a:xfrm>
-            <a:off x="1278000" y="792000"/>
-            <a:ext cx="3932555" cy="583565"/>
-          </a:xfrm>
-          <a:prstGeom prst="rect">
-            <a:avLst/>
-          </a:prstGeom>
-          <a:noFill/>
-        </p:spPr>
-        <p:txBody>
-          <a:bodyPr wrap="square" rtlCol="0">
-            <a:spAutoFit/>
-            <a:scene3d>
-              <a:camera prst="orthographicFront"/>
-              <a:lightRig rig="threePt" dir="t"/>
-            </a:scene3d>
-            <a:sp3d contourW="12700"/>
-          </a:bodyPr>
-          <a:lstStyle>
-            <a:defPPr>
-              <a:defRPr lang="en-US"/>
-            </a:defPPr>
-            <a:lvl1pPr algn="ctr">
-              <a:defRPr sz="3200">
-                <a:gradFill>
-                  <a:gsLst>
-                    <a:gs pos="0">
-                      <a:schemeClr val="tx1">
-                        <a:lumMod val="50000"/>
-                        <a:lumOff val="50000"/>
-                      </a:schemeClr>
-                    </a:gs>
-                    <a:gs pos="100000">
-                      <a:schemeClr val="tx1">
-                        <a:lumMod val="85000"/>
-                        <a:lumOff val="15000"/>
-                      </a:schemeClr>
-                    </a:gs>
-                  </a:gsLst>
-                  <a:lin ang="5400000" scaled="1"/>
-                </a:gradFill>
-              </a:defRPr>
-            </a:lvl1pPr>
-          </a:lstStyle>
-          <a:p>
-            <a:pPr marL="0" marR="0" lvl="0" indent="0" algn="l" defTabSz="914400" rtl="0" eaLnBrk="1" fontAlgn="auto" latinLnBrk="0" hangingPunct="1">
-              <a:lnSpc>
-                <a:spcPct val="100000"/>
-              </a:lnSpc>
-              <a:spcBef>
-                <a:spcPts val="0"/>
-              </a:spcBef>
-              <a:spcAft>
-                <a:spcPts val="0"/>
-              </a:spcAft>
-              <a:buClrTx/>
-              <a:buSzTx/>
-              <a:buFontTx/>
-              <a:buNone/>
-              <a:defRPr/>
-            </a:pPr>
-            <a:r>
-              <a:rPr lang="zh-CN" altLang="en-US" b="1" dirty="0">
-                <a:solidFill>
-                  <a:schemeClr val="accent1">
-                    <a:lumMod val="75000"/>
-                  </a:schemeClr>
-                </a:solidFill>
-                <a:latin typeface="微软雅黑" panose="020B0503020204020204" pitchFamily="34" charset="-122"/>
-                <a:ea typeface="微软雅黑" panose="020B0503020204020204" pitchFamily="34" charset="-122"/>
-                <a:cs typeface="微软雅黑" panose="020B0503020204020204" pitchFamily="34" charset="-122"/>
-                <a:sym typeface="+mn-lt"/>
-              </a:rPr>
-              <a:t>知识储备</a:t>
-            </a:r>
-            <a:endParaRPr lang="en-US" altLang="zh-CN" b="1" dirty="0">
-              <a:solidFill>
-                <a:schemeClr val="accent1">
-                  <a:lumMod val="75000"/>
-                </a:schemeClr>
-              </a:solidFill>
-              <a:latin typeface="微软雅黑" panose="020B0503020204020204" pitchFamily="34" charset="-122"/>
-              <a:ea typeface="微软雅黑" panose="020B0503020204020204" pitchFamily="34" charset="-122"/>
-              <a:cs typeface="微软雅黑" panose="020B0503020204020204" pitchFamily="34" charset="-122"/>
-              <a:sym typeface="+mn-lt"/>
-            </a:endParaRPr>
-          </a:p>
-        </p:txBody>
-      </p:sp>
-    </p:spTree>
-  </p:cSld>
-  <p:clrMapOvr>
-    <a:masterClrMapping/>
-  </p:clrMapOvr>
-</p:sld>
-</file>
-
-<file path=ppt/slides/slide6.xml><?xml version="1.0" encoding="utf-8"?>
-<p:sld xmlns:a="http://schemas.openxmlformats.org/drawingml/2006/main" xmlns:r="http://schemas.openxmlformats.org/officeDocument/2006/relationships" xmlns:p="http://schemas.openxmlformats.org/presentationml/2006/main">
-  <p:cSld>
-    <p:spTree>
-      <p:nvGrpSpPr>
-        <p:cNvPr id="1" name=""/>
-        <p:cNvGrpSpPr/>
-        <p:nvPr/>
-      </p:nvGrpSpPr>
-      <p:grpSpPr>
-        <a:xfrm>
-          <a:off x="0" y="0"/>
-          <a:ext cx="0" cy="0"/>
-          <a:chOff x="0" y="0"/>
-          <a:chExt cx="0" cy="0"/>
-        </a:xfrm>
-      </p:grpSpPr>
-      <p:sp>
-        <p:nvSpPr>
           <p:cNvPr id="21" name="任意多边形 44"/>
           <p:cNvSpPr/>
           <p:nvPr>
@@ -17585,8 +13862,8 @@
         </p:nvSpPr>
         <p:spPr>
           <a:xfrm flipV="1">
-            <a:off x="5382794" y="3951605"/>
-            <a:ext cx="1940560" cy="1148715"/>
+            <a:off x="7538194" y="4134567"/>
+            <a:ext cx="1941223" cy="1149108"/>
           </a:xfrm>
           <a:custGeom>
             <a:avLst/>
@@ -17700,8 +13977,8 @@
         </p:nvGrpSpPr>
         <p:grpSpPr>
           <a:xfrm>
-            <a:off x="5236109" y="2458720"/>
-            <a:ext cx="1892300" cy="1892300"/>
+            <a:off x="7391459" y="2641172"/>
+            <a:ext cx="1892947" cy="1892947"/>
             <a:chOff x="4536" y="4280"/>
             <a:chExt cx="2980" cy="2980"/>
           </a:xfrm>
@@ -17823,9 +14100,7 @@
               </a:avLst>
             </a:prstGeom>
             <a:solidFill>
-              <a:schemeClr val="accent1">
-                <a:lumMod val="75000"/>
-              </a:schemeClr>
+              <a:srgbClr val="0064D2"/>
             </a:solidFill>
             <a:ln>
               <a:noFill/>
@@ -17897,8 +14172,8 @@
         </p:nvSpPr>
         <p:spPr>
           <a:xfrm>
-            <a:off x="4388270" y="5166995"/>
-            <a:ext cx="3600000" cy="460375"/>
+            <a:off x="6184076" y="5350373"/>
+            <a:ext cx="4320000" cy="460375"/>
           </a:xfrm>
           <a:prstGeom prst="rect">
             <a:avLst/>
@@ -17911,51 +14186,27 @@
           </a:bodyPr>
           <a:lstStyle/>
           <a:p>
-            <a:pPr marL="0" marR="0" lvl="0" indent="0" algn="ctr" defTabSz="914400" rtl="0" eaLnBrk="1" fontAlgn="auto" latinLnBrk="0" hangingPunct="1">
-              <a:lnSpc>
-                <a:spcPct val="100000"/>
-              </a:lnSpc>
-              <a:spcBef>
-                <a:spcPts val="0"/>
-              </a:spcBef>
-              <a:spcAft>
-                <a:spcPts val="0"/>
-              </a:spcAft>
+            <a:pPr lvl="0" algn="ctr">
               <a:buClrTx/>
               <a:buSzTx/>
               <a:buFontTx/>
-              <a:buNone/>
-              <a:defRPr/>
             </a:pPr>
             <a:r>
-              <a:rPr lang="en-US" altLang="zh-CN" sz="2400" b="1" dirty="0" smtClean="0">
+              <a:rPr lang="en-US" sz="2400" b="1" dirty="0" smtClean="0">
                 <a:solidFill>
                   <a:srgbClr val="0064D2"/>
                 </a:solidFill>
-                <a:latin typeface="微软雅黑" panose="020B0503020204020204" pitchFamily="34" charset="-122"/>
-                <a:ea typeface="微软雅黑" panose="020B0503020204020204" pitchFamily="34" charset="-122"/>
-                <a:sym typeface="+mn-ea"/>
-              </a:rPr>
-              <a:t>LLM</a:t>
-            </a:r>
-            <a:r>
-              <a:rPr lang="zh-CN" altLang="en-US" sz="2400" b="1" dirty="0" smtClean="0">
-                <a:solidFill>
-                  <a:srgbClr val="0064D2"/>
-                </a:solidFill>
-                <a:latin typeface="微软雅黑" panose="020B0503020204020204" pitchFamily="34" charset="-122"/>
-                <a:ea typeface="微软雅黑" panose="020B0503020204020204" pitchFamily="34" charset="-122"/>
-                <a:sym typeface="+mn-ea"/>
-              </a:rPr>
-              <a:t>的工作原理简述</a:t>
-            </a:r>
-            <a:endParaRPr lang="zh-CN" altLang="en-US" sz="2400" b="1" dirty="0" smtClean="0">
+                <a:cs typeface="+mn-ea"/>
+                <a:sym typeface="+mn-lt"/>
+              </a:rPr>
+              <a:t>Agent Skill</a:t>
+            </a:r>
+            <a:endParaRPr lang="en-US" sz="2400" b="1" dirty="0" smtClean="0">
               <a:solidFill>
                 <a:srgbClr val="0064D2"/>
               </a:solidFill>
-              <a:latin typeface="微软雅黑" panose="020B0503020204020204" pitchFamily="34" charset="-122"/>
-              <a:ea typeface="微软雅黑" panose="020B0503020204020204" pitchFamily="34" charset="-122"/>
-              <a:sym typeface="+mn-ea"/>
+              <a:cs typeface="+mn-ea"/>
+              <a:sym typeface="+mn-lt"/>
             </a:endParaRPr>
           </a:p>
         </p:txBody>
@@ -17972,8 +14223,8 @@
         </p:nvSpPr>
         <p:spPr>
           <a:xfrm>
-            <a:off x="5826024" y="2936875"/>
-            <a:ext cx="682625" cy="1014730"/>
+            <a:off x="7981576" y="3119490"/>
+            <a:ext cx="682858" cy="1014730"/>
           </a:xfrm>
           <a:prstGeom prst="rect">
             <a:avLst/>
@@ -18041,7 +14292,6 @@
                 </a:solidFill>
                 <a:latin typeface="思源宋体" panose="02020700000000000000" charset="-122"/>
                 <a:ea typeface="思源宋体" panose="02020700000000000000" charset="-122"/>
-                <a:sym typeface="+mn-ea"/>
               </a:rPr>
               <a:t>03</a:t>
             </a:r>
@@ -18051,7 +14301,6 @@
               </a:solidFill>
               <a:latin typeface="思源宋体" panose="02020700000000000000" charset="-122"/>
               <a:ea typeface="思源宋体" panose="02020700000000000000" charset="-122"/>
-              <a:sym typeface="+mn-ea"/>
             </a:endParaRPr>
           </a:p>
         </p:txBody>
@@ -18068,8 +14317,8 @@
         </p:nvSpPr>
         <p:spPr>
           <a:xfrm>
-            <a:off x="589112" y="5166995"/>
-            <a:ext cx="3600000" cy="460375"/>
+            <a:off x="1483995" y="5350510"/>
+            <a:ext cx="4320000" cy="460375"/>
           </a:xfrm>
           <a:prstGeom prst="rect">
             <a:avLst/>
@@ -18107,7 +14356,7 @@
                 <a:ea typeface="微软雅黑" panose="020B0503020204020204" pitchFamily="34" charset="-122"/>
                 <a:sym typeface="+mn-ea"/>
               </a:rPr>
-              <a:t>什么是提示词工程</a:t>
+              <a:t>工具调用基础原理与配置</a:t>
             </a:r>
             <a:endParaRPr lang="zh-CN" altLang="zh-CN" sz="2400" dirty="0" smtClean="0">
               <a:solidFill>
@@ -18132,8 +14381,8 @@
         </p:nvGrpSpPr>
         <p:grpSpPr>
           <a:xfrm>
-            <a:off x="1443301" y="1852930"/>
-            <a:ext cx="2087245" cy="2570480"/>
+            <a:off x="2691210" y="2004060"/>
+            <a:ext cx="2087958" cy="2571359"/>
             <a:chOff x="4536" y="3212"/>
             <a:chExt cx="3287" cy="4048"/>
           </a:xfrm>
@@ -18305,7 +14554,10 @@
                   <a:noFill/>
                 </a:ln>
                 <a:solidFill>
-                  <a:prstClr val="white"/>
+                  <a:schemeClr val="tx1">
+                    <a:lumMod val="75000"/>
+                    <a:lumOff val="25000"/>
+                  </a:schemeClr>
                 </a:solidFill>
                 <a:effectLst/>
                 <a:uLnTx/>
@@ -18445,8 +14697,8 @@
         </p:nvSpPr>
         <p:spPr>
           <a:xfrm>
-            <a:off x="2033216" y="3001645"/>
-            <a:ext cx="682625" cy="1014730"/>
+            <a:off x="3281327" y="3153168"/>
+            <a:ext cx="682858" cy="1014730"/>
           </a:xfrm>
           <a:prstGeom prst="rect">
             <a:avLst/>
@@ -18475,421 +14727,6 @@
               </a:solidFill>
               <a:latin typeface="+mj-ea"/>
               <a:ea typeface="+mj-ea"/>
-            </a:endParaRPr>
-          </a:p>
-        </p:txBody>
-      </p:sp>
-      <p:sp>
-        <p:nvSpPr>
-          <p:cNvPr id="5" name="文本框1"/>
-          <p:cNvSpPr txBox="1"/>
-          <p:nvPr>
-            <p:custDataLst>
-              <p:tags r:id="rId13"/>
-            </p:custDataLst>
-          </p:nvPr>
-        </p:nvSpPr>
-        <p:spPr>
-          <a:xfrm>
-            <a:off x="8146800" y="5211445"/>
-            <a:ext cx="3600000" cy="460375"/>
-          </a:xfrm>
-          <a:prstGeom prst="rect">
-            <a:avLst/>
-          </a:prstGeom>
-          <a:noFill/>
-        </p:spPr>
-        <p:txBody>
-          <a:bodyPr wrap="square" rtlCol="0">
-            <a:spAutoFit/>
-          </a:bodyPr>
-          <a:lstStyle/>
-          <a:p>
-            <a:pPr marL="0" marR="0" lvl="0" indent="0" algn="ctr" defTabSz="914400" rtl="0" eaLnBrk="1" fontAlgn="auto" latinLnBrk="0" hangingPunct="1">
-              <a:lnSpc>
-                <a:spcPct val="100000"/>
-              </a:lnSpc>
-              <a:spcBef>
-                <a:spcPts val="0"/>
-              </a:spcBef>
-              <a:spcAft>
-                <a:spcPts val="0"/>
-              </a:spcAft>
-              <a:buClrTx/>
-              <a:buSzTx/>
-              <a:buFontTx/>
-              <a:buNone/>
-              <a:defRPr/>
-            </a:pPr>
-            <a:r>
-              <a:rPr lang="en-US" altLang="zh-CN" sz="2400" dirty="0" smtClean="0">
-                <a:solidFill>
-                  <a:schemeClr val="tx1"/>
-                </a:solidFill>
-                <a:latin typeface="微软雅黑" panose="020B0503020204020204" pitchFamily="34" charset="-122"/>
-                <a:ea typeface="微软雅黑" panose="020B0503020204020204" pitchFamily="34" charset="-122"/>
-                <a:sym typeface="+mn-ea"/>
-              </a:rPr>
-              <a:t>LLM</a:t>
-            </a:r>
-            <a:r>
-              <a:rPr lang="zh-CN" altLang="en-US" sz="2400" dirty="0" smtClean="0">
-                <a:solidFill>
-                  <a:schemeClr val="tx1"/>
-                </a:solidFill>
-                <a:latin typeface="微软雅黑" panose="020B0503020204020204" pitchFamily="34" charset="-122"/>
-                <a:ea typeface="微软雅黑" panose="020B0503020204020204" pitchFamily="34" charset="-122"/>
-                <a:sym typeface="+mn-ea"/>
-              </a:rPr>
-              <a:t>的工作原理简述</a:t>
-            </a:r>
-            <a:endParaRPr lang="zh-CN" altLang="en-US" sz="2400" dirty="0" smtClean="0">
-              <a:solidFill>
-                <a:schemeClr val="tx1"/>
-              </a:solidFill>
-              <a:latin typeface="微软雅黑" panose="020B0503020204020204" pitchFamily="34" charset="-122"/>
-              <a:ea typeface="微软雅黑" panose="020B0503020204020204" pitchFamily="34" charset="-122"/>
-              <a:sym typeface="+mn-ea"/>
-            </a:endParaRPr>
-          </a:p>
-        </p:txBody>
-      </p:sp>
-      <p:sp>
-        <p:nvSpPr>
-          <p:cNvPr id="11" name="圆角矩形 34"/>
-          <p:cNvSpPr/>
-          <p:nvPr>
-            <p:custDataLst>
-              <p:tags r:id="rId14"/>
-            </p:custDataLst>
-          </p:nvPr>
-        </p:nvSpPr>
-        <p:spPr>
-          <a:xfrm rot="2700000">
-            <a:off x="8998585" y="2482850"/>
-            <a:ext cx="1892300" cy="1892300"/>
-          </a:xfrm>
-          <a:prstGeom prst="roundRect">
-            <a:avLst>
-              <a:gd name="adj" fmla="val 6319"/>
-            </a:avLst>
-          </a:prstGeom>
-          <a:solidFill>
-            <a:schemeClr val="bg1">
-              <a:lumMod val="95000"/>
-            </a:schemeClr>
-          </a:solidFill>
-          <a:ln>
-            <a:noFill/>
-          </a:ln>
-          <a:effectLst>
-            <a:outerShdw blurRad="152400" dist="63500" dir="8100000" algn="tl" rotWithShape="0">
-              <a:prstClr val="black">
-                <a:alpha val="30000"/>
-              </a:prstClr>
-            </a:outerShdw>
-          </a:effectLst>
-          <a:scene3d>
-            <a:camera prst="orthographicFront"/>
-            <a:lightRig rig="threePt" dir="t"/>
-          </a:scene3d>
-          <a:sp3d prstMaterial="softEdge">
-            <a:bevelT w="38100" h="6350"/>
-          </a:sp3d>
-        </p:spPr>
-        <p:style>
-          <a:lnRef idx="2">
-            <a:schemeClr val="accent1">
-              <a:shade val="50000"/>
-            </a:schemeClr>
-          </a:lnRef>
-          <a:fillRef idx="1">
-            <a:schemeClr val="accent1"/>
-          </a:fillRef>
-          <a:effectRef idx="0">
-            <a:schemeClr val="accent1"/>
-          </a:effectRef>
-          <a:fontRef idx="minor">
-            <a:schemeClr val="lt1"/>
-          </a:fontRef>
-        </p:style>
-        <p:txBody>
-          <a:bodyPr rtlCol="0" anchor="ctr"/>
-          <a:lstStyle/>
-          <a:p>
-            <a:pPr marL="0" marR="0" lvl="0" indent="0" algn="ctr" defTabSz="914400" rtl="0" eaLnBrk="1" fontAlgn="auto" latinLnBrk="0" hangingPunct="1">
-              <a:lnSpc>
-                <a:spcPct val="100000"/>
-              </a:lnSpc>
-              <a:spcBef>
-                <a:spcPts val="0"/>
-              </a:spcBef>
-              <a:spcAft>
-                <a:spcPts val="0"/>
-              </a:spcAft>
-              <a:buClrTx/>
-              <a:buSzTx/>
-              <a:buFontTx/>
-              <a:buNone/>
-              <a:defRPr/>
-            </a:pPr>
-            <a:endParaRPr kumimoji="0" lang="zh-CN" altLang="en-US" sz="2800" b="0" i="0" u="none" strike="noStrike" kern="1200" cap="none" spc="0" normalizeH="0" baseline="0" noProof="0" dirty="0">
-              <a:ln>
-                <a:noFill/>
-              </a:ln>
-              <a:solidFill>
-                <a:prstClr val="white"/>
-              </a:solidFill>
-              <a:effectLst/>
-              <a:uLnTx/>
-              <a:uFillTx/>
-              <a:latin typeface="DIN-BoldItalic" pitchFamily="50" charset="0"/>
-              <a:ea typeface="微软雅黑" panose="020B0503020204020204" pitchFamily="34" charset="-122"/>
-              <a:cs typeface="+mn-cs"/>
-            </a:endParaRPr>
-          </a:p>
-        </p:txBody>
-      </p:sp>
-      <p:sp>
-        <p:nvSpPr>
-          <p:cNvPr id="13" name="圆角矩形 38"/>
-          <p:cNvSpPr/>
-          <p:nvPr>
-            <p:custDataLst>
-              <p:tags r:id="rId15"/>
-            </p:custDataLst>
-          </p:nvPr>
-        </p:nvSpPr>
-        <p:spPr>
-          <a:xfrm rot="2700000">
-            <a:off x="9251214" y="2748280"/>
-            <a:ext cx="1387475" cy="1387475"/>
-          </a:xfrm>
-          <a:prstGeom prst="roundRect">
-            <a:avLst>
-              <a:gd name="adj" fmla="val 6319"/>
-            </a:avLst>
-          </a:prstGeom>
-          <a:solidFill>
-            <a:schemeClr val="tx1">
-              <a:lumMod val="65000"/>
-              <a:lumOff val="35000"/>
-            </a:schemeClr>
-          </a:solidFill>
-          <a:ln>
-            <a:noFill/>
-          </a:ln>
-        </p:spPr>
-        <p:style>
-          <a:lnRef idx="2">
-            <a:schemeClr val="accent1">
-              <a:shade val="50000"/>
-            </a:schemeClr>
-          </a:lnRef>
-          <a:fillRef idx="1">
-            <a:schemeClr val="accent1"/>
-          </a:fillRef>
-          <a:effectRef idx="0">
-            <a:schemeClr val="accent1"/>
-          </a:effectRef>
-          <a:fontRef idx="minor">
-            <a:schemeClr val="lt1"/>
-          </a:fontRef>
-        </p:style>
-        <p:txBody>
-          <a:bodyPr rtlCol="0" anchor="ctr"/>
-          <a:lstStyle/>
-          <a:p>
-            <a:pPr marL="0" marR="0" lvl="0" indent="0" algn="ctr" defTabSz="914400" rtl="0" eaLnBrk="1" fontAlgn="auto" latinLnBrk="0" hangingPunct="1">
-              <a:lnSpc>
-                <a:spcPct val="100000"/>
-              </a:lnSpc>
-              <a:spcBef>
-                <a:spcPts val="0"/>
-              </a:spcBef>
-              <a:spcAft>
-                <a:spcPts val="0"/>
-              </a:spcAft>
-              <a:buClrTx/>
-              <a:buSzTx/>
-              <a:buFontTx/>
-              <a:buNone/>
-              <a:defRPr/>
-            </a:pPr>
-            <a:endParaRPr kumimoji="0" lang="zh-CN" altLang="en-US" sz="1800" b="0" i="0" u="none" strike="noStrike" kern="1200" cap="none" spc="0" normalizeH="0" baseline="0" noProof="0" dirty="0">
-              <a:ln>
-                <a:noFill/>
-              </a:ln>
-              <a:solidFill>
-                <a:prstClr val="white"/>
-              </a:solidFill>
-              <a:effectLst/>
-              <a:uLnTx/>
-              <a:uFillTx/>
-              <a:latin typeface="等线" panose="02010600030101010101" charset="-122"/>
-              <a:ea typeface="微软雅黑" panose="020B0503020204020204" pitchFamily="34" charset="-122"/>
-              <a:cs typeface="+mn-cs"/>
-            </a:endParaRPr>
-          </a:p>
-        </p:txBody>
-      </p:sp>
-      <p:sp>
-        <p:nvSpPr>
-          <p:cNvPr id="14" name="文本框 13"/>
-          <p:cNvSpPr txBox="1"/>
-          <p:nvPr>
-            <p:custDataLst>
-              <p:tags r:id="rId16"/>
-            </p:custDataLst>
-          </p:nvPr>
-        </p:nvSpPr>
-        <p:spPr>
-          <a:xfrm>
-            <a:off x="9603004" y="2908935"/>
-            <a:ext cx="682625" cy="1014730"/>
-          </a:xfrm>
-          <a:prstGeom prst="rect">
-            <a:avLst/>
-          </a:prstGeom>
-          <a:noFill/>
-        </p:spPr>
-        <p:txBody>
-          <a:bodyPr wrap="square" rtlCol="0">
-            <a:spAutoFit/>
-          </a:bodyPr>
-          <a:lstStyle/>
-          <a:p>
-            <a:r>
-              <a:rPr lang="en-US" altLang="zh-CN" sz="6000" b="1">
-                <a:solidFill>
-                  <a:schemeClr val="bg1"/>
-                </a:solidFill>
-                <a:latin typeface="+mj-ea"/>
-                <a:ea typeface="+mj-ea"/>
-              </a:rPr>
-              <a:t>3</a:t>
-            </a:r>
-            <a:endParaRPr lang="en-US" altLang="zh-CN" sz="6000" b="1">
-              <a:solidFill>
-                <a:schemeClr val="bg1"/>
-              </a:solidFill>
-              <a:latin typeface="+mj-ea"/>
-              <a:ea typeface="+mj-ea"/>
-            </a:endParaRPr>
-          </a:p>
-        </p:txBody>
-      </p:sp>
-      <p:sp>
-        <p:nvSpPr>
-          <p:cNvPr id="15" name="任意多边形 42"/>
-          <p:cNvSpPr/>
-          <p:nvPr>
-            <p:custDataLst>
-              <p:tags r:id="rId17"/>
-            </p:custDataLst>
-          </p:nvPr>
-        </p:nvSpPr>
-        <p:spPr>
-          <a:xfrm>
-            <a:off x="9143311" y="1760220"/>
-            <a:ext cx="1940560" cy="1148715"/>
-          </a:xfrm>
-          <a:custGeom>
-            <a:avLst/>
-            <a:gdLst>
-              <a:gd name="connsiteX0" fmla="*/ 0 w 1940313"/>
-              <a:gd name="connsiteY0" fmla="*/ 791737 h 1148576"/>
-              <a:gd name="connsiteX1" fmla="*/ 791737 w 1940313"/>
-              <a:gd name="connsiteY1" fmla="*/ 0 h 1148576"/>
-              <a:gd name="connsiteX2" fmla="*/ 1940313 w 1940313"/>
-              <a:gd name="connsiteY2" fmla="*/ 1148576 h 1148576"/>
-            </a:gdLst>
-            <a:ahLst/>
-            <a:cxnLst>
-              <a:cxn ang="0">
-                <a:pos x="connsiteX0" y="connsiteY0"/>
-              </a:cxn>
-              <a:cxn ang="0">
-                <a:pos x="connsiteX1" y="connsiteY1"/>
-              </a:cxn>
-              <a:cxn ang="0">
-                <a:pos x="connsiteX2" y="connsiteY2"/>
-              </a:cxn>
-            </a:cxnLst>
-            <a:rect l="l" t="t" r="r" b="b"/>
-            <a:pathLst>
-              <a:path w="1940313" h="1148576">
-                <a:moveTo>
-                  <a:pt x="0" y="791737"/>
-                </a:moveTo>
-                <a:lnTo>
-                  <a:pt x="791737" y="0"/>
-                </a:lnTo>
-                <a:lnTo>
-                  <a:pt x="1940313" y="1148576"/>
-                </a:lnTo>
-              </a:path>
-            </a:pathLst>
-          </a:custGeom>
-          <a:noFill/>
-          <a:ln w="12700">
-            <a:solidFill>
-              <a:srgbClr val="8A8B8F"/>
-            </a:solidFill>
-            <a:prstDash val="dash"/>
-            <a:headEnd type="oval" w="med" len="med"/>
-            <a:tailEnd type="triangle" w="med" len="med"/>
-          </a:ln>
-        </p:spPr>
-        <p:style>
-          <a:lnRef idx="2">
-            <a:schemeClr val="accent1">
-              <a:shade val="50000"/>
-            </a:schemeClr>
-          </a:lnRef>
-          <a:fillRef idx="1">
-            <a:schemeClr val="accent1"/>
-          </a:fillRef>
-          <a:effectRef idx="0">
-            <a:schemeClr val="accent1"/>
-          </a:effectRef>
-          <a:fontRef idx="minor">
-            <a:schemeClr val="lt1"/>
-          </a:fontRef>
-        </p:style>
-        <p:txBody>
-          <a:bodyPr rtlCol="0" anchor="ctr"/>
-          <a:lstStyle/>
-          <a:p>
-            <a:pPr marL="0" marR="0" lvl="0" indent="0" algn="ctr" defTabSz="914400" rtl="0" eaLnBrk="1" fontAlgn="auto" latinLnBrk="0" hangingPunct="1">
-              <a:lnSpc>
-                <a:spcPct val="100000"/>
-              </a:lnSpc>
-              <a:spcBef>
-                <a:spcPts val="0"/>
-              </a:spcBef>
-              <a:spcAft>
-                <a:spcPts val="0"/>
-              </a:spcAft>
-              <a:buClrTx/>
-              <a:buSzTx/>
-              <a:buFontTx/>
-              <a:buNone/>
-              <a:defRPr/>
-            </a:pPr>
-            <a:endParaRPr kumimoji="0" lang="zh-CN" altLang="en-US" sz="1800" b="0" i="0" u="none" strike="noStrike" kern="1200" cap="none" spc="0" normalizeH="0" baseline="0" noProof="0" dirty="0">
-              <a:ln>
-                <a:noFill/>
-              </a:ln>
-              <a:solidFill>
-                <a:prstClr val="white"/>
-              </a:solidFill>
-              <a:effectLst/>
-              <a:uLnTx/>
-              <a:uFillTx/>
-              <a:latin typeface="等线" panose="02010600030101010101" charset="-122"/>
-              <a:ea typeface="微软雅黑" panose="020B0503020204020204" pitchFamily="34" charset="-122"/>
-              <a:cs typeface="+mn-cs"/>
             </a:endParaRPr>
           </a:p>
         </p:txBody>
@@ -18977,6 +14814,582 @@
               <a:t>知识储备</a:t>
             </a:r>
             <a:endParaRPr lang="zh-CN" altLang="zh-CN" b="1" dirty="0">
+              <a:solidFill>
+                <a:schemeClr val="accent1">
+                  <a:lumMod val="75000"/>
+                </a:schemeClr>
+              </a:solidFill>
+              <a:latin typeface="微软雅黑" panose="020B0503020204020204" pitchFamily="34" charset="-122"/>
+              <a:ea typeface="微软雅黑" panose="020B0503020204020204" pitchFamily="34" charset="-122"/>
+              <a:cs typeface="微软雅黑" panose="020B0503020204020204" pitchFamily="34" charset="-122"/>
+              <a:sym typeface="+mn-lt"/>
+            </a:endParaRPr>
+          </a:p>
+        </p:txBody>
+      </p:sp>
+    </p:spTree>
+  </p:cSld>
+  <p:clrMapOvr>
+    <a:masterClrMapping/>
+  </p:clrMapOvr>
+</p:sld>
+</file>
+
+<file path=ppt/slides/slide6.xml><?xml version="1.0" encoding="utf-8"?>
+<p:sld xmlns:a="http://schemas.openxmlformats.org/drawingml/2006/main" xmlns:r="http://schemas.openxmlformats.org/officeDocument/2006/relationships" xmlns:p="http://schemas.openxmlformats.org/presentationml/2006/main">
+  <p:cSld>
+    <p:spTree>
+      <p:nvGrpSpPr>
+        <p:cNvPr id="1" name=""/>
+        <p:cNvGrpSpPr/>
+        <p:nvPr/>
+      </p:nvGrpSpPr>
+      <p:grpSpPr>
+        <a:xfrm>
+          <a:off x="0" y="0"/>
+          <a:ext cx="0" cy="0"/>
+          <a:chOff x="0" y="0"/>
+          <a:chExt cx="0" cy="0"/>
+        </a:xfrm>
+      </p:grpSpPr>
+      <p:sp>
+        <p:nvSpPr>
+          <p:cNvPr id="4" name="文本框 3"/>
+          <p:cNvSpPr txBox="1"/>
+          <p:nvPr/>
+        </p:nvSpPr>
+        <p:spPr>
+          <a:xfrm>
+            <a:off x="1010285" y="1899920"/>
+            <a:ext cx="6406515" cy="3884930"/>
+          </a:xfrm>
+          <a:prstGeom prst="rect">
+            <a:avLst/>
+          </a:prstGeom>
+          <a:noFill/>
+          <a:ln w="9525">
+            <a:noFill/>
+          </a:ln>
+        </p:spPr>
+        <p:txBody>
+          <a:bodyPr wrap="square">
+            <a:noAutofit/>
+          </a:bodyPr>
+          <a:lstStyle/>
+          <a:p>
+            <a:pPr indent="457200" fontAlgn="auto">
+              <a:lnSpc>
+                <a:spcPct val="150000"/>
+              </a:lnSpc>
+            </a:pPr>
+            <a:r>
+              <a:rPr lang="en-US" dirty="0">
+                <a:latin typeface="微软雅黑" panose="020B0503020204020204" pitchFamily="34" charset="-122"/>
+                <a:ea typeface="微软雅黑" panose="020B0503020204020204" pitchFamily="34" charset="-122"/>
+                <a:cs typeface="微软雅黑" panose="020B0503020204020204" pitchFamily="34" charset="-122"/>
+              </a:rPr>
+              <a:t>Agent Skill</a:t>
+            </a:r>
+            <a:r>
+              <a:rPr lang="zh-CN" altLang="en-US" dirty="0">
+                <a:latin typeface="微软雅黑" panose="020B0503020204020204" pitchFamily="34" charset="-122"/>
+                <a:ea typeface="微软雅黑" panose="020B0503020204020204" pitchFamily="34" charset="-122"/>
+                <a:cs typeface="微软雅黑" panose="020B0503020204020204" pitchFamily="34" charset="-122"/>
+              </a:rPr>
+              <a:t>是</a:t>
+            </a:r>
+            <a:r>
+              <a:rPr lang="en-US" altLang="zh-CN" dirty="0">
+                <a:latin typeface="微软雅黑" panose="020B0503020204020204" pitchFamily="34" charset="-122"/>
+                <a:ea typeface="微软雅黑" panose="020B0503020204020204" pitchFamily="34" charset="-122"/>
+                <a:cs typeface="微软雅黑" panose="020B0503020204020204" pitchFamily="34" charset="-122"/>
+              </a:rPr>
+              <a:t>2025</a:t>
+            </a:r>
+            <a:r>
+              <a:rPr lang="zh-CN" altLang="en-US" dirty="0">
+                <a:latin typeface="微软雅黑" panose="020B0503020204020204" pitchFamily="34" charset="-122"/>
+                <a:ea typeface="微软雅黑" panose="020B0503020204020204" pitchFamily="34" charset="-122"/>
+                <a:cs typeface="微软雅黑" panose="020B0503020204020204" pitchFamily="34" charset="-122"/>
+              </a:rPr>
+              <a:t>年由</a:t>
+            </a:r>
+            <a:r>
+              <a:rPr lang="en-US" altLang="zh-CN" dirty="0">
+                <a:latin typeface="微软雅黑" panose="020B0503020204020204" pitchFamily="34" charset="-122"/>
+                <a:ea typeface="微软雅黑" panose="020B0503020204020204" pitchFamily="34" charset="-122"/>
+                <a:cs typeface="微软雅黑" panose="020B0503020204020204" pitchFamily="34" charset="-122"/>
+              </a:rPr>
+              <a:t>Anthropic</a:t>
+            </a:r>
+            <a:r>
+              <a:rPr lang="zh-CN" altLang="en-US" dirty="0">
+                <a:latin typeface="微软雅黑" panose="020B0503020204020204" pitchFamily="34" charset="-122"/>
+                <a:ea typeface="微软雅黑" panose="020B0503020204020204" pitchFamily="34" charset="-122"/>
+                <a:cs typeface="微软雅黑" panose="020B0503020204020204" pitchFamily="34" charset="-122"/>
+              </a:rPr>
+              <a:t>公司提出的概念，旨在解决复杂</a:t>
+            </a:r>
+            <a:r>
+              <a:rPr lang="en-US" altLang="zh-CN" dirty="0">
+                <a:latin typeface="微软雅黑" panose="020B0503020204020204" pitchFamily="34" charset="-122"/>
+                <a:ea typeface="微软雅黑" panose="020B0503020204020204" pitchFamily="34" charset="-122"/>
+                <a:cs typeface="微软雅黑" panose="020B0503020204020204" pitchFamily="34" charset="-122"/>
+              </a:rPr>
+              <a:t>Agent</a:t>
+            </a:r>
+            <a:r>
+              <a:rPr lang="zh-CN" altLang="en-US" dirty="0">
+                <a:latin typeface="微软雅黑" panose="020B0503020204020204" pitchFamily="34" charset="-122"/>
+                <a:ea typeface="微软雅黑" panose="020B0503020204020204" pitchFamily="34" charset="-122"/>
+                <a:cs typeface="微软雅黑" panose="020B0503020204020204" pitchFamily="34" charset="-122"/>
+              </a:rPr>
+              <a:t>系统中能力复用与组合的问题，目前已成为行业中的标准设计模式。</a:t>
+            </a:r>
+            <a:r>
+              <a:rPr lang="en-US" altLang="zh-CN" dirty="0">
+                <a:latin typeface="微软雅黑" panose="020B0503020204020204" pitchFamily="34" charset="-122"/>
+                <a:ea typeface="微软雅黑" panose="020B0503020204020204" pitchFamily="34" charset="-122"/>
+                <a:cs typeface="微软雅黑" panose="020B0503020204020204" pitchFamily="34" charset="-122"/>
+              </a:rPr>
+              <a:t>Skill</a:t>
+            </a:r>
+            <a:r>
+              <a:rPr lang="zh-CN" altLang="en-US" dirty="0">
+                <a:latin typeface="微软雅黑" panose="020B0503020204020204" pitchFamily="34" charset="-122"/>
+                <a:ea typeface="微软雅黑" panose="020B0503020204020204" pitchFamily="34" charset="-122"/>
+                <a:cs typeface="微软雅黑" panose="020B0503020204020204" pitchFamily="34" charset="-122"/>
+              </a:rPr>
+              <a:t>是一个模块化、可复用、可组合的能力包，能够被</a:t>
+            </a:r>
+            <a:r>
+              <a:rPr lang="en-US" altLang="zh-CN" dirty="0">
+                <a:latin typeface="微软雅黑" panose="020B0503020204020204" pitchFamily="34" charset="-122"/>
+                <a:ea typeface="微软雅黑" panose="020B0503020204020204" pitchFamily="34" charset="-122"/>
+                <a:cs typeface="微软雅黑" panose="020B0503020204020204" pitchFamily="34" charset="-122"/>
+              </a:rPr>
+              <a:t>AI Agent</a:t>
+            </a:r>
+            <a:r>
+              <a:rPr lang="zh-CN" altLang="en-US" dirty="0">
+                <a:latin typeface="微软雅黑" panose="020B0503020204020204" pitchFamily="34" charset="-122"/>
+                <a:ea typeface="微软雅黑" panose="020B0503020204020204" pitchFamily="34" charset="-122"/>
+                <a:cs typeface="微软雅黑" panose="020B0503020204020204" pitchFamily="34" charset="-122"/>
+              </a:rPr>
+              <a:t>按需加载和调用。与传统的把所有规则写在一个提示词里不同，</a:t>
+            </a:r>
+            <a:r>
+              <a:rPr lang="en-US" altLang="zh-CN" dirty="0">
+                <a:latin typeface="微软雅黑" panose="020B0503020204020204" pitchFamily="34" charset="-122"/>
+                <a:ea typeface="微软雅黑" panose="020B0503020204020204" pitchFamily="34" charset="-122"/>
+                <a:cs typeface="微软雅黑" panose="020B0503020204020204" pitchFamily="34" charset="-122"/>
+              </a:rPr>
+              <a:t>Skill</a:t>
+            </a:r>
+            <a:r>
+              <a:rPr lang="zh-CN" altLang="en-US" dirty="0">
+                <a:latin typeface="微软雅黑" panose="020B0503020204020204" pitchFamily="34" charset="-122"/>
+                <a:ea typeface="微软雅黑" panose="020B0503020204020204" pitchFamily="34" charset="-122"/>
+                <a:cs typeface="微软雅黑" panose="020B0503020204020204" pitchFamily="34" charset="-122"/>
+              </a:rPr>
+              <a:t>将某类任务相关的指令、资源和工具封装成一个独立的单元。为了更好地理解</a:t>
+            </a:r>
+            <a:r>
+              <a:rPr lang="en-US" altLang="zh-CN" dirty="0">
+                <a:latin typeface="微软雅黑" panose="020B0503020204020204" pitchFamily="34" charset="-122"/>
+                <a:ea typeface="微软雅黑" panose="020B0503020204020204" pitchFamily="34" charset="-122"/>
+                <a:cs typeface="微软雅黑" panose="020B0503020204020204" pitchFamily="34" charset="-122"/>
+              </a:rPr>
+              <a:t>Skill</a:t>
+            </a:r>
+            <a:r>
+              <a:rPr lang="zh-CN" altLang="en-US" dirty="0">
+                <a:latin typeface="微软雅黑" panose="020B0503020204020204" pitchFamily="34" charset="-122"/>
+                <a:ea typeface="微软雅黑" panose="020B0503020204020204" pitchFamily="34" charset="-122"/>
+                <a:cs typeface="微软雅黑" panose="020B0503020204020204" pitchFamily="34" charset="-122"/>
+              </a:rPr>
+              <a:t>的独特性，可以将其与</a:t>
+            </a:r>
+            <a:r>
+              <a:rPr lang="en-US" altLang="zh-CN" dirty="0">
+                <a:latin typeface="微软雅黑" panose="020B0503020204020204" pitchFamily="34" charset="-122"/>
+                <a:ea typeface="微软雅黑" panose="020B0503020204020204" pitchFamily="34" charset="-122"/>
+                <a:cs typeface="微软雅黑" panose="020B0503020204020204" pitchFamily="34" charset="-122"/>
+              </a:rPr>
+              <a:t>Prompt</a:t>
+            </a:r>
+            <a:r>
+              <a:rPr lang="zh-CN" altLang="en-US" dirty="0">
+                <a:latin typeface="微软雅黑" panose="020B0503020204020204" pitchFamily="34" charset="-122"/>
+                <a:ea typeface="微软雅黑" panose="020B0503020204020204" pitchFamily="34" charset="-122"/>
+                <a:cs typeface="微软雅黑" panose="020B0503020204020204" pitchFamily="34" charset="-122"/>
+              </a:rPr>
+              <a:t>和</a:t>
+            </a:r>
+            <a:r>
+              <a:rPr lang="en-US" altLang="zh-CN" dirty="0">
+                <a:latin typeface="微软雅黑" panose="020B0503020204020204" pitchFamily="34" charset="-122"/>
+                <a:ea typeface="微软雅黑" panose="020B0503020204020204" pitchFamily="34" charset="-122"/>
+                <a:cs typeface="微软雅黑" panose="020B0503020204020204" pitchFamily="34" charset="-122"/>
+              </a:rPr>
+              <a:t>Tool</a:t>
+            </a:r>
+            <a:r>
+              <a:rPr lang="zh-CN" altLang="en-US" dirty="0">
+                <a:latin typeface="微软雅黑" panose="020B0503020204020204" pitchFamily="34" charset="-122"/>
+                <a:ea typeface="微软雅黑" panose="020B0503020204020204" pitchFamily="34" charset="-122"/>
+                <a:cs typeface="微软雅黑" panose="020B0503020204020204" pitchFamily="34" charset="-122"/>
+              </a:rPr>
+              <a:t>进行对比：</a:t>
+            </a:r>
+            <a:r>
+              <a:rPr lang="en-US" altLang="zh-CN" dirty="0">
+                <a:latin typeface="微软雅黑" panose="020B0503020204020204" pitchFamily="34" charset="-122"/>
+                <a:ea typeface="微软雅黑" panose="020B0503020204020204" pitchFamily="34" charset="-122"/>
+                <a:cs typeface="微软雅黑" panose="020B0503020204020204" pitchFamily="34" charset="-122"/>
+              </a:rPr>
+              <a:t>Prompt</a:t>
+            </a:r>
+            <a:r>
+              <a:rPr lang="zh-CN" altLang="en-US" dirty="0">
+                <a:latin typeface="微软雅黑" panose="020B0503020204020204" pitchFamily="34" charset="-122"/>
+                <a:ea typeface="微软雅黑" panose="020B0503020204020204" pitchFamily="34" charset="-122"/>
+                <a:cs typeface="微软雅黑" panose="020B0503020204020204" pitchFamily="34" charset="-122"/>
+              </a:rPr>
+              <a:t>是对单次推理的语言约束，面向模型输出，不可跨任务复用；</a:t>
+            </a:r>
+            <a:r>
+              <a:rPr lang="en-US" altLang="zh-CN" dirty="0">
+                <a:latin typeface="微软雅黑" panose="020B0503020204020204" pitchFamily="34" charset="-122"/>
+                <a:ea typeface="微软雅黑" panose="020B0503020204020204" pitchFamily="34" charset="-122"/>
+                <a:cs typeface="微软雅黑" panose="020B0503020204020204" pitchFamily="34" charset="-122"/>
+              </a:rPr>
+              <a:t>Tool</a:t>
+            </a:r>
+            <a:r>
+              <a:rPr lang="zh-CN" altLang="en-US" dirty="0">
+                <a:latin typeface="微软雅黑" panose="020B0503020204020204" pitchFamily="34" charset="-122"/>
+                <a:ea typeface="微软雅黑" panose="020B0503020204020204" pitchFamily="34" charset="-122"/>
+                <a:cs typeface="微软雅黑" panose="020B0503020204020204" pitchFamily="34" charset="-122"/>
+              </a:rPr>
+              <a:t>是对外部执行能力的调用接口，通常是函数、</a:t>
+            </a:r>
+            <a:r>
+              <a:rPr lang="en-US" altLang="zh-CN" dirty="0">
+                <a:latin typeface="微软雅黑" panose="020B0503020204020204" pitchFamily="34" charset="-122"/>
+                <a:ea typeface="微软雅黑" panose="020B0503020204020204" pitchFamily="34" charset="-122"/>
+                <a:cs typeface="微软雅黑" panose="020B0503020204020204" pitchFamily="34" charset="-122"/>
+              </a:rPr>
+              <a:t>API</a:t>
+            </a:r>
+            <a:r>
+              <a:rPr lang="zh-CN" altLang="en-US" dirty="0">
+                <a:latin typeface="微软雅黑" panose="020B0503020204020204" pitchFamily="34" charset="-122"/>
+                <a:ea typeface="微软雅黑" panose="020B0503020204020204" pitchFamily="34" charset="-122"/>
+                <a:cs typeface="微软雅黑" panose="020B0503020204020204" pitchFamily="34" charset="-122"/>
+              </a:rPr>
+              <a:t>或脚本，无内嵌规则；而</a:t>
+            </a:r>
+            <a:r>
+              <a:rPr lang="en-US" altLang="zh-CN" dirty="0">
+                <a:latin typeface="微软雅黑" panose="020B0503020204020204" pitchFamily="34" charset="-122"/>
+                <a:ea typeface="微软雅黑" panose="020B0503020204020204" pitchFamily="34" charset="-122"/>
+                <a:cs typeface="微软雅黑" panose="020B0503020204020204" pitchFamily="34" charset="-122"/>
+              </a:rPr>
+              <a:t>Skill</a:t>
+            </a:r>
+            <a:r>
+              <a:rPr lang="zh-CN" altLang="en-US" dirty="0">
+                <a:latin typeface="微软雅黑" panose="020B0503020204020204" pitchFamily="34" charset="-122"/>
+                <a:ea typeface="微软雅黑" panose="020B0503020204020204" pitchFamily="34" charset="-122"/>
+                <a:cs typeface="微软雅黑" panose="020B0503020204020204" pitchFamily="34" charset="-122"/>
+              </a:rPr>
+              <a:t>则是围绕某类任务沉淀的可复用能力单元，包含指令、资源、示例，可组合使用。</a:t>
+            </a:r>
+            <a:endParaRPr lang="zh-CN" altLang="en-US" dirty="0">
+              <a:latin typeface="微软雅黑" panose="020B0503020204020204" pitchFamily="34" charset="-122"/>
+              <a:ea typeface="微软雅黑" panose="020B0503020204020204" pitchFamily="34" charset="-122"/>
+              <a:cs typeface="微软雅黑" panose="020B0503020204020204" pitchFamily="34" charset="-122"/>
+            </a:endParaRPr>
+          </a:p>
+        </p:txBody>
+      </p:sp>
+      <p:sp>
+        <p:nvSpPr>
+          <p:cNvPr id="2" name="矩形 10"/>
+          <p:cNvSpPr/>
+          <p:nvPr/>
+        </p:nvSpPr>
+        <p:spPr>
+          <a:xfrm>
+            <a:off x="674370" y="1619885"/>
+            <a:ext cx="7019290" cy="4445635"/>
+          </a:xfrm>
+          <a:custGeom>
+            <a:avLst/>
+            <a:gdLst/>
+            <a:ahLst/>
+            <a:cxnLst/>
+            <a:rect l="l" t="t" r="r" b="b"/>
+            <a:pathLst>
+              <a:path w="1759038" h="1334706">
+                <a:moveTo>
+                  <a:pt x="65637" y="63758"/>
+                </a:moveTo>
+                <a:lnTo>
+                  <a:pt x="65637" y="1271391"/>
+                </a:lnTo>
+                <a:lnTo>
+                  <a:pt x="1711798" y="1271391"/>
+                </a:lnTo>
+                <a:lnTo>
+                  <a:pt x="1711798" y="63758"/>
+                </a:lnTo>
+                <a:close/>
+                <a:moveTo>
+                  <a:pt x="0" y="0"/>
+                </a:moveTo>
+                <a:lnTo>
+                  <a:pt x="1759038" y="0"/>
+                </a:lnTo>
+                <a:lnTo>
+                  <a:pt x="1759038" y="1334706"/>
+                </a:lnTo>
+                <a:lnTo>
+                  <a:pt x="0" y="1334706"/>
+                </a:lnTo>
+                <a:close/>
+              </a:path>
+            </a:pathLst>
+          </a:custGeom>
+          <a:solidFill>
+            <a:schemeClr val="accent2">
+              <a:lumMod val="75000"/>
+            </a:schemeClr>
+          </a:solidFill>
+          <a:ln>
+            <a:noFill/>
+          </a:ln>
+        </p:spPr>
+        <p:style>
+          <a:lnRef idx="2">
+            <a:schemeClr val="accent1">
+              <a:shade val="50000"/>
+            </a:schemeClr>
+          </a:lnRef>
+          <a:fillRef idx="1">
+            <a:schemeClr val="accent1"/>
+          </a:fillRef>
+          <a:effectRef idx="0">
+            <a:schemeClr val="accent1"/>
+          </a:effectRef>
+          <a:fontRef idx="minor">
+            <a:schemeClr val="lt1"/>
+          </a:fontRef>
+        </p:style>
+        <p:txBody>
+          <a:bodyPr rtlCol="0" anchor="t"/>
+          <a:lstStyle/>
+          <a:p>
+            <a:pPr>
+              <a:lnSpc>
+                <a:spcPct val="120000"/>
+              </a:lnSpc>
+            </a:pPr>
+            <a:endParaRPr lang="zh-CN" altLang="en-US">
+              <a:solidFill>
+                <a:srgbClr val="000000"/>
+              </a:solidFill>
+              <a:cs typeface="+mn-ea"/>
+              <a:sym typeface="+mn-lt"/>
+            </a:endParaRPr>
+          </a:p>
+        </p:txBody>
+      </p:sp>
+      <p:sp>
+        <p:nvSpPr>
+          <p:cNvPr id="9" name="矩形 8"/>
+          <p:cNvSpPr/>
+          <p:nvPr/>
+        </p:nvSpPr>
+        <p:spPr>
+          <a:xfrm>
+            <a:off x="8086725" y="2372361"/>
+            <a:ext cx="3798570" cy="2991484"/>
+          </a:xfrm>
+          <a:prstGeom prst="rect">
+            <a:avLst/>
+          </a:prstGeom>
+          <a:noFill/>
+        </p:spPr>
+        <p:style>
+          <a:lnRef idx="2">
+            <a:schemeClr val="accent1">
+              <a:shade val="50000"/>
+            </a:schemeClr>
+          </a:lnRef>
+          <a:fillRef idx="1">
+            <a:schemeClr val="accent1"/>
+          </a:fillRef>
+          <a:effectRef idx="0">
+            <a:schemeClr val="accent1"/>
+          </a:effectRef>
+          <a:fontRef idx="minor">
+            <a:schemeClr val="lt1"/>
+          </a:fontRef>
+        </p:style>
+        <p:txBody>
+          <a:bodyPr rtlCol="0" anchor="ctr"/>
+          <a:lstStyle/>
+          <a:p>
+            <a:pPr algn="ctr"/>
+            <a:r>
+              <a:rPr lang="zh-CN" altLang="en-US" dirty="0" smtClean="0">
+                <a:solidFill>
+                  <a:schemeClr val="tx1"/>
+                </a:solidFill>
+              </a:rPr>
+              <a:t>教材对应知识的图片</a:t>
+            </a:r>
+            <a:endParaRPr lang="zh-CN" altLang="en-US" dirty="0">
+              <a:solidFill>
+                <a:schemeClr val="tx1"/>
+              </a:solidFill>
+            </a:endParaRPr>
+          </a:p>
+        </p:txBody>
+      </p:sp>
+      <p:sp>
+        <p:nvSpPr>
+          <p:cNvPr id="3" name="文本框 2"/>
+          <p:cNvSpPr txBox="1"/>
+          <p:nvPr/>
+        </p:nvSpPr>
+        <p:spPr>
+          <a:xfrm>
+            <a:off x="0" y="793750"/>
+            <a:ext cx="1351262" cy="583565"/>
+          </a:xfrm>
+          <a:prstGeom prst="rect">
+            <a:avLst/>
+          </a:prstGeom>
+          <a:noFill/>
+        </p:spPr>
+        <p:txBody>
+          <a:bodyPr wrap="square" rtlCol="0">
+            <a:spAutoFit/>
+            <a:scene3d>
+              <a:camera prst="orthographicFront"/>
+              <a:lightRig rig="threePt" dir="t"/>
+            </a:scene3d>
+            <a:sp3d contourW="12700"/>
+          </a:bodyPr>
+          <a:lstStyle/>
+          <a:p>
+            <a:pPr algn="ctr"/>
+            <a:r>
+              <a:rPr lang="en-US" sz="3200" dirty="0" smtClean="0">
+                <a:solidFill>
+                  <a:srgbClr val="3F396C"/>
+                </a:solidFill>
+                <a:latin typeface="思源宋体" panose="02020700000000000000" charset="-122"/>
+                <a:ea typeface="思源宋体" panose="02020700000000000000" charset="-122"/>
+              </a:rPr>
+              <a:t>03</a:t>
+            </a:r>
+            <a:endParaRPr lang="en-US" sz="3200" dirty="0" smtClean="0">
+              <a:solidFill>
+                <a:srgbClr val="3F396C"/>
+              </a:solidFill>
+              <a:latin typeface="思源宋体" panose="02020700000000000000" charset="-122"/>
+              <a:ea typeface="思源宋体" panose="02020700000000000000" charset="-122"/>
+            </a:endParaRPr>
+          </a:p>
+        </p:txBody>
+      </p:sp>
+      <p:sp>
+        <p:nvSpPr>
+          <p:cNvPr id="17" name="文本框 16"/>
+          <p:cNvSpPr txBox="1"/>
+          <p:nvPr/>
+        </p:nvSpPr>
+        <p:spPr>
+          <a:xfrm>
+            <a:off x="1278000" y="792000"/>
+            <a:ext cx="3932555" cy="583565"/>
+          </a:xfrm>
+          <a:prstGeom prst="rect">
+            <a:avLst/>
+          </a:prstGeom>
+          <a:noFill/>
+        </p:spPr>
+        <p:txBody>
+          <a:bodyPr wrap="square" rtlCol="0">
+            <a:spAutoFit/>
+            <a:scene3d>
+              <a:camera prst="orthographicFront"/>
+              <a:lightRig rig="threePt" dir="t"/>
+            </a:scene3d>
+            <a:sp3d contourW="12700"/>
+          </a:bodyPr>
+          <a:lstStyle>
+            <a:defPPr>
+              <a:defRPr lang="en-US"/>
+            </a:defPPr>
+            <a:lvl1pPr algn="ctr">
+              <a:defRPr sz="3200">
+                <a:gradFill>
+                  <a:gsLst>
+                    <a:gs pos="0">
+                      <a:schemeClr val="tx1">
+                        <a:lumMod val="50000"/>
+                        <a:lumOff val="50000"/>
+                      </a:schemeClr>
+                    </a:gs>
+                    <a:gs pos="100000">
+                      <a:schemeClr val="tx1">
+                        <a:lumMod val="85000"/>
+                        <a:lumOff val="15000"/>
+                      </a:schemeClr>
+                    </a:gs>
+                  </a:gsLst>
+                  <a:lin ang="5400000" scaled="1"/>
+                </a:gradFill>
+              </a:defRPr>
+            </a:lvl1pPr>
+          </a:lstStyle>
+          <a:p>
+            <a:pPr marL="0" marR="0" lvl="0" indent="0" algn="l" defTabSz="914400" rtl="0" eaLnBrk="1" fontAlgn="auto" latinLnBrk="0" hangingPunct="1">
+              <a:lnSpc>
+                <a:spcPct val="100000"/>
+              </a:lnSpc>
+              <a:spcBef>
+                <a:spcPts val="0"/>
+              </a:spcBef>
+              <a:spcAft>
+                <a:spcPts val="0"/>
+              </a:spcAft>
+              <a:buClrTx/>
+              <a:buSzTx/>
+              <a:buFontTx/>
+              <a:buNone/>
+              <a:defRPr/>
+            </a:pPr>
+            <a:r>
+              <a:rPr lang="zh-CN" altLang="en-US" b="1" dirty="0">
+                <a:solidFill>
+                  <a:schemeClr val="accent1">
+                    <a:lumMod val="75000"/>
+                  </a:schemeClr>
+                </a:solidFill>
+                <a:latin typeface="微软雅黑" panose="020B0503020204020204" pitchFamily="34" charset="-122"/>
+                <a:ea typeface="微软雅黑" panose="020B0503020204020204" pitchFamily="34" charset="-122"/>
+                <a:cs typeface="微软雅黑" panose="020B0503020204020204" pitchFamily="34" charset="-122"/>
+                <a:sym typeface="+mn-lt"/>
+              </a:rPr>
+              <a:t>知识储备</a:t>
+            </a:r>
+            <a:endParaRPr lang="en-US" altLang="zh-CN" b="1" dirty="0">
               <a:solidFill>
                 <a:schemeClr val="accent1">
                   <a:lumMod val="75000"/>
@@ -19724,7 +16137,7 @@
                 <a:cs typeface="微软雅黑" panose="020B0503020204020204" pitchFamily="34" charset="-122"/>
                 <a:sym typeface="+mn-ea"/>
               </a:rPr>
-              <a:t>大语言模型的核心工作原理可以概括为</a:t>
+              <a:t>从软件工程角度看，</a:t>
             </a:r>
             <a:r>
               <a:rPr lang="en-US" altLang="zh-CN" dirty="0">
@@ -19733,7 +16146,7 @@
                 <a:cs typeface="微软雅黑" panose="020B0503020204020204" pitchFamily="34" charset="-122"/>
                 <a:sym typeface="+mn-ea"/>
               </a:rPr>
-              <a:t>“</a:t>
+              <a:t>Skill</a:t>
             </a:r>
             <a:r>
               <a:rPr lang="zh-CN" altLang="en-US" dirty="0">
@@ -19742,7 +16155,7 @@
                 <a:cs typeface="微软雅黑" panose="020B0503020204020204" pitchFamily="34" charset="-122"/>
                 <a:sym typeface="+mn-ea"/>
               </a:rPr>
-              <a:t>基于上下文的概率预测</a:t>
+              <a:t>对应了关注点分离与高内聚低耦合的设计原则。模块化的设计让每项能力边界清晰，便于独立开发、测试和版本管理。同一个</a:t>
             </a:r>
             <a:r>
               <a:rPr lang="en-US" altLang="zh-CN" dirty="0">
@@ -19751,7 +16164,7 @@
                 <a:cs typeface="微软雅黑" panose="020B0503020204020204" pitchFamily="34" charset="-122"/>
                 <a:sym typeface="+mn-ea"/>
               </a:rPr>
-              <a:t>”</a:t>
+              <a:t>Skill</a:t>
             </a:r>
             <a:r>
               <a:rPr lang="zh-CN" altLang="en-US" dirty="0">
@@ -19760,7 +16173,7 @@
                 <a:cs typeface="微软雅黑" panose="020B0503020204020204" pitchFamily="34" charset="-122"/>
                 <a:sym typeface="+mn-ea"/>
               </a:rPr>
-              <a:t>。当我们输入一句提示词时，模型首先将整段上下文（包括用户输入和已生成的内容）编码为内部向量表示，这种向量是模型对语言结构和语义的数学化理解。接着，模型会利用训练阶段从海量文本中学到的模式，计算下一个可能出现的</a:t>
+              <a:t>可以在多个</a:t>
             </a:r>
             <a:r>
               <a:rPr lang="en-US" altLang="zh-CN" dirty="0">
@@ -19769,7 +16182,7 @@
                 <a:cs typeface="微软雅黑" panose="020B0503020204020204" pitchFamily="34" charset="-122"/>
                 <a:sym typeface="+mn-ea"/>
               </a:rPr>
-              <a:t>Token</a:t>
+              <a:t>Agent</a:t>
             </a:r>
             <a:r>
               <a:rPr lang="zh-CN" altLang="en-US" dirty="0">
@@ -19778,7 +16191,7 @@
                 <a:cs typeface="微软雅黑" panose="020B0503020204020204" pitchFamily="34" charset="-122"/>
                 <a:sym typeface="+mn-ea"/>
               </a:rPr>
-              <a:t>（即最小的语言单元，如一个词或子词）的概率分布。例如，在输入</a:t>
+              <a:t>或流程中被按需复用加载，这样既能避免重复劳动，又能减少常驻上下文占用。多个</a:t>
             </a:r>
             <a:r>
               <a:rPr lang="en-US" altLang="zh-CN" dirty="0">
@@ -19787,7 +16200,7 @@
                 <a:cs typeface="微软雅黑" panose="020B0503020204020204" pitchFamily="34" charset="-122"/>
                 <a:sym typeface="+mn-ea"/>
               </a:rPr>
-              <a:t>“</a:t>
+              <a:t>Skill</a:t>
             </a:r>
             <a:r>
               <a:rPr lang="zh-CN" altLang="en-US" dirty="0">
@@ -19796,7 +16209,7 @@
                 <a:cs typeface="微软雅黑" panose="020B0503020204020204" pitchFamily="34" charset="-122"/>
                 <a:sym typeface="+mn-ea"/>
               </a:rPr>
-              <a:t>今天天气很</a:t>
+              <a:t>还可以像积木一样组合，形成更复杂的能力，从而提升整个</a:t>
             </a:r>
             <a:r>
               <a:rPr lang="en-US" altLang="zh-CN" dirty="0">
@@ -19805,7 +16218,7 @@
                 <a:cs typeface="微软雅黑" panose="020B0503020204020204" pitchFamily="34" charset="-122"/>
                 <a:sym typeface="+mn-ea"/>
               </a:rPr>
-              <a:t>”</a:t>
+              <a:t>Agent</a:t>
             </a:r>
             <a:r>
               <a:rPr lang="zh-CN" altLang="en-US" dirty="0">
@@ -19814,7 +16227,7 @@
                 <a:cs typeface="微软雅黑" panose="020B0503020204020204" pitchFamily="34" charset="-122"/>
                 <a:sym typeface="+mn-ea"/>
               </a:rPr>
-              <a:t>之后，模型会为</a:t>
+              <a:t>系统的灵活性和可维护性。这种设计思路使得</a:t>
             </a:r>
             <a:r>
               <a:rPr lang="en-US" altLang="zh-CN" dirty="0">
@@ -19823,7 +16236,7 @@
                 <a:cs typeface="微软雅黑" panose="020B0503020204020204" pitchFamily="34" charset="-122"/>
                 <a:sym typeface="+mn-ea"/>
               </a:rPr>
-              <a:t>“</a:t>
+              <a:t>Skill</a:t>
             </a:r>
             <a:r>
               <a:rPr lang="zh-CN" altLang="en-US" dirty="0">
@@ -19832,7 +16245,7 @@
                 <a:cs typeface="微软雅黑" panose="020B0503020204020204" pitchFamily="34" charset="-122"/>
                 <a:sym typeface="+mn-ea"/>
               </a:rPr>
-              <a:t>好</a:t>
+              <a:t>成为构建高效、可扩展</a:t>
             </a:r>
             <a:r>
               <a:rPr lang="en-US" altLang="zh-CN" dirty="0">
@@ -19841,7 +16254,7 @@
                 <a:cs typeface="微软雅黑" panose="020B0503020204020204" pitchFamily="34" charset="-122"/>
                 <a:sym typeface="+mn-ea"/>
               </a:rPr>
-              <a:t>”“</a:t>
+              <a:t>AI Agent</a:t>
             </a:r>
             <a:r>
               <a:rPr lang="zh-CN" altLang="en-US" dirty="0">
@@ -19850,61 +16263,7 @@
                 <a:cs typeface="微软雅黑" panose="020B0503020204020204" pitchFamily="34" charset="-122"/>
                 <a:sym typeface="+mn-ea"/>
               </a:rPr>
-              <a:t>冷</a:t>
-            </a:r>
-            <a:r>
-              <a:rPr lang="en-US" altLang="zh-CN" dirty="0">
-                <a:latin typeface="微软雅黑" panose="020B0503020204020204" pitchFamily="34" charset="-122"/>
-                <a:ea typeface="微软雅黑" panose="020B0503020204020204" pitchFamily="34" charset="-122"/>
-                <a:cs typeface="微软雅黑" panose="020B0503020204020204" pitchFamily="34" charset="-122"/>
-                <a:sym typeface="+mn-ea"/>
-              </a:rPr>
-              <a:t>”“</a:t>
-            </a:r>
-            <a:r>
-              <a:rPr lang="zh-CN" altLang="en-US" dirty="0">
-                <a:latin typeface="微软雅黑" panose="020B0503020204020204" pitchFamily="34" charset="-122"/>
-                <a:ea typeface="微软雅黑" panose="020B0503020204020204" pitchFamily="34" charset="-122"/>
-                <a:cs typeface="微软雅黑" panose="020B0503020204020204" pitchFamily="34" charset="-122"/>
-                <a:sym typeface="+mn-ea"/>
-              </a:rPr>
-              <a:t>热</a:t>
-            </a:r>
-            <a:r>
-              <a:rPr lang="en-US" altLang="zh-CN" dirty="0">
-                <a:latin typeface="微软雅黑" panose="020B0503020204020204" pitchFamily="34" charset="-122"/>
-                <a:ea typeface="微软雅黑" panose="020B0503020204020204" pitchFamily="34" charset="-122"/>
-                <a:cs typeface="微软雅黑" panose="020B0503020204020204" pitchFamily="34" charset="-122"/>
-                <a:sym typeface="+mn-ea"/>
-              </a:rPr>
-              <a:t>”“</a:t>
-            </a:r>
-            <a:r>
-              <a:rPr lang="zh-CN" altLang="en-US" dirty="0">
-                <a:latin typeface="微软雅黑" panose="020B0503020204020204" pitchFamily="34" charset="-122"/>
-                <a:ea typeface="微软雅黑" panose="020B0503020204020204" pitchFamily="34" charset="-122"/>
-                <a:cs typeface="微软雅黑" panose="020B0503020204020204" pitchFamily="34" charset="-122"/>
-                <a:sym typeface="+mn-ea"/>
-              </a:rPr>
-              <a:t>不错</a:t>
-            </a:r>
-            <a:r>
-              <a:rPr lang="en-US" altLang="zh-CN" dirty="0">
-                <a:latin typeface="微软雅黑" panose="020B0503020204020204" pitchFamily="34" charset="-122"/>
-                <a:ea typeface="微软雅黑" panose="020B0503020204020204" pitchFamily="34" charset="-122"/>
-                <a:cs typeface="微软雅黑" panose="020B0503020204020204" pitchFamily="34" charset="-122"/>
-                <a:sym typeface="+mn-ea"/>
-              </a:rPr>
-              <a:t>”</a:t>
-            </a:r>
-            <a:r>
-              <a:rPr lang="zh-CN" altLang="en-US" dirty="0">
-                <a:latin typeface="微软雅黑" panose="020B0503020204020204" pitchFamily="34" charset="-122"/>
-                <a:ea typeface="微软雅黑" panose="020B0503020204020204" pitchFamily="34" charset="-122"/>
-                <a:cs typeface="微软雅黑" panose="020B0503020204020204" pitchFamily="34" charset="-122"/>
-                <a:sym typeface="+mn-ea"/>
-              </a:rPr>
-              <a:t>等候选词分配不同的概率值，概率最高的词最有可能被选中输出。最终输出的具体内容，取决于上下文、模型参数以及采样方式（如随机采样或贪心采样）的综合作用。</a:t>
+              <a:t>系统的关键组件。</a:t>
             </a:r>
             <a:endParaRPr lang="zh-CN" altLang="en-US" dirty="0">
               <a:latin typeface="微软雅黑" panose="020B0503020204020204" pitchFamily="34" charset="-122"/>
@@ -20932,9 +17291,171 @@
                 <a:cs typeface="微软雅黑" panose="020B0503020204020204" pitchFamily="34" charset="-122"/>
                 <a:sym typeface="+mn-ea"/>
               </a:rPr>
-              <a:t>这一机制意味着模型的输出并非从零开始创造答案，而是基于上文判断下文概率最高的延续。因此，提示词的清晰度直接影响模型的输出稳定性。如果提示词模糊或信息不足，模型会在更多可能性之间摇摆，导致输出结果不稳定、偏离预期；反之，如果提示词明确具体，概率空间就会被有效压缩，模型更容易落在期望答案附近。理解这一原理，是掌握提示词工程的基础，也是优化与模型交互效果的关键所在。</a:t>
-            </a:r>
-            <a:endParaRPr lang="zh-CN" dirty="0">
+              <a:t>根据</a:t>
+            </a:r>
+            <a:r>
+              <a:rPr lang="en-US" altLang="zh-CN" dirty="0">
+                <a:latin typeface="微软雅黑" panose="020B0503020204020204" pitchFamily="34" charset="-122"/>
+                <a:ea typeface="微软雅黑" panose="020B0503020204020204" pitchFamily="34" charset="-122"/>
+                <a:cs typeface="微软雅黑" panose="020B0503020204020204" pitchFamily="34" charset="-122"/>
+                <a:sym typeface="+mn-ea"/>
+              </a:rPr>
+              <a:t>2026</a:t>
+            </a:r>
+            <a:r>
+              <a:rPr lang="zh-CN" altLang="en-US" dirty="0">
+                <a:latin typeface="微软雅黑" panose="020B0503020204020204" pitchFamily="34" charset="-122"/>
+                <a:ea typeface="微软雅黑" panose="020B0503020204020204" pitchFamily="34" charset="-122"/>
+                <a:cs typeface="微软雅黑" panose="020B0503020204020204" pitchFamily="34" charset="-122"/>
+                <a:sym typeface="+mn-ea"/>
+              </a:rPr>
+              <a:t>年的工程最佳实践，一个规范的</a:t>
+            </a:r>
+            <a:r>
+              <a:rPr lang="en-US" altLang="zh-CN" dirty="0">
+                <a:latin typeface="微软雅黑" panose="020B0503020204020204" pitchFamily="34" charset="-122"/>
+                <a:ea typeface="微软雅黑" panose="020B0503020204020204" pitchFamily="34" charset="-122"/>
+                <a:cs typeface="微软雅黑" panose="020B0503020204020204" pitchFamily="34" charset="-122"/>
+                <a:sym typeface="+mn-ea"/>
+              </a:rPr>
+              <a:t>Skill</a:t>
+            </a:r>
+            <a:r>
+              <a:rPr lang="zh-CN" altLang="en-US" dirty="0">
+                <a:latin typeface="微软雅黑" panose="020B0503020204020204" pitchFamily="34" charset="-122"/>
+                <a:ea typeface="微软雅黑" panose="020B0503020204020204" pitchFamily="34" charset="-122"/>
+                <a:cs typeface="微软雅黑" panose="020B0503020204020204" pitchFamily="34" charset="-122"/>
+                <a:sym typeface="+mn-ea"/>
+              </a:rPr>
+              <a:t>通常包含三层结构：元数据层、指令层和资源层。元数据层包括</a:t>
+            </a:r>
+            <a:r>
+              <a:rPr lang="en-US" altLang="zh-CN" dirty="0">
+                <a:latin typeface="微软雅黑" panose="020B0503020204020204" pitchFamily="34" charset="-122"/>
+                <a:ea typeface="微软雅黑" panose="020B0503020204020204" pitchFamily="34" charset="-122"/>
+                <a:cs typeface="微软雅黑" panose="020B0503020204020204" pitchFamily="34" charset="-122"/>
+                <a:sym typeface="+mn-ea"/>
+              </a:rPr>
+              <a:t>Skill</a:t>
+            </a:r>
+            <a:r>
+              <a:rPr lang="zh-CN" altLang="en-US" dirty="0">
+                <a:latin typeface="微软雅黑" panose="020B0503020204020204" pitchFamily="34" charset="-122"/>
+                <a:ea typeface="微软雅黑" panose="020B0503020204020204" pitchFamily="34" charset="-122"/>
+                <a:cs typeface="微软雅黑" panose="020B0503020204020204" pitchFamily="34" charset="-122"/>
+                <a:sym typeface="+mn-ea"/>
+              </a:rPr>
+              <a:t>名称、简要描述、适用场景、版本号等信息，其作用是帮助</a:t>
+            </a:r>
+            <a:r>
+              <a:rPr lang="en-US" altLang="zh-CN" dirty="0">
+                <a:latin typeface="微软雅黑" panose="020B0503020204020204" pitchFamily="34" charset="-122"/>
+                <a:ea typeface="微软雅黑" panose="020B0503020204020204" pitchFamily="34" charset="-122"/>
+                <a:cs typeface="微软雅黑" panose="020B0503020204020204" pitchFamily="34" charset="-122"/>
+                <a:sym typeface="+mn-ea"/>
+              </a:rPr>
+              <a:t>Agent</a:t>
+            </a:r>
+            <a:r>
+              <a:rPr lang="zh-CN" altLang="en-US" dirty="0">
+                <a:latin typeface="微软雅黑" panose="020B0503020204020204" pitchFamily="34" charset="-122"/>
+                <a:ea typeface="微软雅黑" panose="020B0503020204020204" pitchFamily="34" charset="-122"/>
+                <a:cs typeface="微软雅黑" panose="020B0503020204020204" pitchFamily="34" charset="-122"/>
+                <a:sym typeface="+mn-ea"/>
+              </a:rPr>
+              <a:t>发现并选择哪个</a:t>
+            </a:r>
+            <a:r>
+              <a:rPr lang="en-US" altLang="zh-CN" dirty="0">
+                <a:latin typeface="微软雅黑" panose="020B0503020204020204" pitchFamily="34" charset="-122"/>
+                <a:ea typeface="微软雅黑" panose="020B0503020204020204" pitchFamily="34" charset="-122"/>
+                <a:cs typeface="微软雅黑" panose="020B0503020204020204" pitchFamily="34" charset="-122"/>
+                <a:sym typeface="+mn-ea"/>
+              </a:rPr>
+              <a:t>Skill</a:t>
+            </a:r>
+            <a:r>
+              <a:rPr lang="zh-CN" altLang="en-US" dirty="0">
+                <a:latin typeface="微软雅黑" panose="020B0503020204020204" pitchFamily="34" charset="-122"/>
+                <a:ea typeface="微软雅黑" panose="020B0503020204020204" pitchFamily="34" charset="-122"/>
+                <a:cs typeface="微软雅黑" panose="020B0503020204020204" pitchFamily="34" charset="-122"/>
+                <a:sym typeface="+mn-ea"/>
+              </a:rPr>
+              <a:t>适合当前任务。指令层包含详细的执行规则、约束条件、步骤分解、输出格式要求等，在</a:t>
+            </a:r>
+            <a:r>
+              <a:rPr lang="en-US" altLang="zh-CN" dirty="0">
+                <a:latin typeface="微软雅黑" panose="020B0503020204020204" pitchFamily="34" charset="-122"/>
+                <a:ea typeface="微软雅黑" panose="020B0503020204020204" pitchFamily="34" charset="-122"/>
+                <a:cs typeface="微软雅黑" panose="020B0503020204020204" pitchFamily="34" charset="-122"/>
+                <a:sym typeface="+mn-ea"/>
+              </a:rPr>
+              <a:t>Skill</a:t>
+            </a:r>
+            <a:r>
+              <a:rPr lang="zh-CN" altLang="en-US" dirty="0">
+                <a:latin typeface="微软雅黑" panose="020B0503020204020204" pitchFamily="34" charset="-122"/>
+                <a:ea typeface="微软雅黑" panose="020B0503020204020204" pitchFamily="34" charset="-122"/>
+                <a:cs typeface="微软雅黑" panose="020B0503020204020204" pitchFamily="34" charset="-122"/>
+                <a:sym typeface="+mn-ea"/>
+              </a:rPr>
+              <a:t>激活时加载到上下文中，用于指导模型的行为。资源层则提供具体的数据、工具函数、</a:t>
+            </a:r>
+            <a:r>
+              <a:rPr lang="en-US" altLang="zh-CN" dirty="0">
+                <a:latin typeface="微软雅黑" panose="020B0503020204020204" pitchFamily="34" charset="-122"/>
+                <a:ea typeface="微软雅黑" panose="020B0503020204020204" pitchFamily="34" charset="-122"/>
+                <a:cs typeface="微软雅黑" panose="020B0503020204020204" pitchFamily="34" charset="-122"/>
+                <a:sym typeface="+mn-ea"/>
+              </a:rPr>
+              <a:t>Few-shot</a:t>
+            </a:r>
+            <a:r>
+              <a:rPr lang="zh-CN" altLang="en-US" dirty="0">
+                <a:latin typeface="微软雅黑" panose="020B0503020204020204" pitchFamily="34" charset="-122"/>
+                <a:ea typeface="微软雅黑" panose="020B0503020204020204" pitchFamily="34" charset="-122"/>
+                <a:cs typeface="微软雅黑" panose="020B0503020204020204" pitchFamily="34" charset="-122"/>
+                <a:sym typeface="+mn-ea"/>
+              </a:rPr>
+              <a:t>示例、模板、</a:t>
+            </a:r>
+            <a:r>
+              <a:rPr lang="en-US" altLang="zh-CN" dirty="0">
+                <a:latin typeface="微软雅黑" panose="020B0503020204020204" pitchFamily="34" charset="-122"/>
+                <a:ea typeface="微软雅黑" panose="020B0503020204020204" pitchFamily="34" charset="-122"/>
+                <a:cs typeface="微软雅黑" panose="020B0503020204020204" pitchFamily="34" charset="-122"/>
+                <a:sym typeface="+mn-ea"/>
+              </a:rPr>
+              <a:t>API</a:t>
+            </a:r>
+            <a:r>
+              <a:rPr lang="zh-CN" altLang="en-US" dirty="0">
+                <a:latin typeface="微软雅黑" panose="020B0503020204020204" pitchFamily="34" charset="-122"/>
+                <a:ea typeface="微软雅黑" panose="020B0503020204020204" pitchFamily="34" charset="-122"/>
+                <a:cs typeface="微软雅黑" panose="020B0503020204020204" pitchFamily="34" charset="-122"/>
+                <a:sym typeface="+mn-ea"/>
+              </a:rPr>
+              <a:t>密钥等，在</a:t>
+            </a:r>
+            <a:r>
+              <a:rPr lang="en-US" altLang="zh-CN" dirty="0">
+                <a:latin typeface="微软雅黑" panose="020B0503020204020204" pitchFamily="34" charset="-122"/>
+                <a:ea typeface="微软雅黑" panose="020B0503020204020204" pitchFamily="34" charset="-122"/>
+                <a:cs typeface="微软雅黑" panose="020B0503020204020204" pitchFamily="34" charset="-122"/>
+                <a:sym typeface="+mn-ea"/>
+              </a:rPr>
+              <a:t>Skill</a:t>
+            </a:r>
+            <a:r>
+              <a:rPr lang="zh-CN" altLang="en-US" dirty="0">
+                <a:latin typeface="微软雅黑" panose="020B0503020204020204" pitchFamily="34" charset="-122"/>
+                <a:ea typeface="微软雅黑" panose="020B0503020204020204" pitchFamily="34" charset="-122"/>
+                <a:cs typeface="微软雅黑" panose="020B0503020204020204" pitchFamily="34" charset="-122"/>
+                <a:sym typeface="+mn-ea"/>
+              </a:rPr>
+              <a:t>执行时被调用，为实际运行提供所需的素材。</a:t>
+            </a:r>
+            <a:endParaRPr lang="zh-CN" altLang="en-US" dirty="0">
               <a:latin typeface="微软雅黑" panose="020B0503020204020204" pitchFamily="34" charset="-122"/>
               <a:ea typeface="微软雅黑" panose="020B0503020204020204" pitchFamily="34" charset="-122"/>
               <a:cs typeface="微软雅黑" panose="020B0503020204020204" pitchFamily="34" charset="-122"/>
@@ -21242,7 +17763,7 @@
                 <a:cs typeface="微软雅黑" panose="020B0503020204020204" pitchFamily="34" charset="-122"/>
                 <a:sym typeface="+mn-ea"/>
               </a:rPr>
-              <a:t>基于预测机制的原理，提示词工程的核心目标之一就是通过清晰的上下文和明确的约束，将模型的概率分布</a:t>
+              <a:t>这一三层架构的设计思想是分层解耦：元数据用于发现，指令用于行为约束，资源用于实际执行。三层各有侧重，便于独立演进。例如，当业务规则发生变化时，只需修改指令层的内容，而无需改动元数据和资源层；同样，当需要更新数据源或工具时，也只需调整资源层。这种分层设计使得</a:t>
             </a:r>
             <a:r>
               <a:rPr lang="en-US" altLang="zh-CN" dirty="0">
@@ -21251,7 +17772,7 @@
                 <a:cs typeface="微软雅黑" panose="020B0503020204020204" pitchFamily="34" charset="-122"/>
                 <a:sym typeface="+mn-ea"/>
               </a:rPr>
-              <a:t>“</a:t>
+              <a:t>Skill</a:t>
             </a:r>
             <a:r>
               <a:rPr lang="zh-CN" altLang="en-US" dirty="0">
@@ -21260,331 +17781,7 @@
                 <a:cs typeface="微软雅黑" panose="020B0503020204020204" pitchFamily="34" charset="-122"/>
                 <a:sym typeface="+mn-ea"/>
               </a:rPr>
-              <a:t>收紧</a:t>
-            </a:r>
-            <a:r>
-              <a:rPr lang="en-US" altLang="zh-CN" dirty="0">
-                <a:latin typeface="微软雅黑" panose="020B0503020204020204" pitchFamily="34" charset="-122"/>
-                <a:ea typeface="微软雅黑" panose="020B0503020204020204" pitchFamily="34" charset="-122"/>
-                <a:cs typeface="微软雅黑" panose="020B0503020204020204" pitchFamily="34" charset="-122"/>
-                <a:sym typeface="+mn-ea"/>
-              </a:rPr>
-              <a:t>”</a:t>
-            </a:r>
-            <a:r>
-              <a:rPr lang="zh-CN" altLang="en-US" dirty="0">
-                <a:latin typeface="微软雅黑" panose="020B0503020204020204" pitchFamily="34" charset="-122"/>
-                <a:ea typeface="微软雅黑" panose="020B0503020204020204" pitchFamily="34" charset="-122"/>
-                <a:cs typeface="微软雅黑" panose="020B0503020204020204" pitchFamily="34" charset="-122"/>
-                <a:sym typeface="+mn-ea"/>
-              </a:rPr>
-              <a:t>到更可控的区域。许多初学者误以为只要把任务说清楚就够了，但在大模型场景中，</a:t>
-            </a:r>
-            <a:r>
-              <a:rPr lang="en-US" altLang="zh-CN" dirty="0">
-                <a:latin typeface="微软雅黑" panose="020B0503020204020204" pitchFamily="34" charset="-122"/>
-                <a:ea typeface="微软雅黑" panose="020B0503020204020204" pitchFamily="34" charset="-122"/>
-                <a:cs typeface="微软雅黑" panose="020B0503020204020204" pitchFamily="34" charset="-122"/>
-                <a:sym typeface="+mn-ea"/>
-              </a:rPr>
-              <a:t>“</a:t>
-            </a:r>
-            <a:r>
-              <a:rPr lang="zh-CN" altLang="en-US" dirty="0">
-                <a:latin typeface="微软雅黑" panose="020B0503020204020204" pitchFamily="34" charset="-122"/>
-                <a:ea typeface="微软雅黑" panose="020B0503020204020204" pitchFamily="34" charset="-122"/>
-                <a:cs typeface="微软雅黑" panose="020B0503020204020204" pitchFamily="34" charset="-122"/>
-                <a:sym typeface="+mn-ea"/>
-              </a:rPr>
-              <a:t>说什么</a:t>
-            </a:r>
-            <a:r>
-              <a:rPr lang="en-US" altLang="zh-CN" dirty="0">
-                <a:latin typeface="微软雅黑" panose="020B0503020204020204" pitchFamily="34" charset="-122"/>
-                <a:ea typeface="微软雅黑" panose="020B0503020204020204" pitchFamily="34" charset="-122"/>
-                <a:cs typeface="微软雅黑" panose="020B0503020204020204" pitchFamily="34" charset="-122"/>
-                <a:sym typeface="+mn-ea"/>
-              </a:rPr>
-              <a:t>”</a:t>
-            </a:r>
-            <a:r>
-              <a:rPr lang="zh-CN" altLang="en-US" dirty="0">
-                <a:latin typeface="微软雅黑" panose="020B0503020204020204" pitchFamily="34" charset="-122"/>
-                <a:ea typeface="微软雅黑" panose="020B0503020204020204" pitchFamily="34" charset="-122"/>
-                <a:cs typeface="微软雅黑" panose="020B0503020204020204" pitchFamily="34" charset="-122"/>
-                <a:sym typeface="+mn-ea"/>
-              </a:rPr>
-              <a:t>只是目标层，而</a:t>
-            </a:r>
-            <a:r>
-              <a:rPr lang="en-US" altLang="zh-CN" dirty="0">
-                <a:latin typeface="微软雅黑" panose="020B0503020204020204" pitchFamily="34" charset="-122"/>
-                <a:ea typeface="微软雅黑" panose="020B0503020204020204" pitchFamily="34" charset="-122"/>
-                <a:cs typeface="微软雅黑" panose="020B0503020204020204" pitchFamily="34" charset="-122"/>
-                <a:sym typeface="+mn-ea"/>
-              </a:rPr>
-              <a:t>“</a:t>
-            </a:r>
-            <a:r>
-              <a:rPr lang="zh-CN" altLang="en-US" dirty="0">
-                <a:latin typeface="微软雅黑" panose="020B0503020204020204" pitchFamily="34" charset="-122"/>
-                <a:ea typeface="微软雅黑" panose="020B0503020204020204" pitchFamily="34" charset="-122"/>
-                <a:cs typeface="微软雅黑" panose="020B0503020204020204" pitchFamily="34" charset="-122"/>
-                <a:sym typeface="+mn-ea"/>
-              </a:rPr>
-              <a:t>怎么说</a:t>
-            </a:r>
-            <a:r>
-              <a:rPr lang="en-US" altLang="zh-CN" dirty="0">
-                <a:latin typeface="微软雅黑" panose="020B0503020204020204" pitchFamily="34" charset="-122"/>
-                <a:ea typeface="微软雅黑" panose="020B0503020204020204" pitchFamily="34" charset="-122"/>
-                <a:cs typeface="微软雅黑" panose="020B0503020204020204" pitchFamily="34" charset="-122"/>
-                <a:sym typeface="+mn-ea"/>
-              </a:rPr>
-              <a:t>”</a:t>
-            </a:r>
-            <a:r>
-              <a:rPr lang="zh-CN" altLang="en-US" dirty="0">
-                <a:latin typeface="微软雅黑" panose="020B0503020204020204" pitchFamily="34" charset="-122"/>
-                <a:ea typeface="微软雅黑" panose="020B0503020204020204" pitchFamily="34" charset="-122"/>
-                <a:cs typeface="微软雅黑" panose="020B0503020204020204" pitchFamily="34" charset="-122"/>
-                <a:sym typeface="+mn-ea"/>
-              </a:rPr>
-              <a:t>决定了模型如何理解并执行这个目标。例如，两个提示词都要求</a:t>
-            </a:r>
-            <a:r>
-              <a:rPr lang="en-US" altLang="zh-CN" dirty="0">
-                <a:latin typeface="微软雅黑" panose="020B0503020204020204" pitchFamily="34" charset="-122"/>
-                <a:ea typeface="微软雅黑" panose="020B0503020204020204" pitchFamily="34" charset="-122"/>
-                <a:cs typeface="微软雅黑" panose="020B0503020204020204" pitchFamily="34" charset="-122"/>
-                <a:sym typeface="+mn-ea"/>
-              </a:rPr>
-              <a:t>“</a:t>
-            </a:r>
-            <a:r>
-              <a:rPr lang="zh-CN" altLang="en-US" dirty="0">
-                <a:latin typeface="微软雅黑" panose="020B0503020204020204" pitchFamily="34" charset="-122"/>
-                <a:ea typeface="微软雅黑" panose="020B0503020204020204" pitchFamily="34" charset="-122"/>
-                <a:cs typeface="微软雅黑" panose="020B0503020204020204" pitchFamily="34" charset="-122"/>
-                <a:sym typeface="+mn-ea"/>
-              </a:rPr>
-              <a:t>总结文章</a:t>
-            </a:r>
-            <a:r>
-              <a:rPr lang="en-US" altLang="zh-CN" dirty="0">
-                <a:latin typeface="微软雅黑" panose="020B0503020204020204" pitchFamily="34" charset="-122"/>
-                <a:ea typeface="微软雅黑" panose="020B0503020204020204" pitchFamily="34" charset="-122"/>
-                <a:cs typeface="微软雅黑" panose="020B0503020204020204" pitchFamily="34" charset="-122"/>
-                <a:sym typeface="+mn-ea"/>
-              </a:rPr>
-              <a:t>”</a:t>
-            </a:r>
-            <a:r>
-              <a:rPr lang="zh-CN" altLang="en-US" dirty="0">
-                <a:latin typeface="微软雅黑" panose="020B0503020204020204" pitchFamily="34" charset="-122"/>
-                <a:ea typeface="微软雅黑" panose="020B0503020204020204" pitchFamily="34" charset="-122"/>
-                <a:cs typeface="微软雅黑" panose="020B0503020204020204" pitchFamily="34" charset="-122"/>
-                <a:sym typeface="+mn-ea"/>
-              </a:rPr>
-              <a:t>，但效果可能天差地别：一个仅简单描述任务，另一个则明确了身份（如</a:t>
-            </a:r>
-            <a:r>
-              <a:rPr lang="en-US" altLang="zh-CN" dirty="0">
-                <a:latin typeface="微软雅黑" panose="020B0503020204020204" pitchFamily="34" charset="-122"/>
-                <a:ea typeface="微软雅黑" panose="020B0503020204020204" pitchFamily="34" charset="-122"/>
-                <a:cs typeface="微软雅黑" panose="020B0503020204020204" pitchFamily="34" charset="-122"/>
-                <a:sym typeface="+mn-ea"/>
-              </a:rPr>
-              <a:t>“</a:t>
-            </a:r>
-            <a:r>
-              <a:rPr lang="zh-CN" altLang="en-US" dirty="0">
-                <a:latin typeface="微软雅黑" panose="020B0503020204020204" pitchFamily="34" charset="-122"/>
-                <a:ea typeface="微软雅黑" panose="020B0503020204020204" pitchFamily="34" charset="-122"/>
-                <a:cs typeface="微软雅黑" panose="020B0503020204020204" pitchFamily="34" charset="-122"/>
-                <a:sym typeface="+mn-ea"/>
-              </a:rPr>
-              <a:t>你是一位资深分析师</a:t>
-            </a:r>
-            <a:r>
-              <a:rPr lang="en-US" altLang="zh-CN" dirty="0">
-                <a:latin typeface="微软雅黑" panose="020B0503020204020204" pitchFamily="34" charset="-122"/>
-                <a:ea typeface="微软雅黑" panose="020B0503020204020204" pitchFamily="34" charset="-122"/>
-                <a:cs typeface="微软雅黑" panose="020B0503020204020204" pitchFamily="34" charset="-122"/>
-                <a:sym typeface="+mn-ea"/>
-              </a:rPr>
-              <a:t>”</a:t>
-            </a:r>
-            <a:r>
-              <a:rPr lang="zh-CN" altLang="en-US" dirty="0">
-                <a:latin typeface="微软雅黑" panose="020B0503020204020204" pitchFamily="34" charset="-122"/>
-                <a:ea typeface="微软雅黑" panose="020B0503020204020204" pitchFamily="34" charset="-122"/>
-                <a:cs typeface="微软雅黑" panose="020B0503020204020204" pitchFamily="34" charset="-122"/>
-                <a:sym typeface="+mn-ea"/>
-              </a:rPr>
-              <a:t>）、读者（如</a:t>
-            </a:r>
-            <a:r>
-              <a:rPr lang="en-US" altLang="zh-CN" dirty="0">
-                <a:latin typeface="微软雅黑" panose="020B0503020204020204" pitchFamily="34" charset="-122"/>
-                <a:ea typeface="微软雅黑" panose="020B0503020204020204" pitchFamily="34" charset="-122"/>
-                <a:cs typeface="微软雅黑" panose="020B0503020204020204" pitchFamily="34" charset="-122"/>
-                <a:sym typeface="+mn-ea"/>
-              </a:rPr>
-              <a:t>“</a:t>
-            </a:r>
-            <a:r>
-              <a:rPr lang="zh-CN" altLang="en-US" dirty="0">
-                <a:latin typeface="微软雅黑" panose="020B0503020204020204" pitchFamily="34" charset="-122"/>
-                <a:ea typeface="微软雅黑" panose="020B0503020204020204" pitchFamily="34" charset="-122"/>
-                <a:cs typeface="微软雅黑" panose="020B0503020204020204" pitchFamily="34" charset="-122"/>
-                <a:sym typeface="+mn-ea"/>
-              </a:rPr>
-              <a:t>面向企业高管</a:t>
-            </a:r>
-            <a:r>
-              <a:rPr lang="en-US" altLang="zh-CN" dirty="0">
-                <a:latin typeface="微软雅黑" panose="020B0503020204020204" pitchFamily="34" charset="-122"/>
-                <a:ea typeface="微软雅黑" panose="020B0503020204020204" pitchFamily="34" charset="-122"/>
-                <a:cs typeface="微软雅黑" panose="020B0503020204020204" pitchFamily="34" charset="-122"/>
-                <a:sym typeface="+mn-ea"/>
-              </a:rPr>
-              <a:t>”</a:t>
-            </a:r>
-            <a:r>
-              <a:rPr lang="zh-CN" altLang="en-US" dirty="0">
-                <a:latin typeface="微软雅黑" panose="020B0503020204020204" pitchFamily="34" charset="-122"/>
-                <a:ea typeface="微软雅黑" panose="020B0503020204020204" pitchFamily="34" charset="-122"/>
-                <a:cs typeface="微软雅黑" panose="020B0503020204020204" pitchFamily="34" charset="-122"/>
-                <a:sym typeface="+mn-ea"/>
-              </a:rPr>
-              <a:t>）、提取维度（如</a:t>
-            </a:r>
-            <a:r>
-              <a:rPr lang="en-US" altLang="zh-CN" dirty="0">
-                <a:latin typeface="微软雅黑" panose="020B0503020204020204" pitchFamily="34" charset="-122"/>
-                <a:ea typeface="微软雅黑" panose="020B0503020204020204" pitchFamily="34" charset="-122"/>
-                <a:cs typeface="微软雅黑" panose="020B0503020204020204" pitchFamily="34" charset="-122"/>
-                <a:sym typeface="+mn-ea"/>
-              </a:rPr>
-              <a:t>“</a:t>
-            </a:r>
-            <a:r>
-              <a:rPr lang="zh-CN" altLang="en-US" dirty="0">
-                <a:latin typeface="微软雅黑" panose="020B0503020204020204" pitchFamily="34" charset="-122"/>
-                <a:ea typeface="微软雅黑" panose="020B0503020204020204" pitchFamily="34" charset="-122"/>
-                <a:cs typeface="微软雅黑" panose="020B0503020204020204" pitchFamily="34" charset="-122"/>
-                <a:sym typeface="+mn-ea"/>
-              </a:rPr>
-              <a:t>核心观点、关键数据、企业启示</a:t>
-            </a:r>
-            <a:r>
-              <a:rPr lang="en-US" altLang="zh-CN" dirty="0">
-                <a:latin typeface="微软雅黑" panose="020B0503020204020204" pitchFamily="34" charset="-122"/>
-                <a:ea typeface="微软雅黑" panose="020B0503020204020204" pitchFamily="34" charset="-122"/>
-                <a:cs typeface="微软雅黑" panose="020B0503020204020204" pitchFamily="34" charset="-122"/>
-                <a:sym typeface="+mn-ea"/>
-              </a:rPr>
-              <a:t>”</a:t>
-            </a:r>
-            <a:r>
-              <a:rPr lang="zh-CN" altLang="en-US" dirty="0">
-                <a:latin typeface="微软雅黑" panose="020B0503020204020204" pitchFamily="34" charset="-122"/>
-                <a:ea typeface="微软雅黑" panose="020B0503020204020204" pitchFamily="34" charset="-122"/>
-                <a:cs typeface="微软雅黑" panose="020B0503020204020204" pitchFamily="34" charset="-122"/>
-                <a:sym typeface="+mn-ea"/>
-              </a:rPr>
-              <a:t>）、长度（如</a:t>
-            </a:r>
-            <a:r>
-              <a:rPr lang="en-US" altLang="zh-CN" dirty="0">
-                <a:latin typeface="微软雅黑" panose="020B0503020204020204" pitchFamily="34" charset="-122"/>
-                <a:ea typeface="微软雅黑" panose="020B0503020204020204" pitchFamily="34" charset="-122"/>
-                <a:cs typeface="微软雅黑" panose="020B0503020204020204" pitchFamily="34" charset="-122"/>
-                <a:sym typeface="+mn-ea"/>
-              </a:rPr>
-              <a:t>“</a:t>
-            </a:r>
-            <a:r>
-              <a:rPr lang="zh-CN" altLang="en-US" dirty="0">
-                <a:latin typeface="微软雅黑" panose="020B0503020204020204" pitchFamily="34" charset="-122"/>
-                <a:ea typeface="微软雅黑" panose="020B0503020204020204" pitchFamily="34" charset="-122"/>
-                <a:cs typeface="微软雅黑" panose="020B0503020204020204" pitchFamily="34" charset="-122"/>
-                <a:sym typeface="+mn-ea"/>
-              </a:rPr>
-              <a:t>不超过</a:t>
-            </a:r>
-            <a:r>
-              <a:rPr lang="en-US" altLang="zh-CN" dirty="0">
-                <a:latin typeface="微软雅黑" panose="020B0503020204020204" pitchFamily="34" charset="-122"/>
-                <a:ea typeface="微软雅黑" panose="020B0503020204020204" pitchFamily="34" charset="-122"/>
-                <a:cs typeface="微软雅黑" panose="020B0503020204020204" pitchFamily="34" charset="-122"/>
-                <a:sym typeface="+mn-ea"/>
-              </a:rPr>
-              <a:t>200</a:t>
-            </a:r>
-            <a:r>
-              <a:rPr lang="zh-CN" altLang="en-US" dirty="0">
-                <a:latin typeface="微软雅黑" panose="020B0503020204020204" pitchFamily="34" charset="-122"/>
-                <a:ea typeface="微软雅黑" panose="020B0503020204020204" pitchFamily="34" charset="-122"/>
-                <a:cs typeface="微软雅黑" panose="020B0503020204020204" pitchFamily="34" charset="-122"/>
-                <a:sym typeface="+mn-ea"/>
-              </a:rPr>
-              <a:t>字</a:t>
-            </a:r>
-            <a:r>
-              <a:rPr lang="en-US" altLang="zh-CN" dirty="0">
-                <a:latin typeface="微软雅黑" panose="020B0503020204020204" pitchFamily="34" charset="-122"/>
-                <a:ea typeface="微软雅黑" panose="020B0503020204020204" pitchFamily="34" charset="-122"/>
-                <a:cs typeface="微软雅黑" panose="020B0503020204020204" pitchFamily="34" charset="-122"/>
-                <a:sym typeface="+mn-ea"/>
-              </a:rPr>
-              <a:t>”</a:t>
-            </a:r>
-            <a:r>
-              <a:rPr lang="zh-CN" altLang="en-US" dirty="0">
-                <a:latin typeface="微软雅黑" panose="020B0503020204020204" pitchFamily="34" charset="-122"/>
-                <a:ea typeface="微软雅黑" panose="020B0503020204020204" pitchFamily="34" charset="-122"/>
-                <a:cs typeface="微软雅黑" panose="020B0503020204020204" pitchFamily="34" charset="-122"/>
-                <a:sym typeface="+mn-ea"/>
-              </a:rPr>
-              <a:t>）和风格（如</a:t>
-            </a:r>
-            <a:r>
-              <a:rPr lang="en-US" altLang="zh-CN" dirty="0">
-                <a:latin typeface="微软雅黑" panose="020B0503020204020204" pitchFamily="34" charset="-122"/>
-                <a:ea typeface="微软雅黑" panose="020B0503020204020204" pitchFamily="34" charset="-122"/>
-                <a:cs typeface="微软雅黑" panose="020B0503020204020204" pitchFamily="34" charset="-122"/>
-                <a:sym typeface="+mn-ea"/>
-              </a:rPr>
-              <a:t>“</a:t>
-            </a:r>
-            <a:r>
-              <a:rPr lang="zh-CN" altLang="en-US" dirty="0">
-                <a:latin typeface="微软雅黑" panose="020B0503020204020204" pitchFamily="34" charset="-122"/>
-                <a:ea typeface="微软雅黑" panose="020B0503020204020204" pitchFamily="34" charset="-122"/>
-                <a:cs typeface="微软雅黑" panose="020B0503020204020204" pitchFamily="34" charset="-122"/>
-                <a:sym typeface="+mn-ea"/>
-              </a:rPr>
-              <a:t>专业简洁</a:t>
-            </a:r>
-            <a:r>
-              <a:rPr lang="en-US" altLang="zh-CN" dirty="0">
-                <a:latin typeface="微软雅黑" panose="020B0503020204020204" pitchFamily="34" charset="-122"/>
-                <a:ea typeface="微软雅黑" panose="020B0503020204020204" pitchFamily="34" charset="-122"/>
-                <a:cs typeface="微软雅黑" panose="020B0503020204020204" pitchFamily="34" charset="-122"/>
-                <a:sym typeface="+mn-ea"/>
-              </a:rPr>
-              <a:t>”</a:t>
-            </a:r>
-            <a:r>
-              <a:rPr lang="zh-CN" altLang="en-US" dirty="0">
-                <a:latin typeface="微软雅黑" panose="020B0503020204020204" pitchFamily="34" charset="-122"/>
-                <a:ea typeface="微软雅黑" panose="020B0503020204020204" pitchFamily="34" charset="-122"/>
-                <a:cs typeface="微软雅黑" panose="020B0503020204020204" pitchFamily="34" charset="-122"/>
-                <a:sym typeface="+mn-ea"/>
-              </a:rPr>
-              <a:t>）。后者的输出质量显著更高，因为模型并非听懂一句话就能自动补全所有隐含要求。</a:t>
+              <a:t>的维护和升级更加灵活高效，也降低了各层之间的耦合度，符合软件工程中的最佳实践。</a:t>
             </a:r>
             <a:endParaRPr lang="zh-CN" altLang="en-US" dirty="0">
               <a:latin typeface="微软雅黑" panose="020B0503020204020204" pitchFamily="34" charset="-122"/>
@@ -21631,61 +17828,61 @@
 
 <file path=ppt/tags/tag100.xml><?xml version="1.0" encoding="utf-8"?>
 <p:tagLst xmlns:p="http://schemas.openxmlformats.org/presentationml/2006/main">
-  <p:tag name="KSO_WM_DIAGRAM_VIRTUALLY_FRAME" val="{&quot;height&quot;:312,&quot;left&quot;:46.386771653543285,&quot;top&quot;:138.6,&quot;width&quot;:929.4126771653544}"/>
+  <p:tag name="KSO_WM_DIAGRAM_VIRTUALLY_FRAME" val="{&quot;height&quot;:333.7,&quot;left&quot;:116.85,&quot;top&quot;:150.5,&quot;width&quot;:710.2425984251968}"/>
 </p:tagLst>
 </file>
 
 <file path=ppt/tags/tag101.xml><?xml version="1.0" encoding="utf-8"?>
 <p:tagLst xmlns:p="http://schemas.openxmlformats.org/presentationml/2006/main">
-  <p:tag name="KSO_WM_DIAGRAM_VIRTUALLY_FRAME" val="{&quot;height&quot;:312,&quot;left&quot;:46.386771653543285,&quot;top&quot;:138.6,&quot;width&quot;:929.4126771653544}"/>
+  <p:tag name="KSO_WM_DIAGRAM_VIRTUALLY_FRAME" val="{&quot;height&quot;:333.7,&quot;left&quot;:116.85,&quot;top&quot;:150.5,&quot;width&quot;:710.2425984251968}"/>
 </p:tagLst>
 </file>
 
 <file path=ppt/tags/tag102.xml><?xml version="1.0" encoding="utf-8"?>
 <p:tagLst xmlns:p="http://schemas.openxmlformats.org/presentationml/2006/main">
-  <p:tag name="KSO_WM_DIAGRAM_VIRTUALLY_FRAME" val="{&quot;height&quot;:312,&quot;left&quot;:46.386771653543285,&quot;top&quot;:138.6,&quot;width&quot;:929.4126771653544}"/>
+  <p:tag name="KSO_WM_DIAGRAM_VIRTUALLY_FRAME" val="{&quot;height&quot;:333.7,&quot;left&quot;:116.85,&quot;top&quot;:150.5,&quot;width&quot;:710.2425984251968}"/>
 </p:tagLst>
 </file>
 
 <file path=ppt/tags/tag103.xml><?xml version="1.0" encoding="utf-8"?>
 <p:tagLst xmlns:p="http://schemas.openxmlformats.org/presentationml/2006/main">
-  <p:tag name="KSO_WM_DIAGRAM_VIRTUALLY_FRAME" val="{&quot;height&quot;:312,&quot;left&quot;:46.386771653543285,&quot;top&quot;:138.6,&quot;width&quot;:929.4126771653544}"/>
+  <p:tag name="KSO_WM_DIAGRAM_VIRTUALLY_FRAME" val="{&quot;height&quot;:333.7,&quot;left&quot;:116.85,&quot;top&quot;:150.5,&quot;width&quot;:710.2425984251968}"/>
 </p:tagLst>
 </file>
 
 <file path=ppt/tags/tag104.xml><?xml version="1.0" encoding="utf-8"?>
 <p:tagLst xmlns:p="http://schemas.openxmlformats.org/presentationml/2006/main">
-  <p:tag name="KSO_WM_DIAGRAM_VIRTUALLY_FRAME" val="{&quot;height&quot;:312,&quot;left&quot;:46.386771653543285,&quot;top&quot;:138.6,&quot;width&quot;:929.4126771653544}"/>
+  <p:tag name="KSO_WM_DIAGRAM_VIRTUALLY_FRAME" val="{&quot;height&quot;:333.7,&quot;left&quot;:116.85,&quot;top&quot;:150.5,&quot;width&quot;:710.2425984251968}"/>
 </p:tagLst>
 </file>
 
 <file path=ppt/tags/tag105.xml><?xml version="1.0" encoding="utf-8"?>
 <p:tagLst xmlns:p="http://schemas.openxmlformats.org/presentationml/2006/main">
-  <p:tag name="KSO_WM_DIAGRAM_VIRTUALLY_FRAME" val="{&quot;height&quot;:312,&quot;left&quot;:46.386771653543285,&quot;top&quot;:138.6,&quot;width&quot;:929.4126771653544}"/>
+  <p:tag name="KSO_WM_DIAGRAM_VIRTUALLY_FRAME" val="{&quot;height&quot;:333.7,&quot;left&quot;:116.85,&quot;top&quot;:150.5,&quot;width&quot;:710.2425984251968}"/>
 </p:tagLst>
 </file>
 
 <file path=ppt/tags/tag106.xml><?xml version="1.0" encoding="utf-8"?>
 <p:tagLst xmlns:p="http://schemas.openxmlformats.org/presentationml/2006/main">
-  <p:tag name="KSO_WM_DIAGRAM_VIRTUALLY_FRAME" val="{&quot;height&quot;:312,&quot;left&quot;:46.386771653543285,&quot;top&quot;:138.6,&quot;width&quot;:929.4126771653544}"/>
+  <p:tag name="KSO_WM_DIAGRAM_VIRTUALLY_FRAME" val="{&quot;height&quot;:333.7,&quot;left&quot;:116.85,&quot;top&quot;:150.5,&quot;width&quot;:710.2425984251968}"/>
 </p:tagLst>
 </file>
 
 <file path=ppt/tags/tag107.xml><?xml version="1.0" encoding="utf-8"?>
 <p:tagLst xmlns:p="http://schemas.openxmlformats.org/presentationml/2006/main">
-  <p:tag name="KSO_WM_DIAGRAM_VIRTUALLY_FRAME" val="{&quot;height&quot;:312,&quot;left&quot;:46.386771653543285,&quot;top&quot;:138.6,&quot;width&quot;:929.4126771653544}"/>
+  <p:tag name="KSO_WM_BEAUTIFY_FLAG" val=""/>
 </p:tagLst>
 </file>
 
 <file path=ppt/tags/tag108.xml><?xml version="1.0" encoding="utf-8"?>
 <p:tagLst xmlns:p="http://schemas.openxmlformats.org/presentationml/2006/main">
-  <p:tag name="KSO_WM_DIAGRAM_VIRTUALLY_FRAME" val="{&quot;height&quot;:312,&quot;left&quot;:46.386771653543285,&quot;top&quot;:138.6,&quot;width&quot;:929.4126771653544}"/>
+  <p:tag name="KSO_WM_BEAUTIFY_FLAG" val=""/>
 </p:tagLst>
 </file>
 
 <file path=ppt/tags/tag109.xml><?xml version="1.0" encoding="utf-8"?>
 <p:tagLst xmlns:p="http://schemas.openxmlformats.org/presentationml/2006/main">
-  <p:tag name="KSO_WM_DIAGRAM_VIRTUALLY_FRAME" val="{&quot;height&quot;:312,&quot;left&quot;:46.386771653543285,&quot;top&quot;:138.6,&quot;width&quot;:929.4126771653544}"/>
+  <p:tag name="KSO_WM_BEAUTIFY_FLAG" val=""/>
 </p:tagLst>
 </file>
 
@@ -21704,43 +17901,43 @@
 
 <file path=ppt/tags/tag110.xml><?xml version="1.0" encoding="utf-8"?>
 <p:tagLst xmlns:p="http://schemas.openxmlformats.org/presentationml/2006/main">
-  <p:tag name="KSO_WM_DIAGRAM_VIRTUALLY_FRAME" val="{&quot;height&quot;:312,&quot;left&quot;:46.386771653543285,&quot;top&quot;:138.6,&quot;width&quot;:929.4126771653544}"/>
+  <p:tag name="KSO_WM_BEAUTIFY_FLAG" val=""/>
 </p:tagLst>
 </file>
 
 <file path=ppt/tags/tag111.xml><?xml version="1.0" encoding="utf-8"?>
 <p:tagLst xmlns:p="http://schemas.openxmlformats.org/presentationml/2006/main">
-  <p:tag name="KSO_WM_DIAGRAM_VIRTUALLY_FRAME" val="{&quot;height&quot;:312,&quot;left&quot;:46.386771653543285,&quot;top&quot;:138.6,&quot;width&quot;:929.4126771653544}"/>
+  <p:tag name="KSO_WM_BEAUTIFY_FLAG" val=""/>
 </p:tagLst>
 </file>
 
 <file path=ppt/tags/tag112.xml><?xml version="1.0" encoding="utf-8"?>
 <p:tagLst xmlns:p="http://schemas.openxmlformats.org/presentationml/2006/main">
-  <p:tag name="KSO_WM_DIAGRAM_VIRTUALLY_FRAME" val="{&quot;height&quot;:312,&quot;left&quot;:46.386771653543285,&quot;top&quot;:138.6,&quot;width&quot;:929.4126771653544}"/>
+  <p:tag name="KSO_WM_BEAUTIFY_FLAG" val=""/>
 </p:tagLst>
 </file>
 
 <file path=ppt/tags/tag113.xml><?xml version="1.0" encoding="utf-8"?>
 <p:tagLst xmlns:p="http://schemas.openxmlformats.org/presentationml/2006/main">
-  <p:tag name="KSO_WM_DIAGRAM_VIRTUALLY_FRAME" val="{&quot;height&quot;:312,&quot;left&quot;:46.386771653543285,&quot;top&quot;:138.6,&quot;width&quot;:929.4126771653544}"/>
+  <p:tag name="KSO_WM_BEAUTIFY_FLAG" val=""/>
 </p:tagLst>
 </file>
 
 <file path=ppt/tags/tag114.xml><?xml version="1.0" encoding="utf-8"?>
 <p:tagLst xmlns:p="http://schemas.openxmlformats.org/presentationml/2006/main">
-  <p:tag name="KSO_WM_DIAGRAM_VIRTUALLY_FRAME" val="{&quot;height&quot;:312,&quot;left&quot;:46.386771653543285,&quot;top&quot;:138.6,&quot;width&quot;:929.4126771653544}"/>
+  <p:tag name="KSO_WM_BEAUTIFY_FLAG" val=""/>
 </p:tagLst>
 </file>
 
 <file path=ppt/tags/tag115.xml><?xml version="1.0" encoding="utf-8"?>
 <p:tagLst xmlns:p="http://schemas.openxmlformats.org/presentationml/2006/main">
-  <p:tag name="KSO_WM_DIAGRAM_VIRTUALLY_FRAME" val="{&quot;height&quot;:312,&quot;left&quot;:46.386771653543285,&quot;top&quot;:138.6,&quot;width&quot;:929.4126771653544}"/>
+  <p:tag name="KSO_WM_BEAUTIFY_FLAG" val=""/>
 </p:tagLst>
 </file>
 
 <file path=ppt/tags/tag116.xml><?xml version="1.0" encoding="utf-8"?>
 <p:tagLst xmlns:p="http://schemas.openxmlformats.org/presentationml/2006/main">
-  <p:tag name="KSO_WM_DIAGRAM_VIRTUALLY_FRAME" val="{&quot;height&quot;:312,&quot;left&quot;:46.386771653543285,&quot;top&quot;:138.6,&quot;width&quot;:929.4126771653544}"/>
+  <p:tag name="KSO_WM_BEAUTIFY_FLAG" val=""/>
 </p:tagLst>
 </file>
 
@@ -21783,13 +17980,51 @@
 
 <file path=ppt/tags/tag121.xml><?xml version="1.0" encoding="utf-8"?>
 <p:tagLst xmlns:p="http://schemas.openxmlformats.org/presentationml/2006/main">
+  <p:tag name="KSO_WM_UNIT_NOCLEAR" val="0"/>
+  <p:tag name="KSO_WM_UNIT_HIGHLIGHT" val="0"/>
+  <p:tag name="KSO_WM_UNIT_COMPATIBLE" val="0"/>
+  <p:tag name="KSO_WM_UNIT_DIAGRAM_ISNUMVISUAL" val="0"/>
+  <p:tag name="KSO_WM_UNIT_DIAGRAM_ISREFERUNIT" val="0"/>
+  <p:tag name="KSO_WM_UNIT_TYPE" val="m_h_i"/>
+  <p:tag name="KSO_WM_UNIT_INDEX" val="1_1_1"/>
+  <p:tag name="KSO_WM_UNIT_ID" val="diagram726_1*m_h_i*1_1_1"/>
+  <p:tag name="KSO_WM_TEMPLATE_CATEGORY" val="diagram"/>
+  <p:tag name="KSO_WM_TEMPLATE_INDEX" val="726"/>
+  <p:tag name="KSO_WM_UNIT_LAYERLEVEL" val="1_1_1"/>
+  <p:tag name="KSO_WM_TAG_VERSION" val="1.0"/>
   <p:tag name="KSO_WM_BEAUTIFY_FLAG" val=""/>
+  <p:tag name="KSO_WM_DIAGRAM_GROUP_CODE" val="m1-1"/>
+  <p:tag name="KSO_WM_UNIT_FILL_FORE_SCHEMECOLOR_INDEX" val="5"/>
+  <p:tag name="KSO_WM_UNIT_FILL_TYPE" val="1"/>
+  <p:tag name="KSO_WM_UNIT_TEXT_FILL_FORE_SCHEMECOLOR_INDEX" val="2"/>
+  <p:tag name="KSO_WM_UNIT_TEXT_FILL_TYPE" val="1"/>
+  <p:tag name="KSO_WM_UNIT_DIAGRAM_SCHEMECOLOR_ID" val="1"/>
+  <p:tag name="KSO_WM_UNIT_USESOURCEFORMAT_APPLY" val="1"/>
 </p:tagLst>
 </file>
 
 <file path=ppt/tags/tag122.xml><?xml version="1.0" encoding="utf-8"?>
 <p:tagLst xmlns:p="http://schemas.openxmlformats.org/presentationml/2006/main">
+  <p:tag name="KSO_WM_UNIT_NOCLEAR" val="0"/>
+  <p:tag name="KSO_WM_UNIT_HIGHLIGHT" val="0"/>
+  <p:tag name="KSO_WM_UNIT_COMPATIBLE" val="0"/>
+  <p:tag name="KSO_WM_UNIT_DIAGRAM_ISNUMVISUAL" val="0"/>
+  <p:tag name="KSO_WM_UNIT_DIAGRAM_ISREFERUNIT" val="0"/>
+  <p:tag name="KSO_WM_UNIT_TYPE" val="m_h_i"/>
+  <p:tag name="KSO_WM_UNIT_INDEX" val="1_1_1"/>
+  <p:tag name="KSO_WM_UNIT_ID" val="diagram726_1*m_h_i*1_1_1"/>
+  <p:tag name="KSO_WM_TEMPLATE_CATEGORY" val="diagram"/>
+  <p:tag name="KSO_WM_TEMPLATE_INDEX" val="726"/>
+  <p:tag name="KSO_WM_UNIT_LAYERLEVEL" val="1_1_1"/>
+  <p:tag name="KSO_WM_TAG_VERSION" val="1.0"/>
   <p:tag name="KSO_WM_BEAUTIFY_FLAG" val=""/>
+  <p:tag name="KSO_WM_DIAGRAM_GROUP_CODE" val="m1-1"/>
+  <p:tag name="KSO_WM_UNIT_FILL_FORE_SCHEMECOLOR_INDEX" val="5"/>
+  <p:tag name="KSO_WM_UNIT_FILL_TYPE" val="1"/>
+  <p:tag name="KSO_WM_UNIT_TEXT_FILL_FORE_SCHEMECOLOR_INDEX" val="2"/>
+  <p:tag name="KSO_WM_UNIT_TEXT_FILL_TYPE" val="1"/>
+  <p:tag name="KSO_WM_UNIT_DIAGRAM_SCHEMECOLOR_ID" val="1"/>
+  <p:tag name="KSO_WM_UNIT_USESOURCEFORMAT_APPLY" val="1"/>
 </p:tagLst>
 </file>
 
@@ -21856,51 +18091,13 @@
 
 <file path=ppt/tags/tag131.xml><?xml version="1.0" encoding="utf-8"?>
 <p:tagLst xmlns:p="http://schemas.openxmlformats.org/presentationml/2006/main">
-  <p:tag name="KSO_WM_UNIT_NOCLEAR" val="0"/>
-  <p:tag name="KSO_WM_UNIT_HIGHLIGHT" val="0"/>
-  <p:tag name="KSO_WM_UNIT_COMPATIBLE" val="0"/>
-  <p:tag name="KSO_WM_UNIT_DIAGRAM_ISNUMVISUAL" val="0"/>
-  <p:tag name="KSO_WM_UNIT_DIAGRAM_ISREFERUNIT" val="0"/>
-  <p:tag name="KSO_WM_UNIT_TYPE" val="m_h_i"/>
-  <p:tag name="KSO_WM_UNIT_INDEX" val="1_1_1"/>
-  <p:tag name="KSO_WM_UNIT_ID" val="diagram726_1*m_h_i*1_1_1"/>
-  <p:tag name="KSO_WM_TEMPLATE_CATEGORY" val="diagram"/>
-  <p:tag name="KSO_WM_TEMPLATE_INDEX" val="726"/>
-  <p:tag name="KSO_WM_UNIT_LAYERLEVEL" val="1_1_1"/>
-  <p:tag name="KSO_WM_TAG_VERSION" val="1.0"/>
   <p:tag name="KSO_WM_BEAUTIFY_FLAG" val=""/>
-  <p:tag name="KSO_WM_DIAGRAM_GROUP_CODE" val="m1-1"/>
-  <p:tag name="KSO_WM_UNIT_FILL_FORE_SCHEMECOLOR_INDEX" val="5"/>
-  <p:tag name="KSO_WM_UNIT_FILL_TYPE" val="1"/>
-  <p:tag name="KSO_WM_UNIT_TEXT_FILL_FORE_SCHEMECOLOR_INDEX" val="2"/>
-  <p:tag name="KSO_WM_UNIT_TEXT_FILL_TYPE" val="1"/>
-  <p:tag name="KSO_WM_UNIT_DIAGRAM_SCHEMECOLOR_ID" val="1"/>
-  <p:tag name="KSO_WM_UNIT_USESOURCEFORMAT_APPLY" val="1"/>
 </p:tagLst>
 </file>
 
 <file path=ppt/tags/tag132.xml><?xml version="1.0" encoding="utf-8"?>
 <p:tagLst xmlns:p="http://schemas.openxmlformats.org/presentationml/2006/main">
-  <p:tag name="KSO_WM_UNIT_NOCLEAR" val="0"/>
-  <p:tag name="KSO_WM_UNIT_HIGHLIGHT" val="0"/>
-  <p:tag name="KSO_WM_UNIT_COMPATIBLE" val="0"/>
-  <p:tag name="KSO_WM_UNIT_DIAGRAM_ISNUMVISUAL" val="0"/>
-  <p:tag name="KSO_WM_UNIT_DIAGRAM_ISREFERUNIT" val="0"/>
-  <p:tag name="KSO_WM_UNIT_TYPE" val="m_h_i"/>
-  <p:tag name="KSO_WM_UNIT_INDEX" val="1_1_1"/>
-  <p:tag name="KSO_WM_UNIT_ID" val="diagram726_1*m_h_i*1_1_1"/>
-  <p:tag name="KSO_WM_TEMPLATE_CATEGORY" val="diagram"/>
-  <p:tag name="KSO_WM_TEMPLATE_INDEX" val="726"/>
-  <p:tag name="KSO_WM_UNIT_LAYERLEVEL" val="1_1_1"/>
-  <p:tag name="KSO_WM_TAG_VERSION" val="1.0"/>
   <p:tag name="KSO_WM_BEAUTIFY_FLAG" val=""/>
-  <p:tag name="KSO_WM_DIAGRAM_GROUP_CODE" val="m1-1"/>
-  <p:tag name="KSO_WM_UNIT_FILL_FORE_SCHEMECOLOR_INDEX" val="5"/>
-  <p:tag name="KSO_WM_UNIT_FILL_TYPE" val="1"/>
-  <p:tag name="KSO_WM_UNIT_TEXT_FILL_FORE_SCHEMECOLOR_INDEX" val="2"/>
-  <p:tag name="KSO_WM_UNIT_TEXT_FILL_TYPE" val="1"/>
-  <p:tag name="KSO_WM_UNIT_DIAGRAM_SCHEMECOLOR_ID" val="1"/>
-  <p:tag name="KSO_WM_UNIT_USESOURCEFORMAT_APPLY" val="1"/>
 </p:tagLst>
 </file>
 
@@ -21936,13 +18133,8 @@
 
 <file path=ppt/tags/tag138.xml><?xml version="1.0" encoding="utf-8"?>
 <p:tagLst xmlns:p="http://schemas.openxmlformats.org/presentationml/2006/main">
-  <p:tag name="KSO_WM_DIAGRAM_VIRTUALLY_FRAME" val="{&quot;height&quot;:304.7015748031496,&quot;left&quot;:45.236771653543286,&quot;top&quot;:138.6,&quot;width&quot;:896.7277974382536}"/>
-</p:tagLst>
-</file>
-
-<file path=ppt/tags/tag139.xml><?xml version="1.0" encoding="utf-8"?>
-<p:tagLst xmlns:p="http://schemas.openxmlformats.org/presentationml/2006/main">
-  <p:tag name="KSO_WM_DIAGRAM_VIRTUALLY_FRAME" val="{&quot;height&quot;:304.7015748031496,&quot;left&quot;:45.236771653543286,&quot;top&quot;:138.6,&quot;width&quot;:896.7277974382536}"/>
+  <p:tag name="COMMONDATA" val="eyJoZGlkIjoiYzZkNzQ4ZWFiZmQ4NTRhOWRkZTk3YTMwMjlmMmZhYmUifQ=="/>
+  <p:tag name="KSO_WPP_MARK_KEY" val="3c15e236-6e17-4788-8b7a-5fd2c15b6c5c"/>
 </p:tagLst>
 </file>
 
@@ -21959,66 +18151,6 @@
 </p:tagLst>
 </file>
 
-<file path=ppt/tags/tag140.xml><?xml version="1.0" encoding="utf-8"?>
-<p:tagLst xmlns:p="http://schemas.openxmlformats.org/presentationml/2006/main">
-  <p:tag name="KSO_WM_DIAGRAM_VIRTUALLY_FRAME" val="{&quot;height&quot;:304.7015748031496,&quot;left&quot;:45.236771653543286,&quot;top&quot;:138.6,&quot;width&quot;:896.7277974382536}"/>
-</p:tagLst>
-</file>
-
-<file path=ppt/tags/tag141.xml><?xml version="1.0" encoding="utf-8"?>
-<p:tagLst xmlns:p="http://schemas.openxmlformats.org/presentationml/2006/main">
-  <p:tag name="KSO_WM_DIAGRAM_VIRTUALLY_FRAME" val="{&quot;height&quot;:304.7015748031496,&quot;left&quot;:45.236771653543286,&quot;top&quot;:138.6,&quot;width&quot;:896.7277974382536}"/>
-</p:tagLst>
-</file>
-
-<file path=ppt/tags/tag142.xml><?xml version="1.0" encoding="utf-8"?>
-<p:tagLst xmlns:p="http://schemas.openxmlformats.org/presentationml/2006/main">
-  <p:tag name="KSO_WM_DIAGRAM_VIRTUALLY_FRAME" val="{&quot;height&quot;:304.7015748031496,&quot;left&quot;:45.236771653543286,&quot;top&quot;:138.6,&quot;width&quot;:896.7277974382536}"/>
-</p:tagLst>
-</file>
-
-<file path=ppt/tags/tag143.xml><?xml version="1.0" encoding="utf-8"?>
-<p:tagLst xmlns:p="http://schemas.openxmlformats.org/presentationml/2006/main">
-  <p:tag name="KSO_WM_DIAGRAM_VIRTUALLY_FRAME" val="{&quot;height&quot;:304.7015748031496,&quot;left&quot;:45.236771653543286,&quot;top&quot;:138.6,&quot;width&quot;:896.7277974382536}"/>
-</p:tagLst>
-</file>
-
-<file path=ppt/tags/tag144.xml><?xml version="1.0" encoding="utf-8"?>
-<p:tagLst xmlns:p="http://schemas.openxmlformats.org/presentationml/2006/main">
-  <p:tag name="KSO_WM_DIAGRAM_VIRTUALLY_FRAME" val="{&quot;height&quot;:304.7015748031496,&quot;left&quot;:45.236771653543286,&quot;top&quot;:138.6,&quot;width&quot;:896.7277974382536}"/>
-</p:tagLst>
-</file>
-
-<file path=ppt/tags/tag145.xml><?xml version="1.0" encoding="utf-8"?>
-<p:tagLst xmlns:p="http://schemas.openxmlformats.org/presentationml/2006/main">
-  <p:tag name="KSO_WM_DIAGRAM_VIRTUALLY_FRAME" val="{&quot;height&quot;:304.7015748031496,&quot;left&quot;:45.236771653543286,&quot;top&quot;:138.6,&quot;width&quot;:896.7277974382536}"/>
-</p:tagLst>
-</file>
-
-<file path=ppt/tags/tag146.xml><?xml version="1.0" encoding="utf-8"?>
-<p:tagLst xmlns:p="http://schemas.openxmlformats.org/presentationml/2006/main">
-  <p:tag name="KSO_WM_DIAGRAM_VIRTUALLY_FRAME" val="{&quot;height&quot;:304.7015748031496,&quot;left&quot;:45.236771653543286,&quot;top&quot;:138.6,&quot;width&quot;:896.7277974382536}"/>
-</p:tagLst>
-</file>
-
-<file path=ppt/tags/tag147.xml><?xml version="1.0" encoding="utf-8"?>
-<p:tagLst xmlns:p="http://schemas.openxmlformats.org/presentationml/2006/main">
-  <p:tag name="KSO_WM_DIAGRAM_VIRTUALLY_FRAME" val="{&quot;height&quot;:304.7015748031496,&quot;left&quot;:45.236771653543286,&quot;top&quot;:138.6,&quot;width&quot;:896.7277974382536}"/>
-</p:tagLst>
-</file>
-
-<file path=ppt/tags/tag148.xml><?xml version="1.0" encoding="utf-8"?>
-<p:tagLst xmlns:p="http://schemas.openxmlformats.org/presentationml/2006/main">
-  <p:tag name="KSO_WM_DIAGRAM_VIRTUALLY_FRAME" val="{&quot;height&quot;:304.7015748031496,&quot;left&quot;:45.236771653543286,&quot;top&quot;:138.6,&quot;width&quot;:896.7277974382536}"/>
-</p:tagLst>
-</file>
-
-<file path=ppt/tags/tag149.xml><?xml version="1.0" encoding="utf-8"?>
-<p:tagLst xmlns:p="http://schemas.openxmlformats.org/presentationml/2006/main">
-  <p:tag name="KSO_WM_DIAGRAM_VIRTUALLY_FRAME" val="{&quot;height&quot;:304.7015748031496,&quot;left&quot;:45.236771653543286,&quot;top&quot;:138.6,&quot;width&quot;:896.7277974382536}"/>
-</p:tagLst>
-</file>
-
 <file path=ppt/tags/tag15.xml><?xml version="1.0" encoding="utf-8"?>
 <p:tagLst xmlns:p="http://schemas.openxmlformats.org/presentationml/2006/main">
   <p:tag name="KSO_WM_UNIT_HIGHLIGHT" val="0"/>
@@ -22032,66 +18164,6 @@
 </p:tagLst>
 </file>
 
-<file path=ppt/tags/tag150.xml><?xml version="1.0" encoding="utf-8"?>
-<p:tagLst xmlns:p="http://schemas.openxmlformats.org/presentationml/2006/main">
-  <p:tag name="KSO_WM_DIAGRAM_VIRTUALLY_FRAME" val="{&quot;height&quot;:304.7015748031496,&quot;left&quot;:45.236771653543286,&quot;top&quot;:138.6,&quot;width&quot;:896.7277974382536}"/>
-</p:tagLst>
-</file>
-
-<file path=ppt/tags/tag151.xml><?xml version="1.0" encoding="utf-8"?>
-<p:tagLst xmlns:p="http://schemas.openxmlformats.org/presentationml/2006/main">
-  <p:tag name="KSO_WM_DIAGRAM_VIRTUALLY_FRAME" val="{&quot;height&quot;:304.7015748031496,&quot;left&quot;:45.236771653543286,&quot;top&quot;:138.6,&quot;width&quot;:896.7277974382536}"/>
-</p:tagLst>
-</file>
-
-<file path=ppt/tags/tag152.xml><?xml version="1.0" encoding="utf-8"?>
-<p:tagLst xmlns:p="http://schemas.openxmlformats.org/presentationml/2006/main">
-  <p:tag name="KSO_WM_DIAGRAM_VIRTUALLY_FRAME" val="{&quot;height&quot;:304.7015748031496,&quot;left&quot;:45.236771653543286,&quot;top&quot;:138.6,&quot;width&quot;:896.7277974382536}"/>
-</p:tagLst>
-</file>
-
-<file path=ppt/tags/tag153.xml><?xml version="1.0" encoding="utf-8"?>
-<p:tagLst xmlns:p="http://schemas.openxmlformats.org/presentationml/2006/main">
-  <p:tag name="KSO_WM_DIAGRAM_VIRTUALLY_FRAME" val="{&quot;height&quot;:304.7015748031496,&quot;left&quot;:45.236771653543286,&quot;top&quot;:138.6,&quot;width&quot;:896.7277974382536}"/>
-</p:tagLst>
-</file>
-
-<file path=ppt/tags/tag154.xml><?xml version="1.0" encoding="utf-8"?>
-<p:tagLst xmlns:p="http://schemas.openxmlformats.org/presentationml/2006/main">
-  <p:tag name="KSO_WM_DIAGRAM_VIRTUALLY_FRAME" val="{&quot;height&quot;:304.7015748031496,&quot;left&quot;:45.236771653543286,&quot;top&quot;:138.6,&quot;width&quot;:896.7277974382536}"/>
-</p:tagLst>
-</file>
-
-<file path=ppt/tags/tag155.xml><?xml version="1.0" encoding="utf-8"?>
-<p:tagLst xmlns:p="http://schemas.openxmlformats.org/presentationml/2006/main">
-  <p:tag name="KSO_WM_BEAUTIFY_FLAG" val=""/>
-</p:tagLst>
-</file>
-
-<file path=ppt/tags/tag156.xml><?xml version="1.0" encoding="utf-8"?>
-<p:tagLst xmlns:p="http://schemas.openxmlformats.org/presentationml/2006/main">
-  <p:tag name="KSO_WM_BEAUTIFY_FLAG" val=""/>
-</p:tagLst>
-</file>
-
-<file path=ppt/tags/tag157.xml><?xml version="1.0" encoding="utf-8"?>
-<p:tagLst xmlns:p="http://schemas.openxmlformats.org/presentationml/2006/main">
-  <p:tag name="KSO_WM_BEAUTIFY_FLAG" val=""/>
-</p:tagLst>
-</file>
-
-<file path=ppt/tags/tag158.xml><?xml version="1.0" encoding="utf-8"?>
-<p:tagLst xmlns:p="http://schemas.openxmlformats.org/presentationml/2006/main">
-  <p:tag name="KSO_WM_BEAUTIFY_FLAG" val=""/>
-</p:tagLst>
-</file>
-
-<file path=ppt/tags/tag159.xml><?xml version="1.0" encoding="utf-8"?>
-<p:tagLst xmlns:p="http://schemas.openxmlformats.org/presentationml/2006/main">
-  <p:tag name="KSO_WM_BEAUTIFY_FLAG" val=""/>
-</p:tagLst>
-</file>
-
 <file path=ppt/tags/tag16.xml><?xml version="1.0" encoding="utf-8"?>
 <p:tagLst xmlns:p="http://schemas.openxmlformats.org/presentationml/2006/main">
   <p:tag name="KSO_WM_UNIT_HIGHLIGHT" val="0"/>
@@ -22102,99 +18174,6 @@
   <p:tag name="KSO_WM_UNIT_LAYERLEVEL" val="1"/>
   <p:tag name="KSO_WM_TAG_VERSION" val="1.0"/>
   <p:tag name="KSO_WM_BEAUTIFY_FLAG" val="#wm#"/>
-</p:tagLst>
-</file>
-
-<file path=ppt/tags/tag160.xml><?xml version="1.0" encoding="utf-8"?>
-<p:tagLst xmlns:p="http://schemas.openxmlformats.org/presentationml/2006/main">
-  <p:tag name="KSO_WM_BEAUTIFY_FLAG" val=""/>
-</p:tagLst>
-</file>
-
-<file path=ppt/tags/tag161.xml><?xml version="1.0" encoding="utf-8"?>
-<p:tagLst xmlns:p="http://schemas.openxmlformats.org/presentationml/2006/main">
-  <p:tag name="KSO_WM_BEAUTIFY_FLAG" val=""/>
-</p:tagLst>
-</file>
-
-<file path=ppt/tags/tag162.xml><?xml version="1.0" encoding="utf-8"?>
-<p:tagLst xmlns:p="http://schemas.openxmlformats.org/presentationml/2006/main">
-  <p:tag name="KSO_WM_BEAUTIFY_FLAG" val=""/>
-</p:tagLst>
-</file>
-
-<file path=ppt/tags/tag163.xml><?xml version="1.0" encoding="utf-8"?>
-<p:tagLst xmlns:p="http://schemas.openxmlformats.org/presentationml/2006/main">
-  <p:tag name="KSO_WM_BEAUTIFY_FLAG" val=""/>
-</p:tagLst>
-</file>
-
-<file path=ppt/tags/tag164.xml><?xml version="1.0" encoding="utf-8"?>
-<p:tagLst xmlns:p="http://schemas.openxmlformats.org/presentationml/2006/main">
-  <p:tag name="KSO_WM_BEAUTIFY_FLAG" val=""/>
-</p:tagLst>
-</file>
-
-<file path=ppt/tags/tag165.xml><?xml version="1.0" encoding="utf-8"?>
-<p:tagLst xmlns:p="http://schemas.openxmlformats.org/presentationml/2006/main">
-  <p:tag name="KSO_WM_UNIT_NOCLEAR" val="0"/>
-  <p:tag name="KSO_WM_UNIT_HIGHLIGHT" val="0"/>
-  <p:tag name="KSO_WM_UNIT_COMPATIBLE" val="0"/>
-  <p:tag name="KSO_WM_UNIT_DIAGRAM_ISNUMVISUAL" val="0"/>
-  <p:tag name="KSO_WM_UNIT_DIAGRAM_ISREFERUNIT" val="0"/>
-  <p:tag name="KSO_WM_UNIT_TYPE" val="m_h_i"/>
-  <p:tag name="KSO_WM_UNIT_INDEX" val="1_1_1"/>
-  <p:tag name="KSO_WM_UNIT_ID" val="diagram726_1*m_h_i*1_1_1"/>
-  <p:tag name="KSO_WM_TEMPLATE_CATEGORY" val="diagram"/>
-  <p:tag name="KSO_WM_TEMPLATE_INDEX" val="726"/>
-  <p:tag name="KSO_WM_UNIT_LAYERLEVEL" val="1_1_1"/>
-  <p:tag name="KSO_WM_TAG_VERSION" val="1.0"/>
-  <p:tag name="KSO_WM_BEAUTIFY_FLAG" val=""/>
-  <p:tag name="KSO_WM_DIAGRAM_GROUP_CODE" val="m1-1"/>
-  <p:tag name="KSO_WM_UNIT_FILL_FORE_SCHEMECOLOR_INDEX" val="5"/>
-  <p:tag name="KSO_WM_UNIT_FILL_TYPE" val="1"/>
-  <p:tag name="KSO_WM_UNIT_TEXT_FILL_FORE_SCHEMECOLOR_INDEX" val="2"/>
-  <p:tag name="KSO_WM_UNIT_TEXT_FILL_TYPE" val="1"/>
-  <p:tag name="KSO_WM_UNIT_DIAGRAM_SCHEMECOLOR_ID" val="1"/>
-  <p:tag name="KSO_WM_UNIT_USESOURCEFORMAT_APPLY" val="1"/>
-</p:tagLst>
-</file>
-
-<file path=ppt/tags/tag166.xml><?xml version="1.0" encoding="utf-8"?>
-<p:tagLst xmlns:p="http://schemas.openxmlformats.org/presentationml/2006/main">
-  <p:tag name="KSO_WM_UNIT_NOCLEAR" val="0"/>
-  <p:tag name="KSO_WM_UNIT_HIGHLIGHT" val="0"/>
-  <p:tag name="KSO_WM_UNIT_COMPATIBLE" val="0"/>
-  <p:tag name="KSO_WM_UNIT_DIAGRAM_ISNUMVISUAL" val="0"/>
-  <p:tag name="KSO_WM_UNIT_DIAGRAM_ISREFERUNIT" val="0"/>
-  <p:tag name="KSO_WM_UNIT_TYPE" val="m_h_i"/>
-  <p:tag name="KSO_WM_UNIT_INDEX" val="1_1_1"/>
-  <p:tag name="KSO_WM_UNIT_ID" val="diagram726_1*m_h_i*1_1_1"/>
-  <p:tag name="KSO_WM_TEMPLATE_CATEGORY" val="diagram"/>
-  <p:tag name="KSO_WM_TEMPLATE_INDEX" val="726"/>
-  <p:tag name="KSO_WM_UNIT_LAYERLEVEL" val="1_1_1"/>
-  <p:tag name="KSO_WM_TAG_VERSION" val="1.0"/>
-  <p:tag name="KSO_WM_BEAUTIFY_FLAG" val=""/>
-  <p:tag name="KSO_WM_DIAGRAM_GROUP_CODE" val="m1-1"/>
-  <p:tag name="KSO_WM_UNIT_FILL_FORE_SCHEMECOLOR_INDEX" val="5"/>
-  <p:tag name="KSO_WM_UNIT_FILL_TYPE" val="1"/>
-  <p:tag name="KSO_WM_UNIT_TEXT_FILL_FORE_SCHEMECOLOR_INDEX" val="2"/>
-  <p:tag name="KSO_WM_UNIT_TEXT_FILL_TYPE" val="1"/>
-  <p:tag name="KSO_WM_UNIT_DIAGRAM_SCHEMECOLOR_ID" val="1"/>
-  <p:tag name="KSO_WM_UNIT_USESOURCEFORMAT_APPLY" val="1"/>
-</p:tagLst>
-</file>
-
-<file path=ppt/tags/tag167.xml><?xml version="1.0" encoding="utf-8"?>
-<p:tagLst xmlns:p="http://schemas.openxmlformats.org/presentationml/2006/main">
-  <p:tag name="KSO_WM_BEAUTIFY_FLAG" val=""/>
-</p:tagLst>
-</file>
-
-<file path=ppt/tags/tag168.xml><?xml version="1.0" encoding="utf-8"?>
-<p:tagLst xmlns:p="http://schemas.openxmlformats.org/presentationml/2006/main">
-  <p:tag name="COMMONDATA" val="eyJoZGlkIjoiYzZkNzQ4ZWFiZmQ4NTRhOWRkZTk3YTMwMjlmMmZhYmUifQ=="/>
-  <p:tag name="KSO_WPP_MARK_KEY" val="3c15e236-6e17-4788-8b7a-5fd2c15b6c5c"/>
 </p:tagLst>
 </file>
 
@@ -22967,61 +18946,61 @@
 
 <file path=ppt/tags/tag70.xml><?xml version="1.0" encoding="utf-8"?>
 <p:tagLst xmlns:p="http://schemas.openxmlformats.org/presentationml/2006/main">
-  <p:tag name="KSO_WM_DIAGRAM_VIRTUALLY_FRAME" val="{&quot;height&quot;:333.6,&quot;left&quot;:18.55,&quot;top&quot;:138.6,&quot;width&quot;:957.2494488188977}"/>
+  <p:tag name="KSO_WM_DIAGRAM_VIRTUALLY_FRAME" val="{&quot;height&quot;:333.7,&quot;left&quot;:181.0367716535433,&quot;top&quot;:150.5,&quot;width&quot;:585.2126771653544}"/>
 </p:tagLst>
 </file>
 
 <file path=ppt/tags/tag71.xml><?xml version="1.0" encoding="utf-8"?>
 <p:tagLst xmlns:p="http://schemas.openxmlformats.org/presentationml/2006/main">
-  <p:tag name="KSO_WM_DIAGRAM_VIRTUALLY_FRAME" val="{&quot;height&quot;:333.6,&quot;left&quot;:18.55,&quot;top&quot;:138.6,&quot;width&quot;:957.2494488188977}"/>
+  <p:tag name="KSO_WM_DIAGRAM_VIRTUALLY_FRAME" val="{&quot;height&quot;:333.6891855480546,&quot;left&quot;:181.0367716535433,&quot;top&quot;:150.5,&quot;width&quot;:585.2126771653544}"/>
 </p:tagLst>
 </file>
 
 <file path=ppt/tags/tag72.xml><?xml version="1.0" encoding="utf-8"?>
 <p:tagLst xmlns:p="http://schemas.openxmlformats.org/presentationml/2006/main">
-  <p:tag name="KSO_WM_DIAGRAM_VIRTUALLY_FRAME" val="{&quot;height&quot;:333.6,&quot;left&quot;:18.55,&quot;top&quot;:138.6,&quot;width&quot;:957.2494488188977}"/>
+  <p:tag name="KSO_WM_DIAGRAM_VIRTUALLY_FRAME" val="{&quot;height&quot;:333.7,&quot;left&quot;:181.0367716535433,&quot;top&quot;:150.5,&quot;width&quot;:585.2126771653544}"/>
 </p:tagLst>
 </file>
 
 <file path=ppt/tags/tag73.xml><?xml version="1.0" encoding="utf-8"?>
 <p:tagLst xmlns:p="http://schemas.openxmlformats.org/presentationml/2006/main">
-  <p:tag name="KSO_WM_DIAGRAM_VIRTUALLY_FRAME" val="{&quot;height&quot;:333.6,&quot;left&quot;:18.55,&quot;top&quot;:138.6,&quot;width&quot;:957.2494488188977}"/>
+  <p:tag name="KSO_WM_DIAGRAM_VIRTUALLY_FRAME" val="{&quot;height&quot;:333.7,&quot;left&quot;:181.0367716535433,&quot;top&quot;:150.5,&quot;width&quot;:585.2126771653544}"/>
 </p:tagLst>
 </file>
 
 <file path=ppt/tags/tag74.xml><?xml version="1.0" encoding="utf-8"?>
 <p:tagLst xmlns:p="http://schemas.openxmlformats.org/presentationml/2006/main">
-  <p:tag name="KSO_WM_DIAGRAM_VIRTUALLY_FRAME" val="{&quot;height&quot;:333.6,&quot;left&quot;:18.55,&quot;top&quot;:138.6,&quot;width&quot;:957.2494488188977}"/>
+  <p:tag name="KSO_WM_DIAGRAM_VIRTUALLY_FRAME" val="{&quot;height&quot;:333.7,&quot;left&quot;:181.0367716535433,&quot;top&quot;:150.5,&quot;width&quot;:585.2126771653544}"/>
 </p:tagLst>
 </file>
 
 <file path=ppt/tags/tag75.xml><?xml version="1.0" encoding="utf-8"?>
 <p:tagLst xmlns:p="http://schemas.openxmlformats.org/presentationml/2006/main">
-  <p:tag name="KSO_WM_DIAGRAM_VIRTUALLY_FRAME" val="{&quot;height&quot;:333.6,&quot;left&quot;:18.55,&quot;top&quot;:138.6,&quot;width&quot;:957.2494488188977}"/>
+  <p:tag name="KSO_WM_DIAGRAM_VIRTUALLY_FRAME" val="{&quot;height&quot;:333.7,&quot;left&quot;:181.0367716535433,&quot;top&quot;:150.5,&quot;width&quot;:585.2126771653544}"/>
 </p:tagLst>
 </file>
 
 <file path=ppt/tags/tag76.xml><?xml version="1.0" encoding="utf-8"?>
 <p:tagLst xmlns:p="http://schemas.openxmlformats.org/presentationml/2006/main">
-  <p:tag name="KSO_WM_DIAGRAM_VIRTUALLY_FRAME" val="{&quot;height&quot;:333.6,&quot;left&quot;:18.55,&quot;top&quot;:138.6,&quot;width&quot;:957.2494488188977}"/>
+  <p:tag name="KSO_WM_DIAGRAM_VIRTUALLY_FRAME" val="{&quot;height&quot;:333.7,&quot;left&quot;:181.0367716535433,&quot;top&quot;:150.5,&quot;width&quot;:585.2126771653544}"/>
 </p:tagLst>
 </file>
 
 <file path=ppt/tags/tag77.xml><?xml version="1.0" encoding="utf-8"?>
 <p:tagLst xmlns:p="http://schemas.openxmlformats.org/presentationml/2006/main">
-  <p:tag name="KSO_WM_DIAGRAM_VIRTUALLY_FRAME" val="{&quot;height&quot;:333.6,&quot;left&quot;:18.55,&quot;top&quot;:138.6,&quot;width&quot;:957.2494488188977}"/>
+  <p:tag name="KSO_WM_DIAGRAM_VIRTUALLY_FRAME" val="{&quot;height&quot;:333.6891855480546,&quot;left&quot;:181.0367716535433,&quot;top&quot;:150.5,&quot;width&quot;:585.2126771653544}"/>
 </p:tagLst>
 </file>
 
 <file path=ppt/tags/tag78.xml><?xml version="1.0" encoding="utf-8"?>
 <p:tagLst xmlns:p="http://schemas.openxmlformats.org/presentationml/2006/main">
-  <p:tag name="KSO_WM_DIAGRAM_VIRTUALLY_FRAME" val="{&quot;height&quot;:333.6,&quot;left&quot;:18.55,&quot;top&quot;:138.6,&quot;width&quot;:957.2494488188977}"/>
+  <p:tag name="KSO_WM_DIAGRAM_VIRTUALLY_FRAME" val="{&quot;height&quot;:333.7,&quot;left&quot;:181.0367716535433,&quot;top&quot;:150.5,&quot;width&quot;:585.2126771653544}"/>
 </p:tagLst>
 </file>
 
 <file path=ppt/tags/tag79.xml><?xml version="1.0" encoding="utf-8"?>
 <p:tagLst xmlns:p="http://schemas.openxmlformats.org/presentationml/2006/main">
-  <p:tag name="KSO_WM_DIAGRAM_VIRTUALLY_FRAME" val="{&quot;height&quot;:333.6,&quot;left&quot;:18.55,&quot;top&quot;:138.6,&quot;width&quot;:957.2494488188977}"/>
+  <p:tag name="KSO_WM_DIAGRAM_VIRTUALLY_FRAME" val="{&quot;height&quot;:333.7,&quot;left&quot;:181.0367716535433,&quot;top&quot;:150.5,&quot;width&quot;:585.2126771653544}"/>
 </p:tagLst>
 </file>
 
@@ -23040,43 +19019,43 @@
 
 <file path=ppt/tags/tag80.xml><?xml version="1.0" encoding="utf-8"?>
 <p:tagLst xmlns:p="http://schemas.openxmlformats.org/presentationml/2006/main">
-  <p:tag name="KSO_WM_DIAGRAM_VIRTUALLY_FRAME" val="{&quot;height&quot;:333.6,&quot;left&quot;:18.55,&quot;top&quot;:138.6,&quot;width&quot;:957.2494488188977}"/>
+  <p:tag name="KSO_WM_DIAGRAM_VIRTUALLY_FRAME" val="{&quot;height&quot;:333.7,&quot;left&quot;:181.0367716535433,&quot;top&quot;:150.5,&quot;width&quot;:585.2126771653544}"/>
 </p:tagLst>
 </file>
 
 <file path=ppt/tags/tag81.xml><?xml version="1.0" encoding="utf-8"?>
 <p:tagLst xmlns:p="http://schemas.openxmlformats.org/presentationml/2006/main">
-  <p:tag name="KSO_WM_DIAGRAM_VIRTUALLY_FRAME" val="{&quot;height&quot;:333.6,&quot;left&quot;:18.55,&quot;top&quot;:138.6,&quot;width&quot;:957.2494488188977}"/>
+  <p:tag name="KSO_WM_DIAGRAM_VIRTUALLY_FRAME" val="{&quot;height&quot;:333.7,&quot;left&quot;:181.0367716535433,&quot;top&quot;:150.5,&quot;width&quot;:585.2126771653544}"/>
 </p:tagLst>
 </file>
 
 <file path=ppt/tags/tag82.xml><?xml version="1.0" encoding="utf-8"?>
 <p:tagLst xmlns:p="http://schemas.openxmlformats.org/presentationml/2006/main">
-  <p:tag name="KSO_WM_DIAGRAM_VIRTUALLY_FRAME" val="{&quot;height&quot;:333.6,&quot;left&quot;:18.55,&quot;top&quot;:138.6,&quot;width&quot;:957.2494488188977}"/>
+  <p:tag name="KSO_WM_BEAUTIFY_FLAG" val=""/>
 </p:tagLst>
 </file>
 
 <file path=ppt/tags/tag83.xml><?xml version="1.0" encoding="utf-8"?>
 <p:tagLst xmlns:p="http://schemas.openxmlformats.org/presentationml/2006/main">
-  <p:tag name="KSO_WM_DIAGRAM_VIRTUALLY_FRAME" val="{&quot;height&quot;:333.6,&quot;left&quot;:18.55,&quot;top&quot;:138.6,&quot;width&quot;:957.2494488188977}"/>
+  <p:tag name="KSO_WM_BEAUTIFY_FLAG" val=""/>
 </p:tagLst>
 </file>
 
 <file path=ppt/tags/tag84.xml><?xml version="1.0" encoding="utf-8"?>
 <p:tagLst xmlns:p="http://schemas.openxmlformats.org/presentationml/2006/main">
-  <p:tag name="KSO_WM_DIAGRAM_VIRTUALLY_FRAME" val="{&quot;height&quot;:333.6,&quot;left&quot;:18.55,&quot;top&quot;:138.6,&quot;width&quot;:957.2494488188977}"/>
+  <p:tag name="KSO_WM_BEAUTIFY_FLAG" val=""/>
 </p:tagLst>
 </file>
 
 <file path=ppt/tags/tag85.xml><?xml version="1.0" encoding="utf-8"?>
 <p:tagLst xmlns:p="http://schemas.openxmlformats.org/presentationml/2006/main">
-  <p:tag name="KSO_WM_DIAGRAM_VIRTUALLY_FRAME" val="{&quot;height&quot;:333.6,&quot;left&quot;:18.55,&quot;top&quot;:138.6,&quot;width&quot;:957.2494488188977}"/>
+  <p:tag name="KSO_WM_BEAUTIFY_FLAG" val=""/>
 </p:tagLst>
 </file>
 
 <file path=ppt/tags/tag86.xml><?xml version="1.0" encoding="utf-8"?>
 <p:tagLst xmlns:p="http://schemas.openxmlformats.org/presentationml/2006/main">
-  <p:tag name="KSO_WM_DIAGRAM_VIRTUALLY_FRAME" val="{&quot;height&quot;:333.6,&quot;left&quot;:18.55,&quot;top&quot;:138.6,&quot;width&quot;:957.2494488188977}"/>
+  <p:tag name="KSO_WM_BEAUTIFY_FLAG" val=""/>
 </p:tagLst>
 </file>
 
@@ -23125,35 +19104,30 @@
 
 <file path=ppt/tags/tag92.xml><?xml version="1.0" encoding="utf-8"?>
 <p:tagLst xmlns:p="http://schemas.openxmlformats.org/presentationml/2006/main">
+  <p:tag name="KSO_WM_UNIT_NOCLEAR" val="0"/>
+  <p:tag name="KSO_WM_UNIT_HIGHLIGHT" val="0"/>
+  <p:tag name="KSO_WM_UNIT_COMPATIBLE" val="0"/>
+  <p:tag name="KSO_WM_UNIT_DIAGRAM_ISNUMVISUAL" val="0"/>
+  <p:tag name="KSO_WM_UNIT_DIAGRAM_ISREFERUNIT" val="0"/>
+  <p:tag name="KSO_WM_UNIT_TYPE" val="m_h_i"/>
+  <p:tag name="KSO_WM_UNIT_INDEX" val="1_1_1"/>
+  <p:tag name="KSO_WM_UNIT_ID" val="diagram726_1*m_h_i*1_1_1"/>
+  <p:tag name="KSO_WM_TEMPLATE_CATEGORY" val="diagram"/>
+  <p:tag name="KSO_WM_TEMPLATE_INDEX" val="726"/>
+  <p:tag name="KSO_WM_UNIT_LAYERLEVEL" val="1_1_1"/>
+  <p:tag name="KSO_WM_TAG_VERSION" val="1.0"/>
   <p:tag name="KSO_WM_BEAUTIFY_FLAG" val=""/>
+  <p:tag name="KSO_WM_DIAGRAM_GROUP_CODE" val="m1-1"/>
+  <p:tag name="KSO_WM_UNIT_FILL_FORE_SCHEMECOLOR_INDEX" val="5"/>
+  <p:tag name="KSO_WM_UNIT_FILL_TYPE" val="1"/>
+  <p:tag name="KSO_WM_UNIT_TEXT_FILL_FORE_SCHEMECOLOR_INDEX" val="2"/>
+  <p:tag name="KSO_WM_UNIT_TEXT_FILL_TYPE" val="1"/>
+  <p:tag name="KSO_WM_UNIT_DIAGRAM_SCHEMECOLOR_ID" val="1"/>
+  <p:tag name="KSO_WM_UNIT_USESOURCEFORMAT_APPLY" val="1"/>
 </p:tagLst>
 </file>
 
 <file path=ppt/tags/tag93.xml><?xml version="1.0" encoding="utf-8"?>
-<p:tagLst xmlns:p="http://schemas.openxmlformats.org/presentationml/2006/main">
-  <p:tag name="KSO_WM_BEAUTIFY_FLAG" val=""/>
-</p:tagLst>
-</file>
-
-<file path=ppt/tags/tag94.xml><?xml version="1.0" encoding="utf-8"?>
-<p:tagLst xmlns:p="http://schemas.openxmlformats.org/presentationml/2006/main">
-  <p:tag name="KSO_WM_BEAUTIFY_FLAG" val=""/>
-</p:tagLst>
-</file>
-
-<file path=ppt/tags/tag95.xml><?xml version="1.0" encoding="utf-8"?>
-<p:tagLst xmlns:p="http://schemas.openxmlformats.org/presentationml/2006/main">
-  <p:tag name="KSO_WM_BEAUTIFY_FLAG" val=""/>
-</p:tagLst>
-</file>
-
-<file path=ppt/tags/tag96.xml><?xml version="1.0" encoding="utf-8"?>
-<p:tagLst xmlns:p="http://schemas.openxmlformats.org/presentationml/2006/main">
-  <p:tag name="KSO_WM_BEAUTIFY_FLAG" val=""/>
-</p:tagLst>
-</file>
-
-<file path=ppt/tags/tag97.xml><?xml version="1.0" encoding="utf-8"?>
 <p:tagLst xmlns:p="http://schemas.openxmlformats.org/presentationml/2006/main">
   <p:tag name="KSO_WM_UNIT_NOCLEAR" val="0"/>
   <p:tag name="KSO_WM_UNIT_HIGHLIGHT" val="0"/>
@@ -23178,34 +19152,39 @@
 </p:tagLst>
 </file>
 
+<file path=ppt/tags/tag94.xml><?xml version="1.0" encoding="utf-8"?>
+<p:tagLst xmlns:p="http://schemas.openxmlformats.org/presentationml/2006/main">
+  <p:tag name="KSO_WM_BEAUTIFY_FLAG" val=""/>
+</p:tagLst>
+</file>
+
+<file path=ppt/tags/tag95.xml><?xml version="1.0" encoding="utf-8"?>
+<p:tagLst xmlns:p="http://schemas.openxmlformats.org/presentationml/2006/main">
+  <p:tag name="KSO_WM_DIAGRAM_VIRTUALLY_FRAME" val="{&quot;height&quot;:333.7,&quot;left&quot;:116.85,&quot;top&quot;:150.5,&quot;width&quot;:710.2425984251968}"/>
+</p:tagLst>
+</file>
+
+<file path=ppt/tags/tag96.xml><?xml version="1.0" encoding="utf-8"?>
+<p:tagLst xmlns:p="http://schemas.openxmlformats.org/presentationml/2006/main">
+  <p:tag name="KSO_WM_DIAGRAM_VIRTUALLY_FRAME" val="{&quot;height&quot;:333.7,&quot;left&quot;:116.85,&quot;top&quot;:150.5,&quot;width&quot;:710.2425984251968}"/>
+</p:tagLst>
+</file>
+
+<file path=ppt/tags/tag97.xml><?xml version="1.0" encoding="utf-8"?>
+<p:tagLst xmlns:p="http://schemas.openxmlformats.org/presentationml/2006/main">
+  <p:tag name="KSO_WM_DIAGRAM_VIRTUALLY_FRAME" val="{&quot;height&quot;:333.7,&quot;left&quot;:116.85,&quot;top&quot;:150.5,&quot;width&quot;:710.2425984251968}"/>
+</p:tagLst>
+</file>
+
 <file path=ppt/tags/tag98.xml><?xml version="1.0" encoding="utf-8"?>
 <p:tagLst xmlns:p="http://schemas.openxmlformats.org/presentationml/2006/main">
-  <p:tag name="KSO_WM_UNIT_NOCLEAR" val="0"/>
-  <p:tag name="KSO_WM_UNIT_HIGHLIGHT" val="0"/>
-  <p:tag name="KSO_WM_UNIT_COMPATIBLE" val="0"/>
-  <p:tag name="KSO_WM_UNIT_DIAGRAM_ISNUMVISUAL" val="0"/>
-  <p:tag name="KSO_WM_UNIT_DIAGRAM_ISREFERUNIT" val="0"/>
-  <p:tag name="KSO_WM_UNIT_TYPE" val="m_h_i"/>
-  <p:tag name="KSO_WM_UNIT_INDEX" val="1_1_1"/>
-  <p:tag name="KSO_WM_UNIT_ID" val="diagram726_1*m_h_i*1_1_1"/>
-  <p:tag name="KSO_WM_TEMPLATE_CATEGORY" val="diagram"/>
-  <p:tag name="KSO_WM_TEMPLATE_INDEX" val="726"/>
-  <p:tag name="KSO_WM_UNIT_LAYERLEVEL" val="1_1_1"/>
-  <p:tag name="KSO_WM_TAG_VERSION" val="1.0"/>
-  <p:tag name="KSO_WM_BEAUTIFY_FLAG" val=""/>
-  <p:tag name="KSO_WM_DIAGRAM_GROUP_CODE" val="m1-1"/>
-  <p:tag name="KSO_WM_UNIT_FILL_FORE_SCHEMECOLOR_INDEX" val="5"/>
-  <p:tag name="KSO_WM_UNIT_FILL_TYPE" val="1"/>
-  <p:tag name="KSO_WM_UNIT_TEXT_FILL_FORE_SCHEMECOLOR_INDEX" val="2"/>
-  <p:tag name="KSO_WM_UNIT_TEXT_FILL_TYPE" val="1"/>
-  <p:tag name="KSO_WM_UNIT_DIAGRAM_SCHEMECOLOR_ID" val="1"/>
-  <p:tag name="KSO_WM_UNIT_USESOURCEFORMAT_APPLY" val="1"/>
+  <p:tag name="KSO_WM_DIAGRAM_VIRTUALLY_FRAME" val="{&quot;height&quot;:333.7,&quot;left&quot;:116.85,&quot;top&quot;:150.5,&quot;width&quot;:710.2425984251968}"/>
 </p:tagLst>
 </file>
 
 <file path=ppt/tags/tag99.xml><?xml version="1.0" encoding="utf-8"?>
 <p:tagLst xmlns:p="http://schemas.openxmlformats.org/presentationml/2006/main">
-  <p:tag name="KSO_WM_BEAUTIFY_FLAG" val=""/>
+  <p:tag name="KSO_WM_DIAGRAM_VIRTUALLY_FRAME" val="{&quot;height&quot;:333.7,&quot;left&quot;:116.85,&quot;top&quot;:150.5,&quot;width&quot;:710.2425984251968}"/>
 </p:tagLst>
 </file>
 
